--- a/hutan-desa-pasir/Roadmap_HD_Pasir_PVClimate.pptx
+++ b/hutan-desa-pasir/Roadmap_HD_Pasir_PVClimate.pptx
@@ -3850,7 +3850,7 @@
                 </a:solidFill>
                 <a:latin typeface="Calibri"/>
               </a:rPr>
-              <a:t>Okt 2026 – ±Apr 2028 · Dukungan: TAF · Pelaksana: SAMPAN Kalimantan &amp; LPHD Pasir</a:t>
+              <a:t>Okt 2026 – Sep 2027 · Dukungan: TAF · Pelaksana: SAMPAN Kalimantan &amp; LPHD Pasir</a:t>
             </a:r>
           </a:p>
         </p:txBody>
@@ -4545,7 +4545,7 @@
                 </a:solidFill>
                 <a:latin typeface="Calibri"/>
               </a:rPr>
-              <a:t>PIN Template V1.4</a:t>
+              <a:t>Diajukan ≤ Mei 2027</a:t>
             </a:r>
           </a:p>
           <a:p>
@@ -4557,7 +4557,7 @@
                 </a:solidFill>
                 <a:latin typeface="Calibri"/>
               </a:rPr>
-              <a:t>+ PIN review fee</a:t>
+              <a:t>(PIN Template V1.4)</a:t>
             </a:r>
           </a:p>
         </p:txBody>
@@ -4715,7 +4715,7 @@
                 </a:solidFill>
                 <a:latin typeface="Calibri"/>
               </a:rPr>
-              <a:t>PIN disetujui Plan Vivo</a:t>
+              <a:t>Target Sep 2027 — keputusan</a:t>
             </a:r>
           </a:p>
           <a:p>
@@ -4727,7 +4727,7 @@
                 </a:solidFill>
                 <a:latin typeface="Calibri"/>
               </a:rPr>
-              <a:t>(bukan otomatis)</a:t>
+              <a:t>Plan Vivo, bukan otomatis</a:t>
             </a:r>
           </a:p>
         </p:txBody>
@@ -5039,7 +5039,7 @@
                 </a:solidFill>
                 <a:latin typeface="Calibri"/>
               </a:rPr>
-              <a:t>2028 → · Dukungan: pendanaan lanjutan</a:t>
+              <a:t>Q4 2027 → · Dukungan: pendanaan lanjutan</a:t>
             </a:r>
           </a:p>
         </p:txBody>
@@ -6480,7 +6480,7 @@
                 </a:solidFill>
                 <a:latin typeface="Calibri"/>
               </a:rPr>
-              <a:t>Persiapan → PIN → Pipeline · SAMPAN Kalimantan &amp; LPHD Pasir · Okt 2026 – ±Apr 2028</a:t>
+              <a:t>Persiapan → PIN → Pipeline · SAMPAN Kalimantan &amp; LPHD Pasir · Okt 2026 – Sep 2027</a:t>
             </a:r>
           </a:p>
         </p:txBody>
@@ -6558,7 +6558,7 @@
                 </a:solidFill>
                 <a:latin typeface="Calibri"/>
               </a:rPr>
-              <a:t>PDD → kredit → penjualan · 2028+ (indikatif)</a:t>
+              <a:t>PDD → kredit → penjualan · Q4 2027+ (indikatif)</a:t>
             </a:r>
           </a:p>
         </p:txBody>
@@ -6738,7 +6738,7 @@
                 </a:solidFill>
                 <a:latin typeface="Calibri"/>
               </a:rPr>
-              <a:t>Okt 26–Des 26</a:t>
+              <a:t>Okt 26–Nov 26</a:t>
             </a:r>
           </a:p>
         </p:txBody>
@@ -6906,7 +6906,7 @@
                 </a:solidFill>
                 <a:latin typeface="Calibri"/>
               </a:rPr>
-              <a:t>Nov 26–Jan 27</a:t>
+              <a:t>Nov 26–Des 26</a:t>
             </a:r>
           </a:p>
         </p:txBody>
@@ -7074,7 +7074,7 @@
                 </a:solidFill>
                 <a:latin typeface="Calibri"/>
               </a:rPr>
-              <a:t>Jan 27–Jul 27</a:t>
+              <a:t>Des 26–Apr 27</a:t>
             </a:r>
           </a:p>
         </p:txBody>
@@ -7242,7 +7242,7 @@
                 </a:solidFill>
                 <a:latin typeface="Calibri"/>
               </a:rPr>
-              <a:t>Mar 27–Sep 27</a:t>
+              <a:t>Jan 27–Jul 27</a:t>
             </a:r>
           </a:p>
         </p:txBody>
@@ -7410,7 +7410,7 @@
                 </a:solidFill>
                 <a:latin typeface="Calibri"/>
               </a:rPr>
-              <a:t>Feb 27–Agu 27</a:t>
+              <a:t>Des 26–Apr 27</a:t>
             </a:r>
           </a:p>
         </p:txBody>
@@ -7578,7 +7578,7 @@
                 </a:solidFill>
                 <a:latin typeface="Calibri"/>
               </a:rPr>
-              <a:t>Agu 27–Nov 27</a:t>
+              <a:t>Mar 27–Mei 27</a:t>
             </a:r>
           </a:p>
         </p:txBody>
@@ -7746,7 +7746,7 @@
                 </a:solidFill>
                 <a:latin typeface="Calibri"/>
               </a:rPr>
-              <a:t>Nov 27–Apr 28</a:t>
+              <a:t>Mei 27–Sep 27</a:t>
             </a:r>
           </a:p>
         </p:txBody>
@@ -7916,7 +7916,7 @@
                 </a:solidFill>
                 <a:latin typeface="Calibri"/>
               </a:rPr>
-              <a:t>2028–2029</a:t>
+              <a:t>2027–2029</a:t>
             </a:r>
           </a:p>
         </p:txBody>
@@ -8809,7 +8809,7 @@
         <p:spPr>
           <a:xfrm>
             <a:off x="777240" y="3767328"/>
-            <a:ext cx="1025090" cy="100584"/>
+            <a:ext cx="865632" cy="100584"/>
           </a:xfrm>
           <a:prstGeom prst="rect">
             <a:avLst/>
@@ -8873,8 +8873,8 @@
         </p:nvSpPr>
         <p:spPr>
           <a:xfrm>
-            <a:off x="1118936" y="3922776"/>
-            <a:ext cx="1025090" cy="100584"/>
+            <a:off x="1210056" y="3922776"/>
+            <a:ext cx="865632" cy="100584"/>
           </a:xfrm>
           <a:prstGeom prst="rect">
             <a:avLst/>
@@ -8938,8 +8938,8 @@
         </p:nvSpPr>
         <p:spPr>
           <a:xfrm>
-            <a:off x="1802330" y="4078224"/>
-            <a:ext cx="2391877" cy="100584"/>
+            <a:off x="1642872" y="4078224"/>
+            <a:ext cx="2164079" cy="100584"/>
           </a:xfrm>
           <a:prstGeom prst="rect">
             <a:avLst/>
@@ -9003,8 +9003,8 @@
         </p:nvSpPr>
         <p:spPr>
           <a:xfrm>
-            <a:off x="2485724" y="4233672"/>
-            <a:ext cx="2391877" cy="100584"/>
+            <a:off x="2075688" y="4233672"/>
+            <a:ext cx="3029711" cy="100584"/>
           </a:xfrm>
           <a:prstGeom prst="rect">
             <a:avLst/>
@@ -9068,8 +9068,8 @@
         </p:nvSpPr>
         <p:spPr>
           <a:xfrm>
-            <a:off x="2144027" y="4389120"/>
-            <a:ext cx="2391877" cy="100584"/>
+            <a:off x="1642872" y="4389120"/>
+            <a:ext cx="2164079" cy="100584"/>
           </a:xfrm>
           <a:prstGeom prst="rect">
             <a:avLst/>
@@ -9133,8 +9133,8 @@
         </p:nvSpPr>
         <p:spPr>
           <a:xfrm>
-            <a:off x="4194208" y="4544568"/>
-            <a:ext cx="1366787" cy="100584"/>
+            <a:off x="2941320" y="4544568"/>
+            <a:ext cx="1298448" cy="100584"/>
           </a:xfrm>
           <a:prstGeom prst="rect">
             <a:avLst/>
@@ -9198,8 +9198,8 @@
         </p:nvSpPr>
         <p:spPr>
           <a:xfrm>
-            <a:off x="5219298" y="4700016"/>
-            <a:ext cx="2050181" cy="100584"/>
+            <a:off x="3806952" y="4700016"/>
+            <a:ext cx="2164080" cy="100584"/>
           </a:xfrm>
           <a:prstGeom prst="rect">
             <a:avLst/>
@@ -9263,7 +9263,7 @@
         </p:nvSpPr>
         <p:spPr>
           <a:xfrm>
-            <a:off x="1528010" y="4855464"/>
+            <a:off x="1801368" y="4855464"/>
             <a:ext cx="548640" cy="164592"/>
           </a:xfrm>
           <a:prstGeom prst="rect">
@@ -9298,7 +9298,7 @@
         </p:nvSpPr>
         <p:spPr>
           <a:xfrm>
-            <a:off x="2553101" y="4855464"/>
+            <a:off x="3099816" y="4855464"/>
             <a:ext cx="548640" cy="164592"/>
           </a:xfrm>
           <a:prstGeom prst="rect">
@@ -9333,7 +9333,7 @@
         </p:nvSpPr>
         <p:spPr>
           <a:xfrm>
-            <a:off x="3578191" y="4855464"/>
+            <a:off x="4398264" y="4855464"/>
             <a:ext cx="548640" cy="164592"/>
           </a:xfrm>
           <a:prstGeom prst="rect">
@@ -9368,7 +9368,7 @@
         </p:nvSpPr>
         <p:spPr>
           <a:xfrm>
-            <a:off x="4603282" y="4855464"/>
+            <a:off x="5696712" y="4855464"/>
             <a:ext cx="548640" cy="164592"/>
           </a:xfrm>
           <a:prstGeom prst="rect">
@@ -9395,41 +9395,41 @@
           </a:p>
         </p:txBody>
       </p:sp>
-      <p:sp>
-        <p:nvSpPr>
-          <p:cNvPr id="81" name="TextBox 80"/>
-          <p:cNvSpPr txBox="1"/>
-          <p:nvPr/>
-        </p:nvSpPr>
-        <p:spPr>
-          <a:xfrm>
-            <a:off x="5628372" y="4855464"/>
-            <a:ext cx="548640" cy="164592"/>
-          </a:xfrm>
-          <a:prstGeom prst="rect">
-            <a:avLst/>
-          </a:prstGeom>
-          <a:noFill/>
-        </p:spPr>
-        <p:txBody>
-          <a:bodyPr wrap="square" lIns="18288" rIns="18288" tIns="9144" bIns="9144" anchor="t">
-            <a:spAutoFit/>
-          </a:bodyPr>
-          <a:lstStyle/>
-          <a:p>
-            <a:pPr algn="ctr"/>
-            <a:r>
-              <a:rPr sz="650" b="0" i="0">
-                <a:solidFill>
-                  <a:srgbClr val="5F6B65"/>
-                </a:solidFill>
-                <a:latin typeface="Calibri"/>
-              </a:rPr>
-              <a:t>Jan 28</a:t>
-            </a:r>
-          </a:p>
-        </p:txBody>
-      </p:sp>
+      <p:cxnSp>
+        <p:nvCxnSpPr>
+          <p:cNvPr id="81" name="Connector 80"/>
+          <p:cNvCxnSpPr/>
+          <p:nvPr/>
+        </p:nvCxnSpPr>
+        <p:spPr>
+          <a:xfrm>
+            <a:off x="5971032" y="3721608"/>
+            <a:ext cx="0" cy="1133856"/>
+          </a:xfrm>
+          <a:prstGeom prst="line">
+            <a:avLst/>
+          </a:prstGeom>
+          <a:ln w="15875">
+            <a:solidFill>
+              <a:srgbClr val="C26A0A"/>
+            </a:solidFill>
+          </a:ln>
+        </p:spPr>
+        <p:style>
+          <a:lnRef idx="2">
+            <a:schemeClr val="accent1"/>
+          </a:lnRef>
+          <a:fillRef idx="0">
+            <a:schemeClr val="accent1"/>
+          </a:fillRef>
+          <a:effectRef idx="1">
+            <a:schemeClr val="accent1"/>
+          </a:effectRef>
+          <a:fontRef idx="minor">
+            <a:schemeClr val="tx1"/>
+          </a:fontRef>
+        </p:style>
+      </p:cxnSp>
       <p:sp>
         <p:nvSpPr>
           <p:cNvPr id="82" name="TextBox 81"/>
@@ -9438,43 +9438,90 @@
         </p:nvSpPr>
         <p:spPr>
           <a:xfrm>
-            <a:off x="6653463" y="4855464"/>
-            <a:ext cx="548640" cy="164592"/>
-          </a:xfrm>
-          <a:prstGeom prst="rect">
-            <a:avLst/>
-          </a:prstGeom>
-          <a:noFill/>
-        </p:spPr>
-        <p:txBody>
-          <a:bodyPr wrap="square" lIns="18288" rIns="18288" tIns="9144" bIns="9144" anchor="t">
-            <a:spAutoFit/>
-          </a:bodyPr>
-          <a:lstStyle/>
-          <a:p>
-            <a:pPr algn="ctr"/>
-            <a:r>
-              <a:rPr sz="650" b="0" i="0">
-                <a:solidFill>
-                  <a:srgbClr val="5F6B65"/>
-                </a:solidFill>
-                <a:latin typeface="Calibri"/>
-              </a:rPr>
-              <a:t>Apr 28</a:t>
-            </a:r>
-          </a:p>
-        </p:txBody>
-      </p:sp>
-      <p:sp>
-        <p:nvSpPr>
-          <p:cNvPr id="83" name="Rectangle 82"/>
+            <a:off x="6007608" y="3547872"/>
+            <a:ext cx="1463040" cy="182880"/>
+          </a:xfrm>
+          <a:prstGeom prst="rect">
+            <a:avLst/>
+          </a:prstGeom>
+          <a:noFill/>
+        </p:spPr>
+        <p:txBody>
+          <a:bodyPr wrap="square" lIns="18288" rIns="18288" tIns="9144" bIns="9144" anchor="t">
+            <a:spAutoFit/>
+          </a:bodyPr>
+          <a:lstStyle/>
+          <a:p>
+            <a:pPr algn="l"/>
+            <a:r>
+              <a:rPr sz="700" b="1" i="0">
+                <a:solidFill>
+                  <a:srgbClr val="C26A0A"/>
+                </a:solidFill>
+                <a:latin typeface="Calibri"/>
+              </a:rPr>
+              <a:t>Akhir TAF · Sep 27</a:t>
+            </a:r>
+          </a:p>
+        </p:txBody>
+      </p:sp>
+      <p:sp>
+        <p:nvSpPr>
+          <p:cNvPr id="83" name="TextBox 82"/>
+          <p:cNvSpPr txBox="1"/>
+          <p:nvPr/>
+        </p:nvSpPr>
+        <p:spPr>
+          <a:xfrm>
+            <a:off x="6007608" y="4526280"/>
+            <a:ext cx="914400" cy="329184"/>
+          </a:xfrm>
+          <a:prstGeom prst="rect">
+            <a:avLst/>
+          </a:prstGeom>
+          <a:noFill/>
+        </p:spPr>
+        <p:txBody>
+          <a:bodyPr wrap="square" lIns="18288" rIns="18288" tIns="9144" bIns="9144" anchor="t">
+            <a:spAutoFit/>
+          </a:bodyPr>
+          <a:lstStyle/>
+          <a:p>
+            <a:pPr algn="l"/>
+            <a:r>
+              <a:rPr sz="650" b="0" i="1">
+                <a:solidFill>
+                  <a:srgbClr val="C26A0A"/>
+                </a:solidFill>
+                <a:latin typeface="Calibri"/>
+              </a:rPr>
+              <a:t>buffer review</a:t>
+            </a:r>
+          </a:p>
+          <a:p>
+            <a:pPr algn="l"/>
+            <a:r>
+              <a:rPr sz="650" b="0" i="1">
+                <a:solidFill>
+                  <a:srgbClr val="C26A0A"/>
+                </a:solidFill>
+                <a:latin typeface="Calibri"/>
+              </a:rPr>
+              <a:t>di luar TAF</a:t>
+            </a:r>
+          </a:p>
+        </p:txBody>
+      </p:sp>
+      <p:sp>
+        <p:nvSpPr>
+          <p:cNvPr id="84" name="Rectangle 83"/>
           <p:cNvSpPr/>
           <p:nvPr/>
         </p:nvSpPr>
         <p:spPr>
           <a:xfrm>
-            <a:off x="1802330" y="4046220"/>
-            <a:ext cx="3075271" cy="466344"/>
+            <a:off x="1642872" y="4046220"/>
+            <a:ext cx="3462527" cy="466344"/>
           </a:xfrm>
           <a:prstGeom prst="rect">
             <a:avLst/>
@@ -9498,14 +9545,14 @@
       </p:sp>
       <p:sp>
         <p:nvSpPr>
-          <p:cNvPr id="84" name="TextBox 83"/>
-          <p:cNvSpPr txBox="1"/>
-          <p:nvPr/>
-        </p:nvSpPr>
-        <p:spPr>
-          <a:xfrm>
-            <a:off x="4923322" y="4059936"/>
-            <a:ext cx="1737360" cy="457200"/>
+          <p:cNvPr id="85" name="TextBox 84"/>
+          <p:cNvSpPr txBox="1"/>
+          <p:nvPr/>
+        </p:nvSpPr>
+        <p:spPr>
+          <a:xfrm>
+            <a:off x="1688592" y="5010912"/>
+            <a:ext cx="3200400" cy="182880"/>
           </a:xfrm>
           <a:prstGeom prst="rect">
             <a:avLst/>
@@ -9526,26 +9573,14 @@
                 </a:solidFill>
                 <a:latin typeface="Calibri"/>
               </a:rPr>
-              <a:t>∥ M3 · M4 · M5 berjalan paralel</a:t>
-            </a:r>
-          </a:p>
-          <a:p>
-            <a:pPr algn="l"/>
-            <a:r>
-              <a:rPr sz="750" b="1" i="0">
-                <a:solidFill>
-                  <a:srgbClr val="0E7C6B"/>
-                </a:solidFill>
-                <a:latin typeface="Calibri"/>
-              </a:rPr>
-              <a:t>(bulan 4–12)</a:t>
-            </a:r>
-          </a:p>
-        </p:txBody>
-      </p:sp>
-      <p:sp>
-        <p:nvSpPr>
-          <p:cNvPr id="85" name="TextBox 84"/>
+              <a:t>∥ M3 · M4 · M5 berjalan paralel (bulan 3–10)</a:t>
+            </a:r>
+          </a:p>
+        </p:txBody>
+      </p:sp>
+      <p:sp>
+        <p:nvSpPr>
+          <p:cNvPr id="86" name="TextBox 85"/>
           <p:cNvSpPr txBox="1"/>
           <p:nvPr/>
         </p:nvSpPr>
@@ -9580,7 +9615,7 @@
       </p:sp>
       <p:sp>
         <p:nvSpPr>
-          <p:cNvPr id="86" name="TextBox 85"/>
+          <p:cNvPr id="87" name="TextBox 86"/>
           <p:cNvSpPr txBox="1"/>
           <p:nvPr/>
         </p:nvSpPr>
@@ -9615,14 +9650,14 @@
       </p:sp>
       <p:sp>
         <p:nvSpPr>
-          <p:cNvPr id="87" name="Rectangle 86"/>
+          <p:cNvPr id="88" name="Rectangle 87"/>
           <p:cNvSpPr/>
           <p:nvPr/>
         </p:nvSpPr>
         <p:spPr>
           <a:xfrm>
-            <a:off x="7902244" y="3767328"/>
-            <a:ext cx="877823" cy="100584"/>
+            <a:off x="7909307" y="3767328"/>
+            <a:ext cx="869752" cy="100584"/>
           </a:xfrm>
           <a:prstGeom prst="rect">
             <a:avLst/>
@@ -9645,7 +9680,7 @@
       </p:sp>
       <p:sp>
         <p:nvSpPr>
-          <p:cNvPr id="88" name="TextBox 87"/>
+          <p:cNvPr id="89" name="TextBox 88"/>
           <p:cNvSpPr txBox="1"/>
           <p:nvPr/>
         </p:nvSpPr>
@@ -9680,14 +9715,14 @@
       </p:sp>
       <p:sp>
         <p:nvSpPr>
-          <p:cNvPr id="89" name="Rectangle 88"/>
+          <p:cNvPr id="90" name="Rectangle 89"/>
           <p:cNvSpPr/>
           <p:nvPr/>
         </p:nvSpPr>
         <p:spPr>
           <a:xfrm>
-            <a:off x="8663025" y="3922776"/>
-            <a:ext cx="585215" cy="100584"/>
+            <a:off x="8670340" y="3922776"/>
+            <a:ext cx="543595" cy="100584"/>
           </a:xfrm>
           <a:prstGeom prst="rect">
             <a:avLst/>
@@ -9710,7 +9745,7 @@
       </p:sp>
       <p:sp>
         <p:nvSpPr>
-          <p:cNvPr id="90" name="TextBox 89"/>
+          <p:cNvPr id="91" name="TextBox 90"/>
           <p:cNvSpPr txBox="1"/>
           <p:nvPr/>
         </p:nvSpPr>
@@ -9745,14 +9780,14 @@
       </p:sp>
       <p:sp>
         <p:nvSpPr>
-          <p:cNvPr id="91" name="Rectangle 90"/>
+          <p:cNvPr id="92" name="Rectangle 91"/>
           <p:cNvSpPr/>
           <p:nvPr/>
         </p:nvSpPr>
         <p:spPr>
           <a:xfrm>
-            <a:off x="9189719" y="4078224"/>
-            <a:ext cx="2633472" cy="100584"/>
+            <a:off x="9159576" y="4078224"/>
+            <a:ext cx="2663615" cy="100584"/>
           </a:xfrm>
           <a:prstGeom prst="rect">
             <a:avLst/>
@@ -9775,7 +9810,7 @@
       </p:sp>
       <p:sp>
         <p:nvSpPr>
-          <p:cNvPr id="92" name="TextBox 91"/>
+          <p:cNvPr id="93" name="TextBox 92"/>
           <p:cNvSpPr txBox="1"/>
           <p:nvPr/>
         </p:nvSpPr>
@@ -9810,14 +9845,14 @@
       </p:sp>
       <p:sp>
         <p:nvSpPr>
-          <p:cNvPr id="93" name="Rectangle 92"/>
+          <p:cNvPr id="94" name="Rectangle 93"/>
           <p:cNvSpPr/>
           <p:nvPr/>
         </p:nvSpPr>
         <p:spPr>
           <a:xfrm>
-            <a:off x="10067544" y="4233672"/>
-            <a:ext cx="409651" cy="100584"/>
+            <a:off x="10029328" y="4233672"/>
+            <a:ext cx="380516" cy="100584"/>
           </a:xfrm>
           <a:prstGeom prst="rect">
             <a:avLst/>
@@ -9840,7 +9875,7 @@
       </p:sp>
       <p:sp>
         <p:nvSpPr>
-          <p:cNvPr id="94" name="TextBox 93"/>
+          <p:cNvPr id="95" name="TextBox 94"/>
           <p:cNvSpPr txBox="1"/>
           <p:nvPr/>
         </p:nvSpPr>
@@ -9875,14 +9910,14 @@
       </p:sp>
       <p:sp>
         <p:nvSpPr>
-          <p:cNvPr id="95" name="Rectangle 94"/>
+          <p:cNvPr id="96" name="Rectangle 95"/>
           <p:cNvSpPr/>
           <p:nvPr/>
         </p:nvSpPr>
         <p:spPr>
           <a:xfrm>
-            <a:off x="8077809" y="4389120"/>
-            <a:ext cx="3745382" cy="100584"/>
+            <a:off x="8126745" y="4389120"/>
+            <a:ext cx="3696446" cy="100584"/>
           </a:xfrm>
           <a:prstGeom prst="rect">
             <a:avLst/>
@@ -9907,14 +9942,14 @@
       </p:sp>
       <p:sp>
         <p:nvSpPr>
-          <p:cNvPr id="96" name="Rectangle 95"/>
+          <p:cNvPr id="97" name="Rectangle 96"/>
           <p:cNvSpPr/>
           <p:nvPr/>
         </p:nvSpPr>
         <p:spPr>
           <a:xfrm>
-            <a:off x="11472062" y="4233672"/>
-            <a:ext cx="351129" cy="100584"/>
+            <a:off x="11497034" y="4233672"/>
+            <a:ext cx="326157" cy="100584"/>
           </a:xfrm>
           <a:prstGeom prst="rect">
             <a:avLst/>
@@ -9938,13 +9973,13 @@
       </p:sp>
       <p:sp>
         <p:nvSpPr>
-          <p:cNvPr id="97" name="TextBox 96"/>
-          <p:cNvSpPr txBox="1"/>
-          <p:nvPr/>
-        </p:nvSpPr>
-        <p:spPr>
-          <a:xfrm>
-            <a:off x="7498079" y="4562856"/>
+          <p:cNvPr id="98" name="TextBox 97"/>
+          <p:cNvSpPr txBox="1"/>
+          <p:nvPr/>
+        </p:nvSpPr>
+        <p:spPr>
+          <a:xfrm>
+            <a:off x="7789426" y="4562856"/>
             <a:ext cx="457200" cy="164592"/>
           </a:xfrm>
           <a:prstGeom prst="rect">
@@ -9973,13 +10008,13 @@
       </p:sp>
       <p:sp>
         <p:nvSpPr>
-          <p:cNvPr id="98" name="TextBox 97"/>
-          <p:cNvSpPr txBox="1"/>
-          <p:nvPr/>
-        </p:nvSpPr>
-        <p:spPr>
-          <a:xfrm>
-            <a:off x="8083296" y="4562856"/>
+          <p:cNvPr id="99" name="TextBox 98"/>
+          <p:cNvSpPr txBox="1"/>
+          <p:nvPr/>
+        </p:nvSpPr>
+        <p:spPr>
+          <a:xfrm>
+            <a:off x="8333021" y="4562856"/>
             <a:ext cx="457200" cy="164592"/>
           </a:xfrm>
           <a:prstGeom prst="rect">
@@ -10008,13 +10043,13 @@
       </p:sp>
       <p:sp>
         <p:nvSpPr>
-          <p:cNvPr id="99" name="TextBox 98"/>
-          <p:cNvSpPr txBox="1"/>
-          <p:nvPr/>
-        </p:nvSpPr>
-        <p:spPr>
-          <a:xfrm>
-            <a:off x="8668511" y="4562856"/>
+          <p:cNvPr id="100" name="TextBox 99"/>
+          <p:cNvSpPr txBox="1"/>
+          <p:nvPr/>
+        </p:nvSpPr>
+        <p:spPr>
+          <a:xfrm>
+            <a:off x="8876616" y="4562856"/>
             <a:ext cx="457200" cy="164592"/>
           </a:xfrm>
           <a:prstGeom prst="rect">
@@ -10043,13 +10078,13 @@
       </p:sp>
       <p:sp>
         <p:nvSpPr>
-          <p:cNvPr id="100" name="TextBox 99"/>
-          <p:cNvSpPr txBox="1"/>
-          <p:nvPr/>
-        </p:nvSpPr>
-        <p:spPr>
-          <a:xfrm>
-            <a:off x="9253728" y="4562856"/>
+          <p:cNvPr id="101" name="TextBox 100"/>
+          <p:cNvSpPr txBox="1"/>
+          <p:nvPr/>
+        </p:nvSpPr>
+        <p:spPr>
+          <a:xfrm>
+            <a:off x="9420211" y="4562856"/>
             <a:ext cx="457200" cy="164592"/>
           </a:xfrm>
           <a:prstGeom prst="rect">
@@ -10078,13 +10113,13 @@
       </p:sp>
       <p:sp>
         <p:nvSpPr>
-          <p:cNvPr id="101" name="TextBox 100"/>
-          <p:cNvSpPr txBox="1"/>
-          <p:nvPr/>
-        </p:nvSpPr>
-        <p:spPr>
-          <a:xfrm>
-            <a:off x="9838944" y="4562856"/>
+          <p:cNvPr id="102" name="TextBox 101"/>
+          <p:cNvSpPr txBox="1"/>
+          <p:nvPr/>
+        </p:nvSpPr>
+        <p:spPr>
+          <a:xfrm>
+            <a:off x="9963806" y="4562856"/>
             <a:ext cx="457200" cy="164592"/>
           </a:xfrm>
           <a:prstGeom prst="rect">
@@ -10113,13 +10148,13 @@
       </p:sp>
       <p:sp>
         <p:nvSpPr>
-          <p:cNvPr id="102" name="TextBox 101"/>
-          <p:cNvSpPr txBox="1"/>
-          <p:nvPr/>
-        </p:nvSpPr>
-        <p:spPr>
-          <a:xfrm>
-            <a:off x="10424159" y="4562856"/>
+          <p:cNvPr id="103" name="TextBox 102"/>
+          <p:cNvSpPr txBox="1"/>
+          <p:nvPr/>
+        </p:nvSpPr>
+        <p:spPr>
+          <a:xfrm>
+            <a:off x="10507401" y="4562856"/>
             <a:ext cx="457200" cy="164592"/>
           </a:xfrm>
           <a:prstGeom prst="rect">
@@ -10148,13 +10183,13 @@
       </p:sp>
       <p:sp>
         <p:nvSpPr>
-          <p:cNvPr id="103" name="TextBox 102"/>
-          <p:cNvSpPr txBox="1"/>
-          <p:nvPr/>
-        </p:nvSpPr>
-        <p:spPr>
-          <a:xfrm>
-            <a:off x="11009376" y="4562856"/>
+          <p:cNvPr id="104" name="TextBox 103"/>
+          <p:cNvSpPr txBox="1"/>
+          <p:nvPr/>
+        </p:nvSpPr>
+        <p:spPr>
+          <a:xfrm>
+            <a:off x="11050996" y="4562856"/>
             <a:ext cx="457200" cy="164592"/>
           </a:xfrm>
           <a:prstGeom prst="rect">
@@ -10177,41 +10212,6 @@
                 <a:latin typeface="Calibri"/>
               </a:rPr>
               <a:t>2034</a:t>
-            </a:r>
-          </a:p>
-        </p:txBody>
-      </p:sp>
-      <p:sp>
-        <p:nvSpPr>
-          <p:cNvPr id="104" name="TextBox 103"/>
-          <p:cNvSpPr txBox="1"/>
-          <p:nvPr/>
-        </p:nvSpPr>
-        <p:spPr>
-          <a:xfrm>
-            <a:off x="11594592" y="4562856"/>
-            <a:ext cx="457200" cy="164592"/>
-          </a:xfrm>
-          <a:prstGeom prst="rect">
-            <a:avLst/>
-          </a:prstGeom>
-          <a:noFill/>
-        </p:spPr>
-        <p:txBody>
-          <a:bodyPr wrap="square" lIns="18288" rIns="18288" tIns="9144" bIns="9144" anchor="t">
-            <a:spAutoFit/>
-          </a:bodyPr>
-          <a:lstStyle/>
-          <a:p>
-            <a:pPr algn="ctr"/>
-            <a:r>
-              <a:rPr sz="650" b="0" i="0">
-                <a:solidFill>
-                  <a:srgbClr val="5F6B65"/>
-                </a:solidFill>
-                <a:latin typeface="Calibri"/>
-              </a:rPr>
-              <a:t/>
             </a:r>
           </a:p>
         </p:txBody>
@@ -10860,7 +10860,7 @@
                 </a:solidFill>
                 <a:latin typeface="Cambria"/>
               </a:rPr>
-              <a:t>Jalur kritis melewati FPIC dan keputusan metodologi —</a:t>
+              <a:t>PIN harus dikirim Mei 2027 agar keputusan Plan Vivo dapat</a:t>
             </a:r>
           </a:p>
           <a:p>
@@ -10872,7 +10872,7 @@
                 </a:solidFill>
                 <a:latin typeface="Cambria"/>
               </a:rPr>
-              <a:t>PIN dikirim paling lambat bulan ke-14 (Nov 2027)</a:t>
+              <a:t>keluar sebelum TAF berakhir September 2027</a:t>
             </a:r>
           </a:p>
         </p:txBody>
@@ -10921,7 +10921,7 @@
         <p:spPr>
           <a:xfrm>
             <a:off x="3063240" y="1371600"/>
-            <a:ext cx="451906" cy="329184"/>
+            <a:ext cx="574852" cy="329184"/>
           </a:xfrm>
           <a:prstGeom prst="rect">
             <a:avLst/>
@@ -10951,7 +10951,7 @@
         <p:spPr>
           <a:xfrm>
             <a:off x="3063240" y="1380744"/>
-            <a:ext cx="461050" cy="329184"/>
+            <a:ext cx="583996" cy="329184"/>
           </a:xfrm>
           <a:prstGeom prst="rect">
             <a:avLst/>
@@ -10997,8 +10997,8 @@
         </p:nvSpPr>
         <p:spPr>
           <a:xfrm>
-            <a:off x="3524290" y="1371600"/>
-            <a:ext cx="451906" cy="329184"/>
+            <a:off x="3647236" y="1371600"/>
+            <a:ext cx="574852" cy="329184"/>
           </a:xfrm>
           <a:prstGeom prst="rect">
             <a:avLst/>
@@ -11027,8 +11027,8 @@
         </p:nvSpPr>
         <p:spPr>
           <a:xfrm>
-            <a:off x="3524290" y="1380744"/>
-            <a:ext cx="461050" cy="329184"/>
+            <a:off x="3647236" y="1380744"/>
+            <a:ext cx="583996" cy="329184"/>
           </a:xfrm>
           <a:prstGeom prst="rect">
             <a:avLst/>
@@ -11074,8 +11074,8 @@
         </p:nvSpPr>
         <p:spPr>
           <a:xfrm>
-            <a:off x="3985340" y="1371600"/>
-            <a:ext cx="451906" cy="329184"/>
+            <a:off x="4231233" y="1371600"/>
+            <a:ext cx="574852" cy="329184"/>
           </a:xfrm>
           <a:prstGeom prst="rect">
             <a:avLst/>
@@ -11104,8 +11104,8 @@
         </p:nvSpPr>
         <p:spPr>
           <a:xfrm>
-            <a:off x="3985340" y="1380744"/>
-            <a:ext cx="461050" cy="329184"/>
+            <a:off x="4231233" y="1380744"/>
+            <a:ext cx="583996" cy="329184"/>
           </a:xfrm>
           <a:prstGeom prst="rect">
             <a:avLst/>
@@ -11151,8 +11151,8 @@
         </p:nvSpPr>
         <p:spPr>
           <a:xfrm>
-            <a:off x="4446390" y="1371600"/>
-            <a:ext cx="451906" cy="329184"/>
+            <a:off x="4815230" y="1371600"/>
+            <a:ext cx="574852" cy="329184"/>
           </a:xfrm>
           <a:prstGeom prst="rect">
             <a:avLst/>
@@ -11181,8 +11181,8 @@
         </p:nvSpPr>
         <p:spPr>
           <a:xfrm>
-            <a:off x="4446390" y="1380744"/>
-            <a:ext cx="461050" cy="329184"/>
+            <a:off x="4815230" y="1380744"/>
+            <a:ext cx="583996" cy="329184"/>
           </a:xfrm>
           <a:prstGeom prst="rect">
             <a:avLst/>
@@ -11228,8 +11228,8 @@
         </p:nvSpPr>
         <p:spPr>
           <a:xfrm>
-            <a:off x="4907440" y="1371600"/>
-            <a:ext cx="451906" cy="329184"/>
+            <a:off x="5399227" y="1371600"/>
+            <a:ext cx="574852" cy="329184"/>
           </a:xfrm>
           <a:prstGeom prst="rect">
             <a:avLst/>
@@ -11258,8 +11258,8 @@
         </p:nvSpPr>
         <p:spPr>
           <a:xfrm>
-            <a:off x="4907440" y="1380744"/>
-            <a:ext cx="461050" cy="329184"/>
+            <a:off x="5399227" y="1380744"/>
+            <a:ext cx="583996" cy="329184"/>
           </a:xfrm>
           <a:prstGeom prst="rect">
             <a:avLst/>
@@ -11305,8 +11305,8 @@
         </p:nvSpPr>
         <p:spPr>
           <a:xfrm>
-            <a:off x="5368490" y="1371600"/>
-            <a:ext cx="451906" cy="329184"/>
+            <a:off x="5983224" y="1371600"/>
+            <a:ext cx="574852" cy="329184"/>
           </a:xfrm>
           <a:prstGeom prst="rect">
             <a:avLst/>
@@ -11335,8 +11335,8 @@
         </p:nvSpPr>
         <p:spPr>
           <a:xfrm>
-            <a:off x="5368490" y="1380744"/>
-            <a:ext cx="461050" cy="329184"/>
+            <a:off x="5983224" y="1380744"/>
+            <a:ext cx="583996" cy="329184"/>
           </a:xfrm>
           <a:prstGeom prst="rect">
             <a:avLst/>
@@ -11382,8 +11382,8 @@
         </p:nvSpPr>
         <p:spPr>
           <a:xfrm>
-            <a:off x="5829540" y="1371600"/>
-            <a:ext cx="451906" cy="329184"/>
+            <a:off x="6567220" y="1371600"/>
+            <a:ext cx="574852" cy="329184"/>
           </a:xfrm>
           <a:prstGeom prst="rect">
             <a:avLst/>
@@ -11412,8 +11412,8 @@
         </p:nvSpPr>
         <p:spPr>
           <a:xfrm>
-            <a:off x="5829540" y="1380744"/>
-            <a:ext cx="461050" cy="329184"/>
+            <a:off x="6567220" y="1380744"/>
+            <a:ext cx="583996" cy="329184"/>
           </a:xfrm>
           <a:prstGeom prst="rect">
             <a:avLst/>
@@ -11459,8 +11459,8 @@
         </p:nvSpPr>
         <p:spPr>
           <a:xfrm>
-            <a:off x="6290590" y="1371600"/>
-            <a:ext cx="451906" cy="329184"/>
+            <a:off x="7151217" y="1371600"/>
+            <a:ext cx="574852" cy="329184"/>
           </a:xfrm>
           <a:prstGeom prst="rect">
             <a:avLst/>
@@ -11489,8 +11489,8 @@
         </p:nvSpPr>
         <p:spPr>
           <a:xfrm>
-            <a:off x="6290590" y="1380744"/>
-            <a:ext cx="461050" cy="329184"/>
+            <a:off x="7151217" y="1380744"/>
+            <a:ext cx="583996" cy="329184"/>
           </a:xfrm>
           <a:prstGeom prst="rect">
             <a:avLst/>
@@ -11536,8 +11536,8 @@
         </p:nvSpPr>
         <p:spPr>
           <a:xfrm>
-            <a:off x="6751640" y="1371600"/>
-            <a:ext cx="451906" cy="329184"/>
+            <a:off x="7735214" y="1371600"/>
+            <a:ext cx="574852" cy="329184"/>
           </a:xfrm>
           <a:prstGeom prst="rect">
             <a:avLst/>
@@ -11566,8 +11566,8 @@
         </p:nvSpPr>
         <p:spPr>
           <a:xfrm>
-            <a:off x="6751640" y="1380744"/>
-            <a:ext cx="461050" cy="329184"/>
+            <a:off x="7735214" y="1380744"/>
+            <a:ext cx="583996" cy="329184"/>
           </a:xfrm>
           <a:prstGeom prst="rect">
             <a:avLst/>
@@ -11613,8 +11613,8 @@
         </p:nvSpPr>
         <p:spPr>
           <a:xfrm>
-            <a:off x="7212690" y="1371600"/>
-            <a:ext cx="451906" cy="329184"/>
+            <a:off x="8319211" y="1371600"/>
+            <a:ext cx="574852" cy="329184"/>
           </a:xfrm>
           <a:prstGeom prst="rect">
             <a:avLst/>
@@ -11643,8 +11643,8 @@
         </p:nvSpPr>
         <p:spPr>
           <a:xfrm>
-            <a:off x="7212690" y="1380744"/>
-            <a:ext cx="461050" cy="329184"/>
+            <a:off x="8319211" y="1380744"/>
+            <a:ext cx="583996" cy="329184"/>
           </a:xfrm>
           <a:prstGeom prst="rect">
             <a:avLst/>
@@ -11690,8 +11690,8 @@
         </p:nvSpPr>
         <p:spPr>
           <a:xfrm>
-            <a:off x="7673741" y="1371600"/>
-            <a:ext cx="451906" cy="329184"/>
+            <a:off x="8903208" y="1371600"/>
+            <a:ext cx="574852" cy="329184"/>
           </a:xfrm>
           <a:prstGeom prst="rect">
             <a:avLst/>
@@ -11720,8 +11720,8 @@
         </p:nvSpPr>
         <p:spPr>
           <a:xfrm>
-            <a:off x="7673741" y="1380744"/>
-            <a:ext cx="461050" cy="329184"/>
+            <a:off x="8903208" y="1380744"/>
+            <a:ext cx="583996" cy="329184"/>
           </a:xfrm>
           <a:prstGeom prst="rect">
             <a:avLst/>
@@ -11767,8 +11767,8 @@
         </p:nvSpPr>
         <p:spPr>
           <a:xfrm>
-            <a:off x="8134791" y="1371600"/>
-            <a:ext cx="451906" cy="329184"/>
+            <a:off x="9487204" y="1371600"/>
+            <a:ext cx="574852" cy="329184"/>
           </a:xfrm>
           <a:prstGeom prst="rect">
             <a:avLst/>
@@ -11797,8 +11797,8 @@
         </p:nvSpPr>
         <p:spPr>
           <a:xfrm>
-            <a:off x="8134791" y="1380744"/>
-            <a:ext cx="461050" cy="329184"/>
+            <a:off x="9487204" y="1380744"/>
+            <a:ext cx="583996" cy="329184"/>
           </a:xfrm>
           <a:prstGeom prst="rect">
             <a:avLst/>
@@ -11844,162 +11844,8 @@
         </p:nvSpPr>
         <p:spPr>
           <a:xfrm>
-            <a:off x="8595841" y="1371600"/>
-            <a:ext cx="451906" cy="329184"/>
-          </a:xfrm>
-          <a:prstGeom prst="rect">
-            <a:avLst/>
-          </a:prstGeom>
-          <a:solidFill>
-            <a:srgbClr val="E3F1EE"/>
-          </a:solidFill>
-          <a:ln>
-            <a:noFill/>
-          </a:ln>
-          <a:effectLst/>
-        </p:spPr>
-        <p:txBody>
-          <a:bodyPr rtlCol="0" anchor="ctr"/>
-          <a:lstStyle/>
-          <a:p>
-            <a:pPr algn="ctr"/>
-          </a:p>
-        </p:txBody>
-      </p:sp>
-      <p:sp>
-        <p:nvSpPr>
-          <p:cNvPr id="30" name="TextBox 29"/>
-          <p:cNvSpPr txBox="1"/>
-          <p:nvPr/>
-        </p:nvSpPr>
-        <p:spPr>
-          <a:xfrm>
-            <a:off x="8595841" y="1380744"/>
-            <a:ext cx="461050" cy="329184"/>
-          </a:xfrm>
-          <a:prstGeom prst="rect">
-            <a:avLst/>
-          </a:prstGeom>
-          <a:noFill/>
-        </p:spPr>
-        <p:txBody>
-          <a:bodyPr wrap="square" lIns="18288" rIns="18288" tIns="9144" bIns="9144" anchor="t">
-            <a:spAutoFit/>
-          </a:bodyPr>
-          <a:lstStyle/>
-          <a:p>
-            <a:pPr algn="ctr"/>
-            <a:r>
-              <a:rPr sz="650" b="0" i="0">
-                <a:solidFill>
-                  <a:srgbClr val="5F6B65"/>
-                </a:solidFill>
-                <a:latin typeface="Calibri"/>
-              </a:rPr>
-              <a:t>Okt</a:t>
-            </a:r>
-          </a:p>
-          <a:p>
-            <a:pPr algn="ctr"/>
-            <a:r>
-              <a:rPr sz="650" b="0" i="0">
-                <a:solidFill>
-                  <a:srgbClr val="5F6B65"/>
-                </a:solidFill>
-                <a:latin typeface="Calibri"/>
-              </a:rPr>
-              <a:t>27</a:t>
-            </a:r>
-          </a:p>
-        </p:txBody>
-      </p:sp>
-      <p:sp>
-        <p:nvSpPr>
-          <p:cNvPr id="31" name="Rectangle 30"/>
-          <p:cNvSpPr/>
-          <p:nvPr/>
-        </p:nvSpPr>
-        <p:spPr>
-          <a:xfrm>
-            <a:off x="9056891" y="1371600"/>
-            <a:ext cx="451906" cy="329184"/>
-          </a:xfrm>
-          <a:prstGeom prst="rect">
-            <a:avLst/>
-          </a:prstGeom>
-          <a:solidFill>
-            <a:srgbClr val="E3F1EE"/>
-          </a:solidFill>
-          <a:ln>
-            <a:noFill/>
-          </a:ln>
-          <a:effectLst/>
-        </p:spPr>
-        <p:txBody>
-          <a:bodyPr rtlCol="0" anchor="ctr"/>
-          <a:lstStyle/>
-          <a:p>
-            <a:pPr algn="ctr"/>
-          </a:p>
-        </p:txBody>
-      </p:sp>
-      <p:sp>
-        <p:nvSpPr>
-          <p:cNvPr id="32" name="TextBox 31"/>
-          <p:cNvSpPr txBox="1"/>
-          <p:nvPr/>
-        </p:nvSpPr>
-        <p:spPr>
-          <a:xfrm>
-            <a:off x="9056891" y="1380744"/>
-            <a:ext cx="461050" cy="329184"/>
-          </a:xfrm>
-          <a:prstGeom prst="rect">
-            <a:avLst/>
-          </a:prstGeom>
-          <a:noFill/>
-        </p:spPr>
-        <p:txBody>
-          <a:bodyPr wrap="square" lIns="18288" rIns="18288" tIns="9144" bIns="9144" anchor="t">
-            <a:spAutoFit/>
-          </a:bodyPr>
-          <a:lstStyle/>
-          <a:p>
-            <a:pPr algn="ctr"/>
-            <a:r>
-              <a:rPr sz="650" b="0" i="0">
-                <a:solidFill>
-                  <a:srgbClr val="5F6B65"/>
-                </a:solidFill>
-                <a:latin typeface="Calibri"/>
-              </a:rPr>
-              <a:t>Nov</a:t>
-            </a:r>
-          </a:p>
-          <a:p>
-            <a:pPr algn="ctr"/>
-            <a:r>
-              <a:rPr sz="650" b="0" i="0">
-                <a:solidFill>
-                  <a:srgbClr val="5F6B65"/>
-                </a:solidFill>
-                <a:latin typeface="Calibri"/>
-              </a:rPr>
-              <a:t>27</a:t>
-            </a:r>
-          </a:p>
-        </p:txBody>
-      </p:sp>
-      <p:sp>
-        <p:nvSpPr>
-          <p:cNvPr id="33" name="Rectangle 32"/>
-          <p:cNvSpPr/>
-          <p:nvPr/>
-        </p:nvSpPr>
-        <p:spPr>
-          <a:xfrm>
-            <a:off x="9517941" y="1371600"/>
-            <a:ext cx="451906" cy="329184"/>
+            <a:off x="10071201" y="1371600"/>
+            <a:ext cx="574852" cy="329184"/>
           </a:xfrm>
           <a:prstGeom prst="rect">
             <a:avLst/>
@@ -12022,14 +11868,14 @@
       </p:sp>
       <p:sp>
         <p:nvSpPr>
-          <p:cNvPr id="34" name="TextBox 33"/>
-          <p:cNvSpPr txBox="1"/>
-          <p:nvPr/>
-        </p:nvSpPr>
-        <p:spPr>
-          <a:xfrm>
-            <a:off x="9517941" y="1380744"/>
-            <a:ext cx="461050" cy="329184"/>
+          <p:cNvPr id="30" name="TextBox 29"/>
+          <p:cNvSpPr txBox="1"/>
+          <p:nvPr/>
+        </p:nvSpPr>
+        <p:spPr>
+          <a:xfrm>
+            <a:off x="10071201" y="1380744"/>
+            <a:ext cx="583996" cy="329184"/>
           </a:xfrm>
           <a:prstGeom prst="rect">
             <a:avLst/>
@@ -12050,7 +11896,7 @@
                 </a:solidFill>
                 <a:latin typeface="Calibri"/>
               </a:rPr>
-              <a:t>Des</a:t>
+              <a:t>Okt</a:t>
             </a:r>
           </a:p>
           <a:p>
@@ -12069,14 +11915,14 @@
       </p:sp>
       <p:sp>
         <p:nvSpPr>
-          <p:cNvPr id="35" name="Rectangle 34"/>
+          <p:cNvPr id="31" name="Rectangle 30"/>
           <p:cNvSpPr/>
           <p:nvPr/>
         </p:nvSpPr>
         <p:spPr>
           <a:xfrm>
-            <a:off x="9978991" y="1371600"/>
-            <a:ext cx="451906" cy="329184"/>
+            <a:off x="10655198" y="1371600"/>
+            <a:ext cx="574852" cy="329184"/>
           </a:xfrm>
           <a:prstGeom prst="rect">
             <a:avLst/>
@@ -12099,14 +11945,14 @@
       </p:sp>
       <p:sp>
         <p:nvSpPr>
-          <p:cNvPr id="36" name="TextBox 35"/>
-          <p:cNvSpPr txBox="1"/>
-          <p:nvPr/>
-        </p:nvSpPr>
-        <p:spPr>
-          <a:xfrm>
-            <a:off x="9978991" y="1380744"/>
-            <a:ext cx="461050" cy="329184"/>
+          <p:cNvPr id="32" name="TextBox 31"/>
+          <p:cNvSpPr txBox="1"/>
+          <p:nvPr/>
+        </p:nvSpPr>
+        <p:spPr>
+          <a:xfrm>
+            <a:off x="10655198" y="1380744"/>
+            <a:ext cx="583996" cy="329184"/>
           </a:xfrm>
           <a:prstGeom prst="rect">
             <a:avLst/>
@@ -12127,7 +11973,7 @@
                 </a:solidFill>
                 <a:latin typeface="Calibri"/>
               </a:rPr>
-              <a:t>Jan</a:t>
+              <a:t>Nov</a:t>
             </a:r>
           </a:p>
           <a:p>
@@ -12139,21 +11985,21 @@
                 </a:solidFill>
                 <a:latin typeface="Calibri"/>
               </a:rPr>
-              <a:t>28</a:t>
-            </a:r>
-          </a:p>
-        </p:txBody>
-      </p:sp>
-      <p:sp>
-        <p:nvSpPr>
-          <p:cNvPr id="37" name="Rectangle 36"/>
+              <a:t>27</a:t>
+            </a:r>
+          </a:p>
+        </p:txBody>
+      </p:sp>
+      <p:sp>
+        <p:nvSpPr>
+          <p:cNvPr id="33" name="Rectangle 32"/>
           <p:cNvSpPr/>
           <p:nvPr/>
         </p:nvSpPr>
         <p:spPr>
           <a:xfrm>
-            <a:off x="10440041" y="1371600"/>
-            <a:ext cx="451906" cy="329184"/>
+            <a:off x="11239195" y="1371600"/>
+            <a:ext cx="574852" cy="329184"/>
           </a:xfrm>
           <a:prstGeom prst="rect">
             <a:avLst/>
@@ -12176,14 +12022,14 @@
       </p:sp>
       <p:sp>
         <p:nvSpPr>
-          <p:cNvPr id="38" name="TextBox 37"/>
-          <p:cNvSpPr txBox="1"/>
-          <p:nvPr/>
-        </p:nvSpPr>
-        <p:spPr>
-          <a:xfrm>
-            <a:off x="10440041" y="1380744"/>
-            <a:ext cx="461050" cy="329184"/>
+          <p:cNvPr id="34" name="TextBox 33"/>
+          <p:cNvSpPr txBox="1"/>
+          <p:nvPr/>
+        </p:nvSpPr>
+        <p:spPr>
+          <a:xfrm>
+            <a:off x="11239195" y="1380744"/>
+            <a:ext cx="583996" cy="329184"/>
           </a:xfrm>
           <a:prstGeom prst="rect">
             <a:avLst/>
@@ -12204,7 +12050,7 @@
                 </a:solidFill>
                 <a:latin typeface="Calibri"/>
               </a:rPr>
-              <a:t>Feb</a:t>
+              <a:t>Des</a:t>
             </a:r>
           </a:p>
           <a:p>
@@ -12216,168 +12062,14 @@
                 </a:solidFill>
                 <a:latin typeface="Calibri"/>
               </a:rPr>
-              <a:t>28</a:t>
-            </a:r>
-          </a:p>
-        </p:txBody>
-      </p:sp>
-      <p:sp>
-        <p:nvSpPr>
-          <p:cNvPr id="39" name="Rectangle 38"/>
-          <p:cNvSpPr/>
-          <p:nvPr/>
-        </p:nvSpPr>
-        <p:spPr>
-          <a:xfrm>
-            <a:off x="10901091" y="1371600"/>
-            <a:ext cx="451906" cy="329184"/>
-          </a:xfrm>
-          <a:prstGeom prst="rect">
-            <a:avLst/>
-          </a:prstGeom>
-          <a:solidFill>
-            <a:srgbClr val="F6EBDD"/>
-          </a:solidFill>
-          <a:ln>
-            <a:noFill/>
-          </a:ln>
-          <a:effectLst/>
-        </p:spPr>
-        <p:txBody>
-          <a:bodyPr rtlCol="0" anchor="ctr"/>
-          <a:lstStyle/>
-          <a:p>
-            <a:pPr algn="ctr"/>
-          </a:p>
-        </p:txBody>
-      </p:sp>
-      <p:sp>
-        <p:nvSpPr>
-          <p:cNvPr id="40" name="TextBox 39"/>
-          <p:cNvSpPr txBox="1"/>
-          <p:nvPr/>
-        </p:nvSpPr>
-        <p:spPr>
-          <a:xfrm>
-            <a:off x="10901091" y="1380744"/>
-            <a:ext cx="461050" cy="329184"/>
-          </a:xfrm>
-          <a:prstGeom prst="rect">
-            <a:avLst/>
-          </a:prstGeom>
-          <a:noFill/>
-        </p:spPr>
-        <p:txBody>
-          <a:bodyPr wrap="square" lIns="18288" rIns="18288" tIns="9144" bIns="9144" anchor="t">
-            <a:spAutoFit/>
-          </a:bodyPr>
-          <a:lstStyle/>
-          <a:p>
-            <a:pPr algn="ctr"/>
-            <a:r>
-              <a:rPr sz="650" b="0" i="0">
-                <a:solidFill>
-                  <a:srgbClr val="5F6B65"/>
-                </a:solidFill>
-                <a:latin typeface="Calibri"/>
-              </a:rPr>
-              <a:t>Mar</a:t>
-            </a:r>
-          </a:p>
-          <a:p>
-            <a:pPr algn="ctr"/>
-            <a:r>
-              <a:rPr sz="650" b="0" i="0">
-                <a:solidFill>
-                  <a:srgbClr val="5F6B65"/>
-                </a:solidFill>
-                <a:latin typeface="Calibri"/>
-              </a:rPr>
-              <a:t>28</a:t>
-            </a:r>
-          </a:p>
-        </p:txBody>
-      </p:sp>
-      <p:sp>
-        <p:nvSpPr>
-          <p:cNvPr id="41" name="Rectangle 40"/>
-          <p:cNvSpPr/>
-          <p:nvPr/>
-        </p:nvSpPr>
-        <p:spPr>
-          <a:xfrm>
-            <a:off x="11362141" y="1371600"/>
-            <a:ext cx="451906" cy="329184"/>
-          </a:xfrm>
-          <a:prstGeom prst="rect">
-            <a:avLst/>
-          </a:prstGeom>
-          <a:solidFill>
-            <a:srgbClr val="F6EBDD"/>
-          </a:solidFill>
-          <a:ln>
-            <a:noFill/>
-          </a:ln>
-          <a:effectLst/>
-        </p:spPr>
-        <p:txBody>
-          <a:bodyPr rtlCol="0" anchor="ctr"/>
-          <a:lstStyle/>
-          <a:p>
-            <a:pPr algn="ctr"/>
-          </a:p>
-        </p:txBody>
-      </p:sp>
-      <p:sp>
-        <p:nvSpPr>
-          <p:cNvPr id="42" name="TextBox 41"/>
-          <p:cNvSpPr txBox="1"/>
-          <p:nvPr/>
-        </p:nvSpPr>
-        <p:spPr>
-          <a:xfrm>
-            <a:off x="11362141" y="1380744"/>
-            <a:ext cx="461050" cy="329184"/>
-          </a:xfrm>
-          <a:prstGeom prst="rect">
-            <a:avLst/>
-          </a:prstGeom>
-          <a:noFill/>
-        </p:spPr>
-        <p:txBody>
-          <a:bodyPr wrap="square" lIns="18288" rIns="18288" tIns="9144" bIns="9144" anchor="t">
-            <a:spAutoFit/>
-          </a:bodyPr>
-          <a:lstStyle/>
-          <a:p>
-            <a:pPr algn="ctr"/>
-            <a:r>
-              <a:rPr sz="650" b="0" i="0">
-                <a:solidFill>
-                  <a:srgbClr val="5F6B65"/>
-                </a:solidFill>
-                <a:latin typeface="Calibri"/>
-              </a:rPr>
-              <a:t>Apr</a:t>
-            </a:r>
-          </a:p>
-          <a:p>
-            <a:pPr algn="ctr"/>
-            <a:r>
-              <a:rPr sz="650" b="0" i="0">
-                <a:solidFill>
-                  <a:srgbClr val="5F6B65"/>
-                </a:solidFill>
-                <a:latin typeface="Calibri"/>
-              </a:rPr>
-              <a:t>28</a:t>
+              <a:t>27</a:t>
             </a:r>
           </a:p>
         </p:txBody>
       </p:sp>
       <p:cxnSp>
         <p:nvCxnSpPr>
-          <p:cNvPr id="43" name="Connector 42"/>
+          <p:cNvPr id="35" name="Connector 34"/>
           <p:cNvCxnSpPr/>
           <p:nvPr/>
         </p:nvCxnSpPr>
@@ -12412,7 +12104,7 @@
       </p:cxnSp>
       <p:sp>
         <p:nvSpPr>
-          <p:cNvPr id="44" name="TextBox 43"/>
+          <p:cNvPr id="36" name="TextBox 35"/>
           <p:cNvSpPr txBox="1"/>
           <p:nvPr/>
         </p:nvSpPr>
@@ -12447,7 +12139,7 @@
       </p:sp>
       <p:sp>
         <p:nvSpPr>
-          <p:cNvPr id="45" name="TextBox 44"/>
+          <p:cNvPr id="37" name="TextBox 36"/>
           <p:cNvSpPr txBox="1"/>
           <p:nvPr/>
         </p:nvSpPr>
@@ -12482,14 +12174,14 @@
       </p:sp>
       <p:sp>
         <p:nvSpPr>
-          <p:cNvPr id="46" name="Rectangle 45"/>
+          <p:cNvPr id="38" name="Rectangle 37"/>
           <p:cNvSpPr/>
           <p:nvPr/>
         </p:nvSpPr>
         <p:spPr>
           <a:xfrm>
             <a:off x="3072384" y="1777502"/>
-            <a:ext cx="442762" cy="65562"/>
+            <a:ext cx="565708" cy="65562"/>
           </a:xfrm>
           <a:prstGeom prst="rect">
             <a:avLst/>
@@ -12512,7 +12204,7 @@
       </p:sp>
       <p:sp>
         <p:nvSpPr>
-          <p:cNvPr id="47" name="TextBox 46"/>
+          <p:cNvPr id="39" name="TextBox 38"/>
           <p:cNvSpPr txBox="1"/>
           <p:nvPr/>
         </p:nvSpPr>
@@ -12547,7 +12239,7 @@
       </p:sp>
       <p:sp>
         <p:nvSpPr>
-          <p:cNvPr id="48" name="TextBox 47"/>
+          <p:cNvPr id="40" name="TextBox 39"/>
           <p:cNvSpPr txBox="1"/>
           <p:nvPr/>
         </p:nvSpPr>
@@ -12582,14 +12274,14 @@
       </p:sp>
       <p:sp>
         <p:nvSpPr>
-          <p:cNvPr id="49" name="Rectangle 48"/>
+          <p:cNvPr id="41" name="Rectangle 40"/>
           <p:cNvSpPr/>
           <p:nvPr/>
         </p:nvSpPr>
         <p:spPr>
           <a:xfrm>
             <a:off x="3072384" y="1886772"/>
-            <a:ext cx="903812" cy="65562"/>
+            <a:ext cx="565708" cy="65562"/>
           </a:xfrm>
           <a:prstGeom prst="rect">
             <a:avLst/>
@@ -12612,7 +12304,7 @@
       </p:sp>
       <p:sp>
         <p:nvSpPr>
-          <p:cNvPr id="50" name="TextBox 49"/>
+          <p:cNvPr id="42" name="TextBox 41"/>
           <p:cNvSpPr txBox="1"/>
           <p:nvPr/>
         </p:nvSpPr>
@@ -12647,7 +12339,7 @@
       </p:sp>
       <p:sp>
         <p:nvSpPr>
-          <p:cNvPr id="51" name="TextBox 50"/>
+          <p:cNvPr id="43" name="TextBox 42"/>
           <p:cNvSpPr txBox="1"/>
           <p:nvPr/>
         </p:nvSpPr>
@@ -12682,14 +12374,14 @@
       </p:sp>
       <p:sp>
         <p:nvSpPr>
-          <p:cNvPr id="52" name="Rectangle 51"/>
+          <p:cNvPr id="44" name="Rectangle 43"/>
           <p:cNvSpPr/>
           <p:nvPr/>
         </p:nvSpPr>
         <p:spPr>
           <a:xfrm>
-            <a:off x="3533434" y="1996043"/>
-            <a:ext cx="903812" cy="65562"/>
+            <a:off x="3072384" y="1996043"/>
+            <a:ext cx="1149705" cy="65562"/>
           </a:xfrm>
           <a:prstGeom prst="rect">
             <a:avLst/>
@@ -12712,7 +12404,7 @@
       </p:sp>
       <p:sp>
         <p:nvSpPr>
-          <p:cNvPr id="53" name="TextBox 52"/>
+          <p:cNvPr id="45" name="TextBox 44"/>
           <p:cNvSpPr txBox="1"/>
           <p:nvPr/>
         </p:nvSpPr>
@@ -12747,7 +12439,7 @@
       </p:sp>
       <p:sp>
         <p:nvSpPr>
-          <p:cNvPr id="54" name="TextBox 53"/>
+          <p:cNvPr id="46" name="TextBox 45"/>
           <p:cNvSpPr txBox="1"/>
           <p:nvPr/>
         </p:nvSpPr>
@@ -12782,14 +12474,14 @@
       </p:sp>
       <p:sp>
         <p:nvSpPr>
-          <p:cNvPr id="55" name="Rectangle 54"/>
+          <p:cNvPr id="47" name="Rectangle 46"/>
           <p:cNvSpPr/>
           <p:nvPr/>
         </p:nvSpPr>
         <p:spPr>
           <a:xfrm>
             <a:off x="3072384" y="2105314"/>
-            <a:ext cx="1364862" cy="65562"/>
+            <a:ext cx="1149705" cy="65562"/>
           </a:xfrm>
           <a:prstGeom prst="rect">
             <a:avLst/>
@@ -12812,7 +12504,7 @@
       </p:sp>
       <p:cxnSp>
         <p:nvCxnSpPr>
-          <p:cNvPr id="56" name="Connector 55"/>
+          <p:cNvPr id="48" name="Connector 47"/>
           <p:cNvCxnSpPr/>
           <p:nvPr/>
         </p:nvCxnSpPr>
@@ -12847,7 +12539,7 @@
       </p:cxnSp>
       <p:sp>
         <p:nvSpPr>
-          <p:cNvPr id="57" name="TextBox 56"/>
+          <p:cNvPr id="49" name="TextBox 48"/>
           <p:cNvSpPr txBox="1"/>
           <p:nvPr/>
         </p:nvSpPr>
@@ -12882,7 +12574,7 @@
       </p:sp>
       <p:sp>
         <p:nvSpPr>
-          <p:cNvPr id="58" name="TextBox 57"/>
+          <p:cNvPr id="50" name="TextBox 49"/>
           <p:cNvSpPr txBox="1"/>
           <p:nvPr/>
         </p:nvSpPr>
@@ -12917,14 +12609,14 @@
       </p:sp>
       <p:sp>
         <p:nvSpPr>
-          <p:cNvPr id="59" name="Rectangle 58"/>
+          <p:cNvPr id="51" name="Rectangle 50"/>
           <p:cNvSpPr/>
           <p:nvPr/>
         </p:nvSpPr>
         <p:spPr>
           <a:xfrm>
-            <a:off x="3533434" y="2214585"/>
-            <a:ext cx="903812" cy="65562"/>
+            <a:off x="3656380" y="2214585"/>
+            <a:ext cx="565708" cy="65562"/>
           </a:xfrm>
           <a:prstGeom prst="rect">
             <a:avLst/>
@@ -12947,7 +12639,7 @@
       </p:sp>
       <p:sp>
         <p:nvSpPr>
-          <p:cNvPr id="60" name="TextBox 59"/>
+          <p:cNvPr id="52" name="TextBox 51"/>
           <p:cNvSpPr txBox="1"/>
           <p:nvPr/>
         </p:nvSpPr>
@@ -12982,7 +12674,7 @@
       </p:sp>
       <p:sp>
         <p:nvSpPr>
-          <p:cNvPr id="61" name="TextBox 60"/>
+          <p:cNvPr id="53" name="TextBox 52"/>
           <p:cNvSpPr txBox="1"/>
           <p:nvPr/>
         </p:nvSpPr>
@@ -13017,14 +12709,14 @@
       </p:sp>
       <p:sp>
         <p:nvSpPr>
-          <p:cNvPr id="62" name="Rectangle 61"/>
+          <p:cNvPr id="54" name="Rectangle 53"/>
           <p:cNvSpPr/>
           <p:nvPr/>
         </p:nvSpPr>
         <p:spPr>
           <a:xfrm>
-            <a:off x="3994484" y="2323856"/>
-            <a:ext cx="903812" cy="65562"/>
+            <a:off x="3656380" y="2323856"/>
+            <a:ext cx="1149705" cy="65562"/>
           </a:xfrm>
           <a:prstGeom prst="rect">
             <a:avLst/>
@@ -13047,7 +12739,7 @@
       </p:sp>
       <p:sp>
         <p:nvSpPr>
-          <p:cNvPr id="63" name="TextBox 62"/>
+          <p:cNvPr id="55" name="TextBox 54"/>
           <p:cNvSpPr txBox="1"/>
           <p:nvPr/>
         </p:nvSpPr>
@@ -13082,7 +12774,7 @@
       </p:sp>
       <p:sp>
         <p:nvSpPr>
-          <p:cNvPr id="64" name="TextBox 63"/>
+          <p:cNvPr id="56" name="TextBox 55"/>
           <p:cNvSpPr txBox="1"/>
           <p:nvPr/>
         </p:nvSpPr>
@@ -13117,14 +12809,14 @@
       </p:sp>
       <p:sp>
         <p:nvSpPr>
-          <p:cNvPr id="65" name="Rectangle 64"/>
+          <p:cNvPr id="57" name="Rectangle 56"/>
           <p:cNvSpPr/>
           <p:nvPr/>
         </p:nvSpPr>
         <p:spPr>
           <a:xfrm>
-            <a:off x="3994484" y="2433126"/>
-            <a:ext cx="903812" cy="65562"/>
+            <a:off x="3656380" y="2433126"/>
+            <a:ext cx="1149705" cy="65562"/>
           </a:xfrm>
           <a:prstGeom prst="rect">
             <a:avLst/>
@@ -13147,7 +12839,7 @@
       </p:sp>
       <p:sp>
         <p:nvSpPr>
-          <p:cNvPr id="66" name="TextBox 65"/>
+          <p:cNvPr id="58" name="TextBox 57"/>
           <p:cNvSpPr txBox="1"/>
           <p:nvPr/>
         </p:nvSpPr>
@@ -13182,7 +12874,7 @@
       </p:sp>
       <p:sp>
         <p:nvSpPr>
-          <p:cNvPr id="67" name="TextBox 66"/>
+          <p:cNvPr id="59" name="TextBox 58"/>
           <p:cNvSpPr txBox="1"/>
           <p:nvPr/>
         </p:nvSpPr>
@@ -13217,14 +12909,14 @@
       </p:sp>
       <p:sp>
         <p:nvSpPr>
-          <p:cNvPr id="68" name="Rectangle 67"/>
+          <p:cNvPr id="60" name="Rectangle 59"/>
           <p:cNvSpPr/>
           <p:nvPr/>
         </p:nvSpPr>
         <p:spPr>
           <a:xfrm>
-            <a:off x="3994484" y="2542397"/>
-            <a:ext cx="903812" cy="65562"/>
+            <a:off x="3656380" y="2542397"/>
+            <a:ext cx="1149705" cy="65562"/>
           </a:xfrm>
           <a:prstGeom prst="rect">
             <a:avLst/>
@@ -13247,7 +12939,7 @@
       </p:sp>
       <p:sp>
         <p:nvSpPr>
-          <p:cNvPr id="69" name="TextBox 68"/>
+          <p:cNvPr id="61" name="TextBox 60"/>
           <p:cNvSpPr txBox="1"/>
           <p:nvPr/>
         </p:nvSpPr>
@@ -13282,7 +12974,7 @@
       </p:sp>
       <p:sp>
         <p:nvSpPr>
-          <p:cNvPr id="70" name="TextBox 69"/>
+          <p:cNvPr id="62" name="TextBox 61"/>
           <p:cNvSpPr txBox="1"/>
           <p:nvPr/>
         </p:nvSpPr>
@@ -13317,14 +13009,14 @@
       </p:sp>
       <p:sp>
         <p:nvSpPr>
-          <p:cNvPr id="71" name="Rectangle 70"/>
+          <p:cNvPr id="63" name="Rectangle 62"/>
           <p:cNvSpPr/>
           <p:nvPr/>
         </p:nvSpPr>
         <p:spPr>
           <a:xfrm>
-            <a:off x="4455534" y="2651668"/>
-            <a:ext cx="442762" cy="65562"/>
+            <a:off x="4240377" y="2651668"/>
+            <a:ext cx="565708" cy="65562"/>
           </a:xfrm>
           <a:prstGeom prst="rect">
             <a:avLst/>
@@ -13347,7 +13039,7 @@
       </p:sp>
       <p:cxnSp>
         <p:nvCxnSpPr>
-          <p:cNvPr id="72" name="Connector 71"/>
+          <p:cNvPr id="64" name="Connector 63"/>
           <p:cNvCxnSpPr/>
           <p:nvPr/>
         </p:nvCxnSpPr>
@@ -13382,7 +13074,7 @@
       </p:cxnSp>
       <p:sp>
         <p:nvSpPr>
-          <p:cNvPr id="73" name="TextBox 72"/>
+          <p:cNvPr id="65" name="TextBox 64"/>
           <p:cNvSpPr txBox="1"/>
           <p:nvPr/>
         </p:nvSpPr>
@@ -13417,7 +13109,7 @@
       </p:sp>
       <p:sp>
         <p:nvSpPr>
-          <p:cNvPr id="74" name="TextBox 73"/>
+          <p:cNvPr id="66" name="TextBox 65"/>
           <p:cNvSpPr txBox="1"/>
           <p:nvPr/>
         </p:nvSpPr>
@@ -13452,14 +13144,14 @@
       </p:sp>
       <p:sp>
         <p:nvSpPr>
-          <p:cNvPr id="75" name="Rectangle 74"/>
+          <p:cNvPr id="67" name="Rectangle 66"/>
           <p:cNvSpPr/>
           <p:nvPr/>
         </p:nvSpPr>
         <p:spPr>
           <a:xfrm>
-            <a:off x="4455534" y="2760939"/>
-            <a:ext cx="903812" cy="65562"/>
+            <a:off x="4240377" y="2760939"/>
+            <a:ext cx="1149705" cy="65562"/>
           </a:xfrm>
           <a:prstGeom prst="rect">
             <a:avLst/>
@@ -13482,7 +13174,7 @@
       </p:sp>
       <p:sp>
         <p:nvSpPr>
-          <p:cNvPr id="76" name="TextBox 75"/>
+          <p:cNvPr id="68" name="TextBox 67"/>
           <p:cNvSpPr txBox="1"/>
           <p:nvPr/>
         </p:nvSpPr>
@@ -13517,7 +13209,7 @@
       </p:sp>
       <p:sp>
         <p:nvSpPr>
-          <p:cNvPr id="77" name="TextBox 76"/>
+          <p:cNvPr id="69" name="TextBox 68"/>
           <p:cNvSpPr txBox="1"/>
           <p:nvPr/>
         </p:nvSpPr>
@@ -13552,14 +13244,14 @@
       </p:sp>
       <p:sp>
         <p:nvSpPr>
-          <p:cNvPr id="78" name="Rectangle 77"/>
+          <p:cNvPr id="70" name="Rectangle 69"/>
           <p:cNvSpPr/>
           <p:nvPr/>
         </p:nvSpPr>
         <p:spPr>
           <a:xfrm>
-            <a:off x="4916584" y="2870210"/>
-            <a:ext cx="1825912" cy="65562"/>
+            <a:off x="4824374" y="2870210"/>
+            <a:ext cx="1733702" cy="65562"/>
           </a:xfrm>
           <a:prstGeom prst="rect">
             <a:avLst/>
@@ -13582,7 +13274,7 @@
       </p:sp>
       <p:sp>
         <p:nvSpPr>
-          <p:cNvPr id="79" name="TextBox 78"/>
+          <p:cNvPr id="71" name="TextBox 70"/>
           <p:cNvSpPr txBox="1"/>
           <p:nvPr/>
         </p:nvSpPr>
@@ -13617,7 +13309,7 @@
       </p:sp>
       <p:sp>
         <p:nvSpPr>
-          <p:cNvPr id="80" name="TextBox 79"/>
+          <p:cNvPr id="72" name="TextBox 71"/>
           <p:cNvSpPr txBox="1"/>
           <p:nvPr/>
         </p:nvSpPr>
@@ -13652,14 +13344,14 @@
       </p:sp>
       <p:sp>
         <p:nvSpPr>
-          <p:cNvPr id="81" name="Rectangle 80"/>
+          <p:cNvPr id="73" name="Rectangle 72"/>
           <p:cNvSpPr/>
           <p:nvPr/>
         </p:nvSpPr>
         <p:spPr>
           <a:xfrm>
-            <a:off x="4916584" y="2979480"/>
-            <a:ext cx="1825912" cy="65562"/>
+            <a:off x="4824374" y="2979480"/>
+            <a:ext cx="1149705" cy="65562"/>
           </a:xfrm>
           <a:prstGeom prst="rect">
             <a:avLst/>
@@ -13682,7 +13374,7 @@
       </p:sp>
       <p:sp>
         <p:nvSpPr>
-          <p:cNvPr id="82" name="TextBox 81"/>
+          <p:cNvPr id="74" name="TextBox 73"/>
           <p:cNvSpPr txBox="1"/>
           <p:nvPr/>
         </p:nvSpPr>
@@ -13717,7 +13409,7 @@
       </p:sp>
       <p:sp>
         <p:nvSpPr>
-          <p:cNvPr id="83" name="TextBox 82"/>
+          <p:cNvPr id="75" name="TextBox 74"/>
           <p:cNvSpPr txBox="1"/>
           <p:nvPr/>
         </p:nvSpPr>
@@ -13752,14 +13444,14 @@
       </p:sp>
       <p:sp>
         <p:nvSpPr>
-          <p:cNvPr id="84" name="Rectangle 83"/>
+          <p:cNvPr id="76" name="Rectangle 75"/>
           <p:cNvSpPr/>
           <p:nvPr/>
         </p:nvSpPr>
         <p:spPr>
           <a:xfrm>
-            <a:off x="5838684" y="3088751"/>
-            <a:ext cx="903812" cy="65562"/>
+            <a:off x="5408371" y="3088751"/>
+            <a:ext cx="565708" cy="65562"/>
           </a:xfrm>
           <a:prstGeom prst="rect">
             <a:avLst/>
@@ -13782,7 +13474,7 @@
       </p:sp>
       <p:sp>
         <p:nvSpPr>
-          <p:cNvPr id="85" name="TextBox 84"/>
+          <p:cNvPr id="77" name="TextBox 76"/>
           <p:cNvSpPr txBox="1"/>
           <p:nvPr/>
         </p:nvSpPr>
@@ -13817,7 +13509,7 @@
       </p:sp>
       <p:sp>
         <p:nvSpPr>
-          <p:cNvPr id="86" name="TextBox 85"/>
+          <p:cNvPr id="78" name="TextBox 77"/>
           <p:cNvSpPr txBox="1"/>
           <p:nvPr/>
         </p:nvSpPr>
@@ -13852,14 +13544,14 @@
       </p:sp>
       <p:sp>
         <p:nvSpPr>
-          <p:cNvPr id="87" name="Rectangle 86"/>
+          <p:cNvPr id="79" name="Rectangle 78"/>
           <p:cNvSpPr/>
           <p:nvPr/>
         </p:nvSpPr>
         <p:spPr>
           <a:xfrm>
-            <a:off x="6299734" y="3198022"/>
-            <a:ext cx="903812" cy="65562"/>
+            <a:off x="5992367" y="3198022"/>
+            <a:ext cx="565708" cy="65562"/>
           </a:xfrm>
           <a:prstGeom prst="rect">
             <a:avLst/>
@@ -13882,7 +13574,7 @@
       </p:sp>
       <p:sp>
         <p:nvSpPr>
-          <p:cNvPr id="88" name="TextBox 87"/>
+          <p:cNvPr id="80" name="TextBox 79"/>
           <p:cNvSpPr txBox="1"/>
           <p:nvPr/>
         </p:nvSpPr>
@@ -13917,7 +13609,7 @@
       </p:sp>
       <p:sp>
         <p:nvSpPr>
-          <p:cNvPr id="89" name="TextBox 88"/>
+          <p:cNvPr id="81" name="TextBox 80"/>
           <p:cNvSpPr txBox="1"/>
           <p:nvPr/>
         </p:nvSpPr>
@@ -13952,14 +13644,14 @@
       </p:sp>
       <p:sp>
         <p:nvSpPr>
-          <p:cNvPr id="90" name="Rectangle 89"/>
+          <p:cNvPr id="82" name="Rectangle 81"/>
           <p:cNvSpPr/>
           <p:nvPr/>
         </p:nvSpPr>
         <p:spPr>
           <a:xfrm>
-            <a:off x="6760784" y="3307293"/>
-            <a:ext cx="903812" cy="65562"/>
+            <a:off x="5992367" y="3307293"/>
+            <a:ext cx="1149705" cy="65562"/>
           </a:xfrm>
           <a:prstGeom prst="rect">
             <a:avLst/>
@@ -13982,7 +13674,7 @@
       </p:sp>
       <p:sp>
         <p:nvSpPr>
-          <p:cNvPr id="91" name="TextBox 90"/>
+          <p:cNvPr id="83" name="TextBox 82"/>
           <p:cNvSpPr txBox="1"/>
           <p:nvPr/>
         </p:nvSpPr>
@@ -14017,7 +13709,7 @@
       </p:sp>
       <p:sp>
         <p:nvSpPr>
-          <p:cNvPr id="92" name="TextBox 91"/>
+          <p:cNvPr id="84" name="TextBox 83"/>
           <p:cNvSpPr txBox="1"/>
           <p:nvPr/>
         </p:nvSpPr>
@@ -14052,14 +13744,14 @@
       </p:sp>
       <p:sp>
         <p:nvSpPr>
-          <p:cNvPr id="93" name="Rectangle 92"/>
+          <p:cNvPr id="85" name="Rectangle 84"/>
           <p:cNvSpPr/>
           <p:nvPr/>
         </p:nvSpPr>
         <p:spPr>
           <a:xfrm>
-            <a:off x="4916584" y="3416564"/>
-            <a:ext cx="2286962" cy="65562"/>
+            <a:off x="4824374" y="3416564"/>
+            <a:ext cx="1733702" cy="65562"/>
           </a:xfrm>
           <a:prstGeom prst="rect">
             <a:avLst/>
@@ -14082,7 +13774,7 @@
       </p:sp>
       <p:cxnSp>
         <p:nvCxnSpPr>
-          <p:cNvPr id="94" name="Connector 93"/>
+          <p:cNvPr id="86" name="Connector 85"/>
           <p:cNvCxnSpPr/>
           <p:nvPr/>
         </p:nvCxnSpPr>
@@ -14117,7 +13809,7 @@
       </p:cxnSp>
       <p:sp>
         <p:nvSpPr>
-          <p:cNvPr id="95" name="TextBox 94"/>
+          <p:cNvPr id="87" name="TextBox 86"/>
           <p:cNvSpPr txBox="1"/>
           <p:nvPr/>
         </p:nvSpPr>
@@ -14152,7 +13844,7 @@
       </p:sp>
       <p:sp>
         <p:nvSpPr>
-          <p:cNvPr id="96" name="TextBox 95"/>
+          <p:cNvPr id="88" name="TextBox 87"/>
           <p:cNvSpPr txBox="1"/>
           <p:nvPr/>
         </p:nvSpPr>
@@ -14187,14 +13879,14 @@
       </p:sp>
       <p:sp>
         <p:nvSpPr>
-          <p:cNvPr id="97" name="Rectangle 96"/>
+          <p:cNvPr id="89" name="Rectangle 88"/>
           <p:cNvSpPr/>
           <p:nvPr/>
         </p:nvSpPr>
         <p:spPr>
           <a:xfrm>
-            <a:off x="5377634" y="3525834"/>
-            <a:ext cx="2286962" cy="65562"/>
+            <a:off x="4824374" y="3525834"/>
+            <a:ext cx="3485692" cy="65562"/>
           </a:xfrm>
           <a:prstGeom prst="rect">
             <a:avLst/>
@@ -14217,7 +13909,7 @@
       </p:sp>
       <p:sp>
         <p:nvSpPr>
-          <p:cNvPr id="98" name="TextBox 97"/>
+          <p:cNvPr id="90" name="TextBox 89"/>
           <p:cNvSpPr txBox="1"/>
           <p:nvPr/>
         </p:nvSpPr>
@@ -14252,7 +13944,7 @@
       </p:sp>
       <p:sp>
         <p:nvSpPr>
-          <p:cNvPr id="99" name="TextBox 98"/>
+          <p:cNvPr id="91" name="TextBox 90"/>
           <p:cNvSpPr txBox="1"/>
           <p:nvPr/>
         </p:nvSpPr>
@@ -14287,14 +13979,14 @@
       </p:sp>
       <p:sp>
         <p:nvSpPr>
-          <p:cNvPr id="100" name="Rectangle 99"/>
+          <p:cNvPr id="92" name="Rectangle 91"/>
           <p:cNvSpPr/>
           <p:nvPr/>
         </p:nvSpPr>
         <p:spPr>
           <a:xfrm>
-            <a:off x="5377634" y="3635105"/>
-            <a:ext cx="1825912" cy="65562"/>
+            <a:off x="4824374" y="3635105"/>
+            <a:ext cx="2317699" cy="65562"/>
           </a:xfrm>
           <a:prstGeom prst="rect">
             <a:avLst/>
@@ -14317,7 +14009,7 @@
       </p:sp>
       <p:sp>
         <p:nvSpPr>
-          <p:cNvPr id="101" name="TextBox 100"/>
+          <p:cNvPr id="93" name="TextBox 92"/>
           <p:cNvSpPr txBox="1"/>
           <p:nvPr/>
         </p:nvSpPr>
@@ -14352,7 +14044,7 @@
       </p:sp>
       <p:sp>
         <p:nvSpPr>
-          <p:cNvPr id="102" name="TextBox 101"/>
+          <p:cNvPr id="94" name="TextBox 93"/>
           <p:cNvSpPr txBox="1"/>
           <p:nvPr/>
         </p:nvSpPr>
@@ -14387,14 +14079,14 @@
       </p:sp>
       <p:sp>
         <p:nvSpPr>
-          <p:cNvPr id="103" name="Rectangle 102"/>
+          <p:cNvPr id="95" name="Rectangle 94"/>
           <p:cNvSpPr/>
           <p:nvPr/>
         </p:nvSpPr>
         <p:spPr>
           <a:xfrm>
-            <a:off x="5838684" y="3744376"/>
-            <a:ext cx="1825912" cy="65562"/>
+            <a:off x="5408371" y="3744376"/>
+            <a:ext cx="2317699" cy="65562"/>
           </a:xfrm>
           <a:prstGeom prst="rect">
             <a:avLst/>
@@ -14417,7 +14109,7 @@
       </p:sp>
       <p:sp>
         <p:nvSpPr>
-          <p:cNvPr id="104" name="TextBox 103"/>
+          <p:cNvPr id="96" name="TextBox 95"/>
           <p:cNvSpPr txBox="1"/>
           <p:nvPr/>
         </p:nvSpPr>
@@ -14452,7 +14144,7 @@
       </p:sp>
       <p:sp>
         <p:nvSpPr>
-          <p:cNvPr id="105" name="TextBox 104"/>
+          <p:cNvPr id="97" name="TextBox 96"/>
           <p:cNvSpPr txBox="1"/>
           <p:nvPr/>
         </p:nvSpPr>
@@ -14487,14 +14179,14 @@
       </p:sp>
       <p:sp>
         <p:nvSpPr>
-          <p:cNvPr id="106" name="Rectangle 105"/>
+          <p:cNvPr id="98" name="Rectangle 97"/>
           <p:cNvSpPr/>
           <p:nvPr/>
         </p:nvSpPr>
         <p:spPr>
           <a:xfrm>
-            <a:off x="6299734" y="3853647"/>
-            <a:ext cx="1825912" cy="65562"/>
+            <a:off x="5408371" y="3853647"/>
+            <a:ext cx="1733702" cy="65562"/>
           </a:xfrm>
           <a:prstGeom prst="rect">
             <a:avLst/>
@@ -14517,7 +14209,7 @@
       </p:sp>
       <p:sp>
         <p:nvSpPr>
-          <p:cNvPr id="107" name="TextBox 106"/>
+          <p:cNvPr id="99" name="TextBox 98"/>
           <p:cNvSpPr txBox="1"/>
           <p:nvPr/>
         </p:nvSpPr>
@@ -14552,7 +14244,7 @@
       </p:sp>
       <p:sp>
         <p:nvSpPr>
-          <p:cNvPr id="108" name="TextBox 107"/>
+          <p:cNvPr id="100" name="TextBox 99"/>
           <p:cNvSpPr txBox="1"/>
           <p:nvPr/>
         </p:nvSpPr>
@@ -14587,14 +14279,14 @@
       </p:sp>
       <p:sp>
         <p:nvSpPr>
-          <p:cNvPr id="109" name="Rectangle 108"/>
+          <p:cNvPr id="101" name="Rectangle 100"/>
           <p:cNvSpPr/>
           <p:nvPr/>
         </p:nvSpPr>
         <p:spPr>
           <a:xfrm>
-            <a:off x="7221834" y="3962918"/>
-            <a:ext cx="1364862" cy="65562"/>
+            <a:off x="6576364" y="3962918"/>
+            <a:ext cx="2317699" cy="65562"/>
           </a:xfrm>
           <a:prstGeom prst="rect">
             <a:avLst/>
@@ -14617,7 +14309,7 @@
       </p:sp>
       <p:sp>
         <p:nvSpPr>
-          <p:cNvPr id="110" name="TextBox 109"/>
+          <p:cNvPr id="102" name="TextBox 101"/>
           <p:cNvSpPr txBox="1"/>
           <p:nvPr/>
         </p:nvSpPr>
@@ -14652,7 +14344,7 @@
       </p:sp>
       <p:sp>
         <p:nvSpPr>
-          <p:cNvPr id="111" name="TextBox 110"/>
+          <p:cNvPr id="103" name="TextBox 102"/>
           <p:cNvSpPr txBox="1"/>
           <p:nvPr/>
         </p:nvSpPr>
@@ -14687,14 +14379,14 @@
       </p:sp>
       <p:sp>
         <p:nvSpPr>
-          <p:cNvPr id="112" name="Rectangle 111"/>
+          <p:cNvPr id="104" name="Rectangle 103"/>
           <p:cNvSpPr/>
           <p:nvPr/>
         </p:nvSpPr>
         <p:spPr>
           <a:xfrm>
-            <a:off x="6299734" y="4072188"/>
-            <a:ext cx="2286962" cy="65562"/>
+            <a:off x="5992367" y="4072188"/>
+            <a:ext cx="2901696" cy="65562"/>
           </a:xfrm>
           <a:prstGeom prst="rect">
             <a:avLst/>
@@ -14717,7 +14409,7 @@
       </p:sp>
       <p:cxnSp>
         <p:nvCxnSpPr>
-          <p:cNvPr id="113" name="Connector 112"/>
+          <p:cNvPr id="105" name="Connector 104"/>
           <p:cNvCxnSpPr/>
           <p:nvPr/>
         </p:nvCxnSpPr>
@@ -14752,7 +14444,7 @@
       </p:cxnSp>
       <p:sp>
         <p:nvSpPr>
-          <p:cNvPr id="114" name="TextBox 113"/>
+          <p:cNvPr id="106" name="TextBox 105"/>
           <p:cNvSpPr txBox="1"/>
           <p:nvPr/>
         </p:nvSpPr>
@@ -14787,7 +14479,7 @@
       </p:sp>
       <p:sp>
         <p:nvSpPr>
-          <p:cNvPr id="115" name="TextBox 114"/>
+          <p:cNvPr id="107" name="TextBox 106"/>
           <p:cNvSpPr txBox="1"/>
           <p:nvPr/>
         </p:nvSpPr>
@@ -14822,14 +14514,14 @@
       </p:sp>
       <p:sp>
         <p:nvSpPr>
-          <p:cNvPr id="116" name="Rectangle 115"/>
+          <p:cNvPr id="108" name="Rectangle 107"/>
           <p:cNvSpPr/>
           <p:nvPr/>
         </p:nvSpPr>
         <p:spPr>
           <a:xfrm>
-            <a:off x="4916584" y="4181459"/>
-            <a:ext cx="903812" cy="65562"/>
+            <a:off x="4240377" y="4181459"/>
+            <a:ext cx="565708" cy="65562"/>
           </a:xfrm>
           <a:prstGeom prst="rect">
             <a:avLst/>
@@ -14852,7 +14544,7 @@
       </p:sp>
       <p:sp>
         <p:nvSpPr>
-          <p:cNvPr id="117" name="TextBox 116"/>
+          <p:cNvPr id="109" name="TextBox 108"/>
           <p:cNvSpPr txBox="1"/>
           <p:nvPr/>
         </p:nvSpPr>
@@ -14887,7 +14579,7 @@
       </p:sp>
       <p:sp>
         <p:nvSpPr>
-          <p:cNvPr id="118" name="TextBox 117"/>
+          <p:cNvPr id="110" name="TextBox 109"/>
           <p:cNvSpPr txBox="1"/>
           <p:nvPr/>
         </p:nvSpPr>
@@ -14922,14 +14614,14 @@
       </p:sp>
       <p:sp>
         <p:nvSpPr>
-          <p:cNvPr id="119" name="Rectangle 118"/>
+          <p:cNvPr id="111" name="Rectangle 110"/>
           <p:cNvSpPr/>
           <p:nvPr/>
         </p:nvSpPr>
         <p:spPr>
           <a:xfrm>
-            <a:off x="5377634" y="4290730"/>
-            <a:ext cx="1364862" cy="65562"/>
+            <a:off x="4240377" y="4290730"/>
+            <a:ext cx="1149705" cy="65562"/>
           </a:xfrm>
           <a:prstGeom prst="rect">
             <a:avLst/>
@@ -14952,7 +14644,7 @@
       </p:sp>
       <p:sp>
         <p:nvSpPr>
-          <p:cNvPr id="120" name="TextBox 119"/>
+          <p:cNvPr id="112" name="TextBox 111"/>
           <p:cNvSpPr txBox="1"/>
           <p:nvPr/>
         </p:nvSpPr>
@@ -14987,7 +14679,7 @@
       </p:sp>
       <p:sp>
         <p:nvSpPr>
-          <p:cNvPr id="121" name="TextBox 120"/>
+          <p:cNvPr id="113" name="TextBox 112"/>
           <p:cNvSpPr txBox="1"/>
           <p:nvPr/>
         </p:nvSpPr>
@@ -15022,14 +14714,14 @@
       </p:sp>
       <p:sp>
         <p:nvSpPr>
-          <p:cNvPr id="122" name="Rectangle 121"/>
+          <p:cNvPr id="114" name="Rectangle 113"/>
           <p:cNvSpPr/>
           <p:nvPr/>
         </p:nvSpPr>
         <p:spPr>
           <a:xfrm>
-            <a:off x="5838684" y="4400001"/>
-            <a:ext cx="903812" cy="65562"/>
+            <a:off x="4824374" y="4400001"/>
+            <a:ext cx="1149705" cy="65562"/>
           </a:xfrm>
           <a:prstGeom prst="rect">
             <a:avLst/>
@@ -15052,7 +14744,7 @@
       </p:sp>
       <p:sp>
         <p:nvSpPr>
-          <p:cNvPr id="123" name="TextBox 122"/>
+          <p:cNvPr id="115" name="TextBox 114"/>
           <p:cNvSpPr txBox="1"/>
           <p:nvPr/>
         </p:nvSpPr>
@@ -15087,7 +14779,7 @@
       </p:sp>
       <p:sp>
         <p:nvSpPr>
-          <p:cNvPr id="124" name="TextBox 123"/>
+          <p:cNvPr id="116" name="TextBox 115"/>
           <p:cNvSpPr txBox="1"/>
           <p:nvPr/>
         </p:nvSpPr>
@@ -15122,14 +14814,14 @@
       </p:sp>
       <p:sp>
         <p:nvSpPr>
-          <p:cNvPr id="125" name="Rectangle 124"/>
+          <p:cNvPr id="117" name="Rectangle 116"/>
           <p:cNvSpPr/>
           <p:nvPr/>
         </p:nvSpPr>
         <p:spPr>
           <a:xfrm>
-            <a:off x="6299734" y="4509272"/>
-            <a:ext cx="903812" cy="65562"/>
+            <a:off x="5408371" y="4509272"/>
+            <a:ext cx="565708" cy="65562"/>
           </a:xfrm>
           <a:prstGeom prst="rect">
             <a:avLst/>
@@ -15152,7 +14844,7 @@
       </p:sp>
       <p:sp>
         <p:nvSpPr>
-          <p:cNvPr id="126" name="TextBox 125"/>
+          <p:cNvPr id="118" name="TextBox 117"/>
           <p:cNvSpPr txBox="1"/>
           <p:nvPr/>
         </p:nvSpPr>
@@ -15187,7 +14879,7 @@
       </p:sp>
       <p:sp>
         <p:nvSpPr>
-          <p:cNvPr id="127" name="TextBox 126"/>
+          <p:cNvPr id="119" name="TextBox 118"/>
           <p:cNvSpPr txBox="1"/>
           <p:nvPr/>
         </p:nvSpPr>
@@ -15222,14 +14914,14 @@
       </p:sp>
       <p:sp>
         <p:nvSpPr>
-          <p:cNvPr id="128" name="Rectangle 127"/>
+          <p:cNvPr id="120" name="Rectangle 119"/>
           <p:cNvSpPr/>
           <p:nvPr/>
         </p:nvSpPr>
         <p:spPr>
           <a:xfrm>
-            <a:off x="6760784" y="4618542"/>
-            <a:ext cx="903812" cy="65562"/>
+            <a:off x="5408371" y="4618542"/>
+            <a:ext cx="1149705" cy="65562"/>
           </a:xfrm>
           <a:prstGeom prst="rect">
             <a:avLst/>
@@ -15252,7 +14944,7 @@
       </p:sp>
       <p:sp>
         <p:nvSpPr>
-          <p:cNvPr id="129" name="TextBox 128"/>
+          <p:cNvPr id="121" name="TextBox 120"/>
           <p:cNvSpPr txBox="1"/>
           <p:nvPr/>
         </p:nvSpPr>
@@ -15287,7 +14979,7 @@
       </p:sp>
       <p:sp>
         <p:nvSpPr>
-          <p:cNvPr id="130" name="TextBox 129"/>
+          <p:cNvPr id="122" name="TextBox 121"/>
           <p:cNvSpPr txBox="1"/>
           <p:nvPr/>
         </p:nvSpPr>
@@ -15322,14 +15014,14 @@
       </p:sp>
       <p:sp>
         <p:nvSpPr>
-          <p:cNvPr id="131" name="Rectangle 130"/>
+          <p:cNvPr id="123" name="Rectangle 122"/>
           <p:cNvSpPr/>
           <p:nvPr/>
         </p:nvSpPr>
         <p:spPr>
           <a:xfrm>
-            <a:off x="7221834" y="4727813"/>
-            <a:ext cx="903812" cy="65562"/>
+            <a:off x="5992367" y="4727813"/>
+            <a:ext cx="1149705" cy="65562"/>
           </a:xfrm>
           <a:prstGeom prst="rect">
             <a:avLst/>
@@ -15352,7 +15044,7 @@
       </p:sp>
       <p:cxnSp>
         <p:nvCxnSpPr>
-          <p:cNvPr id="132" name="Connector 131"/>
+          <p:cNvPr id="124" name="Connector 123"/>
           <p:cNvCxnSpPr/>
           <p:nvPr/>
         </p:nvCxnSpPr>
@@ -15387,7 +15079,7 @@
       </p:cxnSp>
       <p:sp>
         <p:nvSpPr>
-          <p:cNvPr id="133" name="TextBox 132"/>
+          <p:cNvPr id="125" name="TextBox 124"/>
           <p:cNvSpPr txBox="1"/>
           <p:nvPr/>
         </p:nvSpPr>
@@ -15422,7 +15114,7 @@
       </p:sp>
       <p:sp>
         <p:nvSpPr>
-          <p:cNvPr id="134" name="TextBox 133"/>
+          <p:cNvPr id="126" name="TextBox 125"/>
           <p:cNvSpPr txBox="1"/>
           <p:nvPr/>
         </p:nvSpPr>
@@ -15457,14 +15149,14 @@
       </p:sp>
       <p:sp>
         <p:nvSpPr>
-          <p:cNvPr id="135" name="Rectangle 134"/>
+          <p:cNvPr id="127" name="Rectangle 126"/>
           <p:cNvSpPr/>
           <p:nvPr/>
         </p:nvSpPr>
         <p:spPr>
           <a:xfrm>
-            <a:off x="7682885" y="4837084"/>
-            <a:ext cx="442762" cy="65562"/>
+            <a:off x="5992367" y="4837084"/>
+            <a:ext cx="565708" cy="65562"/>
           </a:xfrm>
           <a:prstGeom prst="rect">
             <a:avLst/>
@@ -15487,7 +15179,7 @@
       </p:sp>
       <p:sp>
         <p:nvSpPr>
-          <p:cNvPr id="136" name="TextBox 135"/>
+          <p:cNvPr id="128" name="TextBox 127"/>
           <p:cNvSpPr txBox="1"/>
           <p:nvPr/>
         </p:nvSpPr>
@@ -15522,7 +15214,7 @@
       </p:sp>
       <p:sp>
         <p:nvSpPr>
-          <p:cNvPr id="137" name="TextBox 136"/>
+          <p:cNvPr id="129" name="TextBox 128"/>
           <p:cNvSpPr txBox="1"/>
           <p:nvPr/>
         </p:nvSpPr>
@@ -15557,14 +15249,14 @@
       </p:sp>
       <p:sp>
         <p:nvSpPr>
-          <p:cNvPr id="138" name="Rectangle 137"/>
+          <p:cNvPr id="130" name="Rectangle 129"/>
           <p:cNvSpPr/>
           <p:nvPr/>
         </p:nvSpPr>
         <p:spPr>
           <a:xfrm>
-            <a:off x="7682885" y="4946355"/>
-            <a:ext cx="903812" cy="65562"/>
+            <a:off x="5992367" y="4946355"/>
+            <a:ext cx="1149705" cy="65562"/>
           </a:xfrm>
           <a:prstGeom prst="rect">
             <a:avLst/>
@@ -15587,7 +15279,7 @@
       </p:sp>
       <p:sp>
         <p:nvSpPr>
-          <p:cNvPr id="139" name="TextBox 138"/>
+          <p:cNvPr id="131" name="TextBox 130"/>
           <p:cNvSpPr txBox="1"/>
           <p:nvPr/>
         </p:nvSpPr>
@@ -15622,7 +15314,7 @@
       </p:sp>
       <p:sp>
         <p:nvSpPr>
-          <p:cNvPr id="140" name="TextBox 139"/>
+          <p:cNvPr id="132" name="TextBox 131"/>
           <p:cNvSpPr txBox="1"/>
           <p:nvPr/>
         </p:nvSpPr>
@@ -15657,14 +15349,14 @@
       </p:sp>
       <p:sp>
         <p:nvSpPr>
-          <p:cNvPr id="141" name="Rectangle 140"/>
+          <p:cNvPr id="133" name="Rectangle 132"/>
           <p:cNvSpPr/>
           <p:nvPr/>
         </p:nvSpPr>
         <p:spPr>
           <a:xfrm>
-            <a:off x="8143935" y="5055626"/>
-            <a:ext cx="903812" cy="65562"/>
+            <a:off x="6576364" y="5055626"/>
+            <a:ext cx="1149705" cy="65562"/>
           </a:xfrm>
           <a:prstGeom prst="rect">
             <a:avLst/>
@@ -15687,7 +15379,7 @@
       </p:sp>
       <p:sp>
         <p:nvSpPr>
-          <p:cNvPr id="142" name="TextBox 141"/>
+          <p:cNvPr id="134" name="TextBox 133"/>
           <p:cNvSpPr txBox="1"/>
           <p:nvPr/>
         </p:nvSpPr>
@@ -15722,7 +15414,7 @@
       </p:sp>
       <p:sp>
         <p:nvSpPr>
-          <p:cNvPr id="143" name="TextBox 142"/>
+          <p:cNvPr id="135" name="TextBox 134"/>
           <p:cNvSpPr txBox="1"/>
           <p:nvPr/>
         </p:nvSpPr>
@@ -15757,14 +15449,14 @@
       </p:sp>
       <p:sp>
         <p:nvSpPr>
-          <p:cNvPr id="144" name="Rectangle 143"/>
+          <p:cNvPr id="136" name="Rectangle 135"/>
           <p:cNvSpPr/>
           <p:nvPr/>
         </p:nvSpPr>
         <p:spPr>
           <a:xfrm>
-            <a:off x="6760784" y="5164896"/>
-            <a:ext cx="1825912" cy="65562"/>
+            <a:off x="4824374" y="5164896"/>
+            <a:ext cx="1733702" cy="65562"/>
           </a:xfrm>
           <a:prstGeom prst="rect">
             <a:avLst/>
@@ -15787,7 +15479,7 @@
       </p:sp>
       <p:sp>
         <p:nvSpPr>
-          <p:cNvPr id="145" name="TextBox 144"/>
+          <p:cNvPr id="137" name="TextBox 136"/>
           <p:cNvSpPr txBox="1"/>
           <p:nvPr/>
         </p:nvSpPr>
@@ -15822,7 +15514,7 @@
       </p:sp>
       <p:sp>
         <p:nvSpPr>
-          <p:cNvPr id="146" name="TextBox 145"/>
+          <p:cNvPr id="138" name="TextBox 137"/>
           <p:cNvSpPr txBox="1"/>
           <p:nvPr/>
         </p:nvSpPr>
@@ -15857,14 +15549,14 @@
       </p:sp>
       <p:sp>
         <p:nvSpPr>
-          <p:cNvPr id="147" name="Rectangle 146"/>
+          <p:cNvPr id="139" name="Rectangle 138"/>
           <p:cNvSpPr/>
           <p:nvPr/>
         </p:nvSpPr>
         <p:spPr>
           <a:xfrm>
-            <a:off x="8604985" y="5274167"/>
-            <a:ext cx="442762" cy="65562"/>
+            <a:off x="7160361" y="5274167"/>
+            <a:ext cx="565708" cy="65562"/>
           </a:xfrm>
           <a:prstGeom prst="rect">
             <a:avLst/>
@@ -15887,7 +15579,7 @@
       </p:sp>
       <p:sp>
         <p:nvSpPr>
-          <p:cNvPr id="148" name="TextBox 147"/>
+          <p:cNvPr id="140" name="TextBox 139"/>
           <p:cNvSpPr txBox="1"/>
           <p:nvPr/>
         </p:nvSpPr>
@@ -15922,7 +15614,7 @@
       </p:sp>
       <p:sp>
         <p:nvSpPr>
-          <p:cNvPr id="149" name="TextBox 148"/>
+          <p:cNvPr id="141" name="TextBox 140"/>
           <p:cNvSpPr txBox="1"/>
           <p:nvPr/>
         </p:nvSpPr>
@@ -15957,14 +15649,14 @@
       </p:sp>
       <p:sp>
         <p:nvSpPr>
-          <p:cNvPr id="150" name="Rectangle 149"/>
+          <p:cNvPr id="142" name="Rectangle 141"/>
           <p:cNvSpPr/>
           <p:nvPr/>
         </p:nvSpPr>
         <p:spPr>
           <a:xfrm>
-            <a:off x="9066035" y="5383438"/>
-            <a:ext cx="442762" cy="65562"/>
+            <a:off x="7160361" y="5383438"/>
+            <a:ext cx="565708" cy="65562"/>
           </a:xfrm>
           <a:prstGeom prst="rect">
             <a:avLst/>
@@ -15987,7 +15679,7 @@
       </p:sp>
       <p:cxnSp>
         <p:nvCxnSpPr>
-          <p:cNvPr id="151" name="Connector 150"/>
+          <p:cNvPr id="143" name="Connector 142"/>
           <p:cNvCxnSpPr/>
           <p:nvPr/>
         </p:nvCxnSpPr>
@@ -16022,7 +15714,7 @@
       </p:cxnSp>
       <p:sp>
         <p:nvSpPr>
-          <p:cNvPr id="152" name="TextBox 151"/>
+          <p:cNvPr id="144" name="TextBox 143"/>
           <p:cNvSpPr txBox="1"/>
           <p:nvPr/>
         </p:nvSpPr>
@@ -16057,7 +15749,7 @@
       </p:sp>
       <p:sp>
         <p:nvSpPr>
-          <p:cNvPr id="153" name="TextBox 152"/>
+          <p:cNvPr id="145" name="TextBox 144"/>
           <p:cNvSpPr txBox="1"/>
           <p:nvPr/>
         </p:nvSpPr>
@@ -16092,14 +15784,14 @@
       </p:sp>
       <p:sp>
         <p:nvSpPr>
-          <p:cNvPr id="154" name="Rectangle 153"/>
+          <p:cNvPr id="146" name="Rectangle 145"/>
           <p:cNvSpPr/>
           <p:nvPr/>
         </p:nvSpPr>
         <p:spPr>
           <a:xfrm>
-            <a:off x="9066035" y="5492709"/>
-            <a:ext cx="1364862" cy="65562"/>
+            <a:off x="7160361" y="5492709"/>
+            <a:ext cx="1149705" cy="65562"/>
           </a:xfrm>
           <a:prstGeom prst="rect">
             <a:avLst/>
@@ -16122,7 +15814,7 @@
       </p:sp>
       <p:sp>
         <p:nvSpPr>
-          <p:cNvPr id="155" name="TextBox 154"/>
+          <p:cNvPr id="147" name="TextBox 146"/>
           <p:cNvSpPr txBox="1"/>
           <p:nvPr/>
         </p:nvSpPr>
@@ -16157,7 +15849,7 @@
       </p:sp>
       <p:sp>
         <p:nvSpPr>
-          <p:cNvPr id="156" name="TextBox 155"/>
+          <p:cNvPr id="148" name="TextBox 147"/>
           <p:cNvSpPr txBox="1"/>
           <p:nvPr/>
         </p:nvSpPr>
@@ -16192,14 +15884,14 @@
       </p:sp>
       <p:sp>
         <p:nvSpPr>
-          <p:cNvPr id="157" name="Rectangle 156"/>
+          <p:cNvPr id="149" name="Rectangle 148"/>
           <p:cNvSpPr/>
           <p:nvPr/>
         </p:nvSpPr>
         <p:spPr>
           <a:xfrm>
-            <a:off x="9988135" y="5601980"/>
-            <a:ext cx="1364862" cy="65562"/>
+            <a:off x="7744358" y="5601980"/>
+            <a:ext cx="1733702" cy="65562"/>
           </a:xfrm>
           <a:prstGeom prst="rect">
             <a:avLst/>
@@ -16222,7 +15914,7 @@
       </p:sp>
       <p:sp>
         <p:nvSpPr>
-          <p:cNvPr id="158" name="TextBox 157"/>
+          <p:cNvPr id="150" name="TextBox 149"/>
           <p:cNvSpPr txBox="1"/>
           <p:nvPr/>
         </p:nvSpPr>
@@ -16257,7 +15949,7 @@
       </p:sp>
       <p:sp>
         <p:nvSpPr>
-          <p:cNvPr id="159" name="TextBox 158"/>
+          <p:cNvPr id="151" name="TextBox 150"/>
           <p:cNvSpPr txBox="1"/>
           <p:nvPr/>
         </p:nvSpPr>
@@ -16292,14 +15984,14 @@
       </p:sp>
       <p:sp>
         <p:nvSpPr>
-          <p:cNvPr id="160" name="Rectangle 159"/>
+          <p:cNvPr id="152" name="Rectangle 151"/>
           <p:cNvSpPr/>
           <p:nvPr/>
         </p:nvSpPr>
         <p:spPr>
           <a:xfrm>
-            <a:off x="9988135" y="5711250"/>
-            <a:ext cx="1364862" cy="65562"/>
+            <a:off x="7744358" y="5711250"/>
+            <a:ext cx="1733702" cy="65562"/>
           </a:xfrm>
           <a:prstGeom prst="rect">
             <a:avLst/>
@@ -16322,7 +16014,7 @@
       </p:sp>
       <p:sp>
         <p:nvSpPr>
-          <p:cNvPr id="161" name="TextBox 160"/>
+          <p:cNvPr id="153" name="TextBox 152"/>
           <p:cNvSpPr txBox="1"/>
           <p:nvPr/>
         </p:nvSpPr>
@@ -16357,7 +16049,7 @@
       </p:sp>
       <p:sp>
         <p:nvSpPr>
-          <p:cNvPr id="162" name="TextBox 161"/>
+          <p:cNvPr id="154" name="TextBox 153"/>
           <p:cNvSpPr txBox="1"/>
           <p:nvPr/>
         </p:nvSpPr>
@@ -16392,14 +16084,14 @@
       </p:sp>
       <p:sp>
         <p:nvSpPr>
-          <p:cNvPr id="163" name="Rectangle 162"/>
+          <p:cNvPr id="155" name="Rectangle 154"/>
           <p:cNvSpPr/>
           <p:nvPr/>
         </p:nvSpPr>
         <p:spPr>
           <a:xfrm>
-            <a:off x="9988135" y="5820521"/>
-            <a:ext cx="1364862" cy="65562"/>
+            <a:off x="7744358" y="5820521"/>
+            <a:ext cx="1733702" cy="65562"/>
           </a:xfrm>
           <a:prstGeom prst="rect">
             <a:avLst/>
@@ -16422,7 +16114,7 @@
       </p:sp>
       <p:sp>
         <p:nvSpPr>
-          <p:cNvPr id="164" name="TextBox 163"/>
+          <p:cNvPr id="156" name="TextBox 155"/>
           <p:cNvSpPr txBox="1"/>
           <p:nvPr/>
         </p:nvSpPr>
@@ -16457,7 +16149,7 @@
       </p:sp>
       <p:sp>
         <p:nvSpPr>
-          <p:cNvPr id="165" name="TextBox 164"/>
+          <p:cNvPr id="157" name="TextBox 156"/>
           <p:cNvSpPr txBox="1"/>
           <p:nvPr/>
         </p:nvSpPr>
@@ -16492,14 +16184,14 @@
       </p:sp>
       <p:sp>
         <p:nvSpPr>
-          <p:cNvPr id="166" name="Rectangle 165"/>
+          <p:cNvPr id="158" name="Rectangle 157"/>
           <p:cNvSpPr/>
           <p:nvPr/>
         </p:nvSpPr>
         <p:spPr>
           <a:xfrm>
-            <a:off x="10910235" y="5929792"/>
-            <a:ext cx="903812" cy="65562"/>
+            <a:off x="8912352" y="5929792"/>
+            <a:ext cx="1149705" cy="65562"/>
           </a:xfrm>
           <a:prstGeom prst="rect">
             <a:avLst/>
@@ -16522,7 +16214,7 @@
       </p:sp>
       <p:sp>
         <p:nvSpPr>
-          <p:cNvPr id="167" name="TextBox 166"/>
+          <p:cNvPr id="159" name="TextBox 158"/>
           <p:cNvSpPr txBox="1"/>
           <p:nvPr/>
         </p:nvSpPr>
@@ -16557,7 +16249,7 @@
       </p:sp>
       <p:sp>
         <p:nvSpPr>
-          <p:cNvPr id="168" name="TextBox 167"/>
+          <p:cNvPr id="160" name="TextBox 159"/>
           <p:cNvSpPr txBox="1"/>
           <p:nvPr/>
         </p:nvSpPr>
@@ -16592,14 +16284,14 @@
       </p:sp>
       <p:sp>
         <p:nvSpPr>
-          <p:cNvPr id="169" name="Rectangle 168"/>
+          <p:cNvPr id="161" name="Rectangle 160"/>
           <p:cNvSpPr/>
           <p:nvPr/>
         </p:nvSpPr>
         <p:spPr>
           <a:xfrm>
-            <a:off x="11371285" y="6039063"/>
-            <a:ext cx="442762" cy="65562"/>
+            <a:off x="9496348" y="6039063"/>
+            <a:ext cx="565708" cy="65562"/>
           </a:xfrm>
           <a:prstGeom prst="rect">
             <a:avLst/>
@@ -16622,13 +16314,13 @@
       </p:sp>
       <p:cxnSp>
         <p:nvCxnSpPr>
-          <p:cNvPr id="170" name="Connector 169"/>
+          <p:cNvPr id="162" name="Connector 161"/>
           <p:cNvCxnSpPr/>
           <p:nvPr/>
         </p:nvCxnSpPr>
         <p:spPr>
           <a:xfrm>
-            <a:off x="9517941" y="1371600"/>
+            <a:off x="7735214" y="1371600"/>
             <a:ext cx="0" cy="4754880"/>
           </a:xfrm>
           <a:prstGeom prst="line">
@@ -16658,13 +16350,13 @@
       </p:cxnSp>
       <p:sp>
         <p:nvSpPr>
-          <p:cNvPr id="171" name="TextBox 170"/>
-          <p:cNvSpPr txBox="1"/>
-          <p:nvPr/>
-        </p:nvSpPr>
-        <p:spPr>
-          <a:xfrm>
-            <a:off x="8054901" y="1143000"/>
+          <p:cNvPr id="163" name="TextBox 162"/>
+          <p:cNvSpPr txBox="1"/>
+          <p:nvPr/>
+        </p:nvSpPr>
+        <p:spPr>
+          <a:xfrm>
+            <a:off x="6272174" y="1143000"/>
             <a:ext cx="1417320" cy="201168"/>
           </a:xfrm>
           <a:prstGeom prst="rect">
@@ -16691,16 +16383,51 @@
           </a:p>
         </p:txBody>
       </p:sp>
-      <p:sp>
-        <p:nvSpPr>
-          <p:cNvPr id="172" name="TextBox 171"/>
-          <p:cNvSpPr txBox="1"/>
-          <p:nvPr/>
-        </p:nvSpPr>
-        <p:spPr>
-          <a:xfrm>
-            <a:off x="9537192" y="1143000"/>
-            <a:ext cx="2286000" cy="201168"/>
+      <p:cxnSp>
+        <p:nvCxnSpPr>
+          <p:cNvPr id="164" name="Connector 163"/>
+          <p:cNvCxnSpPr/>
+          <p:nvPr/>
+        </p:nvCxnSpPr>
+        <p:spPr>
+          <a:xfrm>
+            <a:off x="10071201" y="1371600"/>
+            <a:ext cx="0" cy="4754880"/>
+          </a:xfrm>
+          <a:prstGeom prst="line">
+            <a:avLst/>
+          </a:prstGeom>
+          <a:ln w="19050">
+            <a:solidFill>
+              <a:srgbClr val="C26A0A"/>
+            </a:solidFill>
+          </a:ln>
+        </p:spPr>
+        <p:style>
+          <a:lnRef idx="2">
+            <a:schemeClr val="accent1"/>
+          </a:lnRef>
+          <a:fillRef idx="0">
+            <a:schemeClr val="accent1"/>
+          </a:fillRef>
+          <a:effectRef idx="1">
+            <a:schemeClr val="accent1"/>
+          </a:effectRef>
+          <a:fontRef idx="minor">
+            <a:schemeClr val="tx1"/>
+          </a:fontRef>
+        </p:style>
+      </p:cxnSp>
+      <p:sp>
+        <p:nvSpPr>
+          <p:cNvPr id="165" name="TextBox 164"/>
+          <p:cNvSpPr txBox="1"/>
+          <p:nvPr/>
+        </p:nvSpPr>
+        <p:spPr>
+          <a:xfrm>
+            <a:off x="7693761" y="1143000"/>
+            <a:ext cx="2331720" cy="201168"/>
           </a:xfrm>
           <a:prstGeom prst="rect">
             <a:avLst/>
@@ -16721,14 +16448,49 @@
                 </a:solidFill>
                 <a:latin typeface="Calibri"/>
               </a:rPr>
-              <a:t>Target indikatif pipeline (M7.5)</a:t>
-            </a:r>
-          </a:p>
-        </p:txBody>
-      </p:sp>
-      <p:sp>
-        <p:nvSpPr>
-          <p:cNvPr id="173" name="Rectangle 172"/>
+              <a:t>Akhir TAF · target pipeline (M7.5)</a:t>
+            </a:r>
+          </a:p>
+        </p:txBody>
+      </p:sp>
+      <p:sp>
+        <p:nvSpPr>
+          <p:cNvPr id="166" name="TextBox 165"/>
+          <p:cNvSpPr txBox="1"/>
+          <p:nvPr/>
+        </p:nvSpPr>
+        <p:spPr>
+          <a:xfrm>
+            <a:off x="10116921" y="1143000"/>
+            <a:ext cx="1828800" cy="201168"/>
+          </a:xfrm>
+          <a:prstGeom prst="rect">
+            <a:avLst/>
+          </a:prstGeom>
+          <a:noFill/>
+        </p:spPr>
+        <p:txBody>
+          <a:bodyPr wrap="square" lIns="18288" rIns="18288" tIns="9144" bIns="9144" anchor="t">
+            <a:spAutoFit/>
+          </a:bodyPr>
+          <a:lstStyle/>
+          <a:p>
+            <a:pPr algn="l"/>
+            <a:r>
+              <a:rPr sz="700" b="0" i="1">
+                <a:solidFill>
+                  <a:srgbClr val="C26A0A"/>
+                </a:solidFill>
+                <a:latin typeface="Calibri"/>
+              </a:rPr>
+              <a:t>Buffer review di luar TAF</a:t>
+            </a:r>
+          </a:p>
+        </p:txBody>
+      </p:sp>
+      <p:sp>
+        <p:nvSpPr>
+          <p:cNvPr id="167" name="Rectangle 166"/>
           <p:cNvSpPr/>
           <p:nvPr/>
         </p:nvSpPr>
@@ -16758,7 +16520,7 @@
       </p:sp>
       <p:sp>
         <p:nvSpPr>
-          <p:cNvPr id="174" name="TextBox 173"/>
+          <p:cNvPr id="168" name="TextBox 167"/>
           <p:cNvSpPr txBox="1"/>
           <p:nvPr/>
         </p:nvSpPr>
@@ -16793,7 +16555,7 @@
       </p:sp>
       <p:sp>
         <p:nvSpPr>
-          <p:cNvPr id="175" name="Rectangle 174"/>
+          <p:cNvPr id="169" name="Rectangle 168"/>
           <p:cNvSpPr/>
           <p:nvPr/>
         </p:nvSpPr>
@@ -16823,7 +16585,7 @@
       </p:sp>
       <p:sp>
         <p:nvSpPr>
-          <p:cNvPr id="176" name="TextBox 175"/>
+          <p:cNvPr id="170" name="TextBox 169"/>
           <p:cNvSpPr txBox="1"/>
           <p:nvPr/>
         </p:nvSpPr>
@@ -16858,7 +16620,7 @@
       </p:sp>
       <p:sp>
         <p:nvSpPr>
-          <p:cNvPr id="177" name="Rectangle 176"/>
+          <p:cNvPr id="171" name="Rectangle 170"/>
           <p:cNvSpPr/>
           <p:nvPr/>
         </p:nvSpPr>
@@ -16888,7 +16650,7 @@
       </p:sp>
       <p:sp>
         <p:nvSpPr>
-          <p:cNvPr id="178" name="TextBox 177"/>
+          <p:cNvPr id="172" name="TextBox 171"/>
           <p:cNvSpPr txBox="1"/>
           <p:nvPr/>
         </p:nvSpPr>
@@ -16923,7 +16685,7 @@
       </p:sp>
       <p:sp>
         <p:nvSpPr>
-          <p:cNvPr id="179" name="TextBox 178"/>
+          <p:cNvPr id="173" name="TextBox 172"/>
           <p:cNvSpPr txBox="1"/>
           <p:nvPr/>
         </p:nvSpPr>
@@ -16951,14 +16713,14 @@
                 </a:solidFill>
                 <a:latin typeface="Calibri"/>
               </a:rPr>
-              <a:t>STEP 2 jangka panjang: M8 2028–29 · M9 2029–30 · M10 2030→ · M11 ≤5 th pasca-validasi · M12 paralel</a:t>
-            </a:r>
-          </a:p>
-        </p:txBody>
-      </p:sp>
-      <p:sp>
-        <p:nvSpPr>
-          <p:cNvPr id="180" name="TextBox 179"/>
+              <a:t>STEP 2 jangka panjang: M8 2027–29 · M9 2029–30 · M10 2030→ · M11 ≤5 th pasca-validasi · M12 paralel</a:t>
+            </a:r>
+          </a:p>
+        </p:txBody>
+      </p:sp>
+      <p:sp>
+        <p:nvSpPr>
+          <p:cNvPr id="174" name="TextBox 173"/>
           <p:cNvSpPr txBox="1"/>
           <p:nvPr/>
         </p:nvSpPr>
@@ -16986,7 +16748,7 @@
                 </a:solidFill>
                 <a:latin typeface="Calibri"/>
               </a:rPr>
-              <a:t>Bulan 1 = Oktober 2026. Review PIN: awal ±6 minggu; tanggapan CAR/NIR ±4 minggu; revisi wajib ≤6 bulan, maks. 3 putaran (Procedures Manual V3.9 §2.2, §9).</a:t>
+              <a:t>Bulan 1 = Oktober 2026; TAF berakhir bulan 12 (Sep 2027). Review PIN: awal ±6 minggu; tanggapan CAR/NIR ±4 minggu; revisi wajib ≤6 bulan, maks. 3 putaran (Procedures Manual V3.9 §2.2, §9).</a:t>
             </a:r>
           </a:p>
         </p:txBody>

--- a/hutan-desa-pasir/Roadmap_HD_Pasir_PVClimate.pptx
+++ b/hutan-desa-pasir/Roadmap_HD_Pasir_PVClimate.pptx
@@ -3659,7 +3659,7 @@
                 </a:solidFill>
                 <a:latin typeface="Cambria"/>
               </a:rPr>
-              <a:t>menuntaskan Tahap 1–2, Tahap 3 menjadi jembatan ke investasi dan PDD</a:t>
+              <a:t>menuntaskan Tahap 1–3 dengan output utama proyek masuk Pipeline PV</a:t>
             </a:r>
           </a:p>
         </p:txBody>
@@ -3708,7 +3708,7 @@
         <p:spPr>
           <a:xfrm>
             <a:off x="365760" y="1234440"/>
-            <a:ext cx="11457432" cy="2212848"/>
+            <a:ext cx="11457432" cy="3136392"/>
           </a:xfrm>
           <a:prstGeom prst="roundRect">
             <a:avLst>
@@ -4448,8 +4448,8 @@
         </p:nvSpPr>
         <p:spPr>
           <a:xfrm>
-            <a:off x="365760" y="3566160"/>
-            <a:ext cx="11457432" cy="749808"/>
+            <a:off x="548640" y="3493008"/>
+            <a:ext cx="11091672" cy="786384"/>
           </a:xfrm>
           <a:prstGeom prst="roundRect">
             <a:avLst>
@@ -4457,13 +4457,12 @@
             </a:avLst>
           </a:prstGeom>
           <a:solidFill>
-            <a:srgbClr val="FBF3E8"/>
+            <a:srgbClr val="FFFFFF"/>
           </a:solidFill>
-          <a:ln w="15875">
+          <a:ln w="22225">
             <a:solidFill>
-              <a:srgbClr val="C26A0A"/>
+              <a:srgbClr val="0E7C6B"/>
             </a:solidFill>
-            <a:prstDash val="dash"/>
           </a:ln>
           <a:effectLst/>
         </p:spPr>
@@ -4483,14 +4482,14 @@
         </p:nvSpPr>
         <p:spPr>
           <a:xfrm>
-            <a:off x="502920" y="3730752"/>
+            <a:off x="658368" y="3675887"/>
             <a:ext cx="384048" cy="384048"/>
           </a:xfrm>
           <a:prstGeom prst="roundRect">
             <a:avLst/>
           </a:prstGeom>
           <a:solidFill>
-            <a:srgbClr val="C26A0A"/>
+            <a:srgbClr val="0E7C6B"/>
           </a:solidFill>
           <a:ln>
             <a:noFill/>
@@ -4522,7 +4521,7 @@
         </p:nvSpPr>
         <p:spPr>
           <a:xfrm>
-            <a:off x="978408" y="3611880"/>
+            <a:off x="1115568" y="3547872"/>
             <a:ext cx="3931920" cy="274320"/>
           </a:xfrm>
           <a:prstGeom prst="rect">
@@ -4548,7 +4547,7 @@
                 </a:solidFill>
                 <a:latin typeface="Calibri"/>
               </a:rPr>
-              <a:t>Tahap 3 — Masuk Pipeline PV &amp; Mobilisasi Investasi</a:t>
+              <a:t>Tahap 3 — Masuk Pipeline PV</a:t>
             </a:r>
           </a:p>
         </p:txBody>
@@ -4561,7 +4560,7 @@
         </p:nvSpPr>
         <p:spPr>
           <a:xfrm>
-            <a:off x="996696" y="3877056"/>
+            <a:off x="1133856" y="3813048"/>
             <a:ext cx="3931920" cy="182880"/>
           </a:xfrm>
           <a:prstGeom prst="rect">
@@ -4579,11 +4578,11 @@
             <a:r>
               <a:rPr sz="800" b="1" i="0">
                 <a:solidFill>
-                  <a:srgbClr val="C26A0A"/>
-                </a:solidFill>
-                <a:latin typeface="Calibri"/>
-              </a:rPr>
-              <a:t>Sep 2027 – 2028 · M8 · Transisi / Project Handover</a:t>
+                  <a:srgbClr val="0E7C6B"/>
+                </a:solidFill>
+                <a:latin typeface="Calibri"/>
+              </a:rPr>
+              <a:t>★ OUTPUT UTAMA SETAPAK 4 · Sep 2027 · M7.5 · M8</a:t>
             </a:r>
           </a:p>
         </p:txBody>
@@ -4596,7 +4595,7 @@
         </p:nvSpPr>
         <p:spPr>
           <a:xfrm>
-            <a:off x="978408" y="4059936"/>
+            <a:off x="1115568" y="3995928"/>
             <a:ext cx="3931920" cy="228600"/>
           </a:xfrm>
           <a:prstGeom prst="rect">
@@ -4618,11 +4617,11 @@
             <a:r>
               <a:rPr sz="800" b="0">
                 <a:solidFill>
-                  <a:srgbClr val="5F6B65"/>
-                </a:solidFill>
-                <a:latin typeface="Calibri"/>
-              </a:rPr>
-              <a:t>Gerbang: pipeline Plan Vivo = batas SETAPAK 4</a:t>
+                  <a:srgbClr val="C26A0A"/>
+                </a:solidFill>
+                <a:latin typeface="Calibri"/>
+              </a:rPr>
+              <a:t>Setelah tahap ini: gerbang ke STEP 2</a:t>
             </a:r>
           </a:p>
         </p:txBody>
@@ -4635,8 +4634,8 @@
         </p:nvSpPr>
         <p:spPr>
           <a:xfrm>
-            <a:off x="4983480" y="3630168"/>
-            <a:ext cx="6766560" cy="658368"/>
+            <a:off x="4983480" y="3529584"/>
+            <a:ext cx="6583680" cy="713232"/>
           </a:xfrm>
           <a:prstGeom prst="rect">
             <a:avLst/>
@@ -4657,7 +4656,7 @@
             <a:r>
               <a:rPr sz="850" b="1">
                 <a:solidFill>
-                  <a:srgbClr val="C26A0A"/>
+                  <a:srgbClr val="0E7C6B"/>
                 </a:solidFill>
                 <a:latin typeface="Calibri"/>
               </a:rPr>
@@ -4670,7 +4669,7 @@
                 </a:solidFill>
                 <a:latin typeface="Calibri"/>
               </a:rPr>
-              <a:t>PIN dipublikasikan di pipeline Plan Vivo</a:t>
+              <a:t>Output utama SETAPAK 4: PIN disetujui, proyek tercantum &amp; dipublikasikan di pipeline Plan Vivo</a:t>
             </a:r>
           </a:p>
           <a:p>
@@ -4682,7 +4681,7 @@
             <a:r>
               <a:rPr sz="850" b="1">
                 <a:solidFill>
-                  <a:srgbClr val="C26A0A"/>
+                  <a:srgbClr val="0E7C6B"/>
                 </a:solidFill>
                 <a:latin typeface="Calibri"/>
               </a:rPr>
@@ -4695,7 +4694,7 @@
                 </a:solidFill>
                 <a:latin typeface="Calibri"/>
               </a:rPr>
-              <a:t>Investor/offtaker: pre-financing &amp; kontrak offtake berjangka (presale)</a:t>
+              <a:t>Profil proyek &amp; penjajakan investor/offtaker dimulai; pre-financing/presale berjangka berlanjut di STEP 2</a:t>
             </a:r>
           </a:p>
           <a:p>
@@ -4707,7 +4706,7 @@
             <a:r>
               <a:rPr sz="850" b="1">
                 <a:solidFill>
-                  <a:srgbClr val="C26A0A"/>
+                  <a:srgbClr val="0E7C6B"/>
                 </a:solidFill>
                 <a:latin typeface="Calibri"/>
               </a:rPr>
@@ -4720,7 +4719,7 @@
                 </a:solidFill>
                 <a:latin typeface="Calibri"/>
               </a:rPr>
-              <a:t>Pendamping teregistrasi &amp; pencatatan DPP (Permenhut 6/2026)</a:t>
+              <a:t>Status pendamping teregistrasi &amp; rencana pencatatan DPP (Permenhut 6/2026)</a:t>
             </a:r>
           </a:p>
         </p:txBody>

--- a/hutan-desa-pasir/Roadmap_HD_Pasir_PVClimate.pptx
+++ b/hutan-desa-pasir/Roadmap_HD_Pasir_PVClimate.pptx
@@ -3610,7 +3610,7 @@
                 <a:solidFill>
                   <a:srgbClr val="0E7C6B"/>
                 </a:solidFill>
-                <a:latin typeface="Calibri"/>
+                <a:latin typeface="Open Sauce Sans"/>
               </a:rPr>
               <a:t>HUTAN DESA PASIR · MEMPAWAH, KALIMANTAN BARAT · PLAN VIVO PV CLIMATE</a:t>
             </a:r>
@@ -3645,7 +3645,7 @@
                 <a:solidFill>
                   <a:srgbClr val="1B2420"/>
                 </a:solidFill>
-                <a:latin typeface="Cambria"/>
+                <a:latin typeface="Open Sauce Sans"/>
               </a:rPr>
               <a:t>Delapan tahap dari persiapan PIN sampai penjualan kredit: SETAPAK 4</a:t>
             </a:r>
@@ -3657,7 +3657,7 @@
                 <a:solidFill>
                   <a:srgbClr val="1B2420"/>
                 </a:solidFill>
-                <a:latin typeface="Cambria"/>
+                <a:latin typeface="Open Sauce Sans"/>
               </a:rPr>
               <a:t>menuntaskan Tahap 1–3 dengan output utama proyek masuk Pipeline PV</a:t>
             </a:r>
@@ -3692,7 +3692,7 @@
                 <a:solidFill>
                   <a:srgbClr val="5F6B65"/>
                 </a:solidFill>
-                <a:latin typeface="Calibri"/>
+                <a:latin typeface="Open Sauce Sans"/>
               </a:rPr>
               <a:t>1</a:t>
             </a:r>
@@ -3765,7 +3765,7 @@
                 <a:solidFill>
                   <a:srgbClr val="1B2420"/>
                 </a:solidFill>
-                <a:latin typeface="Calibri"/>
+                <a:latin typeface="Open Sauce Sans"/>
               </a:rPr>
               <a:t>STEP 1 — SETAPAK 4   </a:t>
             </a:r>
@@ -3774,7 +3774,7 @@
                 <a:solidFill>
                   <a:srgbClr val="0E7C6B"/>
                 </a:solidFill>
-                <a:latin typeface="Calibri"/>
+                <a:latin typeface="Open Sauce Sans"/>
               </a:rPr>
               <a:t>Okt 2026 – Sep 2027 · Dukungan: TAF · Pelaksana: SAMPAN Kalimantan &amp; LPHD Pasir</a:t>
             </a:r>
@@ -3813,7 +3813,7 @@
                 <a:solidFill>
                   <a:srgbClr val="0E7C6B"/>
                 </a:solidFill>
-                <a:latin typeface="Calibri"/>
+                <a:latin typeface="Open Sauce Sans"/>
               </a:rPr>
               <a:t>Cakupan program</a:t>
             </a:r>
@@ -3886,7 +3886,7 @@
                 <a:solidFill>
                   <a:srgbClr val="FFFFFF"/>
                 </a:solidFill>
-                <a:latin typeface="Calibri"/>
+                <a:latin typeface="Open Sauce Sans"/>
               </a:rPr>
               <a:t>1</a:t>
             </a:r>
@@ -3925,7 +3925,7 @@
                 <a:solidFill>
                   <a:srgbClr val="1B2420"/>
                 </a:solidFill>
-                <a:latin typeface="Calibri"/>
+                <a:latin typeface="Open Sauce Sans"/>
               </a:rPr>
               <a:t>Tahap 1 — Persiapan Pendaftaran PIN</a:t>
             </a:r>
@@ -3960,7 +3960,7 @@
                 <a:solidFill>
                   <a:srgbClr val="0E7C6B"/>
                 </a:solidFill>
-                <a:latin typeface="Calibri"/>
+                <a:latin typeface="Open Sauce Sans"/>
               </a:rPr>
               <a:t>Okt 2026 – Apr 2027 · M1–M5</a:t>
             </a:r>
@@ -3999,7 +3999,7 @@
                 <a:solidFill>
                   <a:srgbClr val="0E7C6B"/>
                 </a:solidFill>
-                <a:latin typeface="Calibri"/>
+                <a:latin typeface="Open Sauce Sans"/>
               </a:rPr>
               <a:t>▪ </a:t>
             </a:r>
@@ -4008,7 +4008,7 @@
                 <a:solidFill>
                   <a:srgbClr val="1B2420"/>
                 </a:solidFill>
-                <a:latin typeface="Calibri"/>
+                <a:latin typeface="Open Sauce Sans"/>
               </a:rPr>
               <a:t>Safeguard: FPIC tahap i–ii, GRM, E&amp;S risk screening, GESI</a:t>
             </a:r>
@@ -4024,7 +4024,7 @@
                 <a:solidFill>
                   <a:srgbClr val="0E7C6B"/>
                 </a:solidFill>
-                <a:latin typeface="Calibri"/>
+                <a:latin typeface="Open Sauce Sans"/>
               </a:rPr>
               <a:t>▪ </a:t>
             </a:r>
@@ -4033,7 +4033,7 @@
                 <a:solidFill>
                   <a:srgbClr val="1B2420"/>
                 </a:solidFill>
-                <a:latin typeface="Calibri"/>
+                <a:latin typeface="Open Sauce Sans"/>
               </a:rPr>
               <a:t>Kebutuhan: masalah &amp; kebutuhan komunitas, livelihood, kapasitas, pendanaan</a:t>
             </a:r>
@@ -4049,7 +4049,7 @@
                 <a:solidFill>
                   <a:srgbClr val="0E7C6B"/>
                 </a:solidFill>
-                <a:latin typeface="Calibri"/>
+                <a:latin typeface="Open Sauce Sans"/>
               </a:rPr>
               <a:t>▪ </a:t>
             </a:r>
@@ -4058,7 +4058,7 @@
                 <a:solidFill>
                   <a:srgbClr val="1B2420"/>
                 </a:solidFill>
-                <a:latin typeface="Calibri"/>
+                <a:latin typeface="Open Sauce Sans"/>
               </a:rPr>
               <a:t>Progres yang sudah dilakukan: status HD, rehabilitasi, patroli, KUPS</a:t>
             </a:r>
@@ -4074,7 +4074,7 @@
                 <a:solidFill>
                   <a:srgbClr val="0E7C6B"/>
                 </a:solidFill>
-                <a:latin typeface="Calibri"/>
+                <a:latin typeface="Open Sauce Sans"/>
               </a:rPr>
               <a:t>▪ </a:t>
             </a:r>
@@ -4083,7 +4083,7 @@
                 <a:solidFill>
                   <a:srgbClr val="1B2420"/>
                 </a:solidFill>
-                <a:latin typeface="Calibri"/>
+                <a:latin typeface="Open Sauce Sans"/>
               </a:rPr>
               <a:t>Data baseline dengan PV Participatory Tools → baseline &amp; project scenario</a:t>
             </a:r>
@@ -4188,7 +4188,7 @@
                 <a:solidFill>
                   <a:srgbClr val="0E7C6B"/>
                 </a:solidFill>
-                <a:latin typeface="Calibri"/>
+                <a:latin typeface="Open Sauce Sans"/>
               </a:rPr>
               <a:t>2</a:t>
             </a:r>
@@ -4227,7 +4227,7 @@
                 <a:solidFill>
                   <a:srgbClr val="1B2420"/>
                 </a:solidFill>
-                <a:latin typeface="Calibri"/>
+                <a:latin typeface="Open Sauce Sans"/>
               </a:rPr>
               <a:t>Tahap 2 — Submit PIN hingga Approval</a:t>
             </a:r>
@@ -4262,7 +4262,7 @@
                 <a:solidFill>
                   <a:srgbClr val="0E7C6B"/>
                 </a:solidFill>
-                <a:latin typeface="Calibri"/>
+                <a:latin typeface="Open Sauce Sans"/>
               </a:rPr>
               <a:t>Mar – Sep 2027 · M6–M7</a:t>
             </a:r>
@@ -4301,7 +4301,7 @@
                 <a:solidFill>
                   <a:srgbClr val="0E7C6B"/>
                 </a:solidFill>
-                <a:latin typeface="Calibri"/>
+                <a:latin typeface="Open Sauce Sans"/>
               </a:rPr>
               <a:t>▪ </a:t>
             </a:r>
@@ -4310,7 +4310,7 @@
                 <a:solidFill>
                   <a:srgbClr val="1B2420"/>
                 </a:solidFill>
-                <a:latin typeface="Calibri"/>
+                <a:latin typeface="Open Sauce Sans"/>
               </a:rPr>
               <a:t>PIN Template V1.4 + review LPHD</a:t>
             </a:r>
@@ -4326,7 +4326,7 @@
                 <a:solidFill>
                   <a:srgbClr val="0E7C6B"/>
                 </a:solidFill>
-                <a:latin typeface="Calibri"/>
+                <a:latin typeface="Open Sauce Sans"/>
               </a:rPr>
               <a:t>▪ </a:t>
             </a:r>
@@ -4335,7 +4335,7 @@
                 <a:solidFill>
                   <a:srgbClr val="1B2420"/>
                 </a:solidFill>
-                <a:latin typeface="Calibri"/>
+                <a:latin typeface="Open Sauce Sans"/>
               </a:rPr>
               <a:t>Submit ≤ Mei 2027 + PIN review fee</a:t>
             </a:r>
@@ -4351,7 +4351,7 @@
                 <a:solidFill>
                   <a:srgbClr val="0E7C6B"/>
                 </a:solidFill>
-                <a:latin typeface="Calibri"/>
+                <a:latin typeface="Open Sauce Sans"/>
               </a:rPr>
               <a:t>▪ </a:t>
             </a:r>
@@ -4360,7 +4360,7 @@
                 <a:solidFill>
                   <a:srgbClr val="1B2420"/>
                 </a:solidFill>
-                <a:latin typeface="Calibri"/>
+                <a:latin typeface="Open Sauce Sans"/>
               </a:rPr>
               <a:t>PIN review report: CAR/NIR, maks. 3 putaran</a:t>
             </a:r>
@@ -4376,7 +4376,7 @@
                 <a:solidFill>
                   <a:srgbClr val="0E7C6B"/>
                 </a:solidFill>
-                <a:latin typeface="Calibri"/>
+                <a:latin typeface="Open Sauce Sans"/>
               </a:rPr>
               <a:t>▪ </a:t>
             </a:r>
@@ -4385,7 +4385,7 @@
                 <a:solidFill>
                   <a:srgbClr val="1B2420"/>
                 </a:solidFill>
-                <a:latin typeface="Calibri"/>
+                <a:latin typeface="Open Sauce Sans"/>
               </a:rPr>
               <a:t>Approval = keputusan Plan Vivo (target Sep 2027)</a:t>
             </a:r>
@@ -4424,7 +4424,7 @@
                 <a:solidFill>
                   <a:srgbClr val="1B2420"/>
                 </a:solidFill>
-                <a:latin typeface="Calibri"/>
+                <a:latin typeface="Open Sauce Sans"/>
               </a:rPr>
               <a:t>Target SETAPAK 4: </a:t>
             </a:r>
@@ -4433,7 +4433,7 @@
                 <a:solidFill>
                   <a:srgbClr val="1B2420"/>
                 </a:solidFill>
-                <a:latin typeface="Calibri"/>
+                <a:latin typeface="Open Sauce Sans"/>
               </a:rPr>
               <a:t>PIN disetujui Plan Vivo → proyek masuk pipeline (submit ≠ approval; pipeline ≠ registrasi ≠ kredit).</a:t>
             </a:r>
@@ -4506,7 +4506,7 @@
                 <a:solidFill>
                   <a:srgbClr val="FFFFFF"/>
                 </a:solidFill>
-                <a:latin typeface="Calibri"/>
+                <a:latin typeface="Open Sauce Sans"/>
               </a:rPr>
               <a:t>3</a:t>
             </a:r>
@@ -4545,7 +4545,7 @@
                 <a:solidFill>
                   <a:srgbClr val="1B2420"/>
                 </a:solidFill>
-                <a:latin typeface="Calibri"/>
+                <a:latin typeface="Open Sauce Sans"/>
               </a:rPr>
               <a:t>Tahap 3 — Masuk Pipeline PV</a:t>
             </a:r>
@@ -4580,7 +4580,7 @@
                 <a:solidFill>
                   <a:srgbClr val="0E7C6B"/>
                 </a:solidFill>
-                <a:latin typeface="Calibri"/>
+                <a:latin typeface="Open Sauce Sans"/>
               </a:rPr>
               <a:t>★ OUTPUT UTAMA SETAPAK 4 · Sep 2027 · M7.5 · M8</a:t>
             </a:r>
@@ -4619,7 +4619,7 @@
                 <a:solidFill>
                   <a:srgbClr val="C26A0A"/>
                 </a:solidFill>
-                <a:latin typeface="Calibri"/>
+                <a:latin typeface="Open Sauce Sans"/>
               </a:rPr>
               <a:t>Setelah tahap ini: gerbang ke STEP 2</a:t>
             </a:r>
@@ -4658,7 +4658,7 @@
                 <a:solidFill>
                   <a:srgbClr val="0E7C6B"/>
                 </a:solidFill>
-                <a:latin typeface="Calibri"/>
+                <a:latin typeface="Open Sauce Sans"/>
               </a:rPr>
               <a:t>▪ </a:t>
             </a:r>
@@ -4667,7 +4667,7 @@
                 <a:solidFill>
                   <a:srgbClr val="1B2420"/>
                 </a:solidFill>
-                <a:latin typeface="Calibri"/>
+                <a:latin typeface="Open Sauce Sans"/>
               </a:rPr>
               <a:t>Output utama SETAPAK 4: PIN disetujui, proyek tercantum &amp; dipublikasikan di pipeline Plan Vivo</a:t>
             </a:r>
@@ -4683,7 +4683,7 @@
                 <a:solidFill>
                   <a:srgbClr val="0E7C6B"/>
                 </a:solidFill>
-                <a:latin typeface="Calibri"/>
+                <a:latin typeface="Open Sauce Sans"/>
               </a:rPr>
               <a:t>▪ </a:t>
             </a:r>
@@ -4692,7 +4692,7 @@
                 <a:solidFill>
                   <a:srgbClr val="1B2420"/>
                 </a:solidFill>
-                <a:latin typeface="Calibri"/>
+                <a:latin typeface="Open Sauce Sans"/>
               </a:rPr>
               <a:t>Profil proyek &amp; penjajakan investor/offtaker dimulai; pre-financing/presale berjangka berlanjut di STEP 2</a:t>
             </a:r>
@@ -4708,7 +4708,7 @@
                 <a:solidFill>
                   <a:srgbClr val="0E7C6B"/>
                 </a:solidFill>
-                <a:latin typeface="Calibri"/>
+                <a:latin typeface="Open Sauce Sans"/>
               </a:rPr>
               <a:t>▪ </a:t>
             </a:r>
@@ -4717,7 +4717,7 @@
                 <a:solidFill>
                   <a:srgbClr val="1B2420"/>
                 </a:solidFill>
-                <a:latin typeface="Calibri"/>
+                <a:latin typeface="Open Sauce Sans"/>
               </a:rPr>
               <a:t>Status pendamping teregistrasi &amp; rencana pencatatan DPP (Permenhut 6/2026)</a:t>
             </a:r>
@@ -4790,7 +4790,7 @@
                 <a:solidFill>
                   <a:srgbClr val="1B2420"/>
                 </a:solidFill>
-                <a:latin typeface="Calibri"/>
+                <a:latin typeface="Open Sauce Sans"/>
               </a:rPr>
               <a:t>STEP 2 — POST-SETAPAK 4   </a:t>
             </a:r>
@@ -4799,7 +4799,7 @@
                 <a:solidFill>
                   <a:srgbClr val="1F2A44"/>
                 </a:solidFill>
-                <a:latin typeface="Calibri"/>
+                <a:latin typeface="Open Sauce Sans"/>
               </a:rPr>
               <a:t>2027 → · Dukungan: pre-financing/offtake (Tahap 3) &amp; pendanaan lanjutan</a:t>
             </a:r>
@@ -4838,7 +4838,7 @@
                 <a:solidFill>
                   <a:srgbClr val="1F2A44"/>
                 </a:solidFill>
-                <a:latin typeface="Calibri"/>
+                <a:latin typeface="Open Sauce Sans"/>
               </a:rPr>
               <a:t>Pengembangan lanjutan</a:t>
             </a:r>
@@ -4912,7 +4912,7 @@
                 <a:solidFill>
                   <a:srgbClr val="FFFFFF"/>
                 </a:solidFill>
-                <a:latin typeface="Calibri"/>
+                <a:latin typeface="Open Sauce Sans"/>
               </a:rPr>
               <a:t>4</a:t>
             </a:r>
@@ -4947,7 +4947,7 @@
                 <a:solidFill>
                   <a:srgbClr val="1B2420"/>
                 </a:solidFill>
-                <a:latin typeface="Calibri"/>
+                <a:latin typeface="Open Sauce Sans"/>
               </a:rPr>
               <a:t>Penyusunan</a:t>
             </a:r>
@@ -4959,7 +4959,7 @@
                 <a:solidFill>
                   <a:srgbClr val="1B2420"/>
                 </a:solidFill>
-                <a:latin typeface="Calibri"/>
+                <a:latin typeface="Open Sauce Sans"/>
               </a:rPr>
               <a:t>PDD</a:t>
             </a:r>
@@ -4994,7 +4994,7 @@
                 <a:solidFill>
                   <a:srgbClr val="1F2A44"/>
                 </a:solidFill>
-                <a:latin typeface="Calibri"/>
+                <a:latin typeface="Open Sauce Sans"/>
               </a:rPr>
               <a:t>M9</a:t>
             </a:r>
@@ -5029,7 +5029,7 @@
                 <a:solidFill>
                   <a:srgbClr val="5F6B65"/>
                 </a:solidFill>
-                <a:latin typeface="Calibri"/>
+                <a:latin typeface="Open Sauce Sans"/>
               </a:rPr>
               <a:t>Metodologi disetujui · screening ·</a:t>
             </a:r>
@@ -5041,7 +5041,7 @@
                 <a:solidFill>
                   <a:srgbClr val="5F6B65"/>
                 </a:solidFill>
-                <a:latin typeface="Calibri"/>
+                <a:latin typeface="Open Sauce Sans"/>
               </a:rPr>
               <a:t>konsultasi publik · PDD review</a:t>
             </a:r>
@@ -5082,7 +5082,7 @@
                 <a:solidFill>
                   <a:srgbClr val="1F2A44"/>
                 </a:solidFill>
-                <a:latin typeface="Calibri"/>
+                <a:latin typeface="Open Sauce Sans"/>
               </a:rPr>
               <a:t>5</a:t>
             </a:r>
@@ -5117,7 +5117,7 @@
                 <a:solidFill>
                   <a:srgbClr val="1B2420"/>
                 </a:solidFill>
-                <a:latin typeface="Calibri"/>
+                <a:latin typeface="Open Sauce Sans"/>
               </a:rPr>
               <a:t>Validasi &amp;</a:t>
             </a:r>
@@ -5129,7 +5129,7 @@
                 <a:solidFill>
                   <a:srgbClr val="1B2420"/>
                 </a:solidFill>
-                <a:latin typeface="Calibri"/>
+                <a:latin typeface="Open Sauce Sans"/>
               </a:rPr>
               <a:t>Registrasi</a:t>
             </a:r>
@@ -5164,7 +5164,7 @@
                 <a:solidFill>
                   <a:srgbClr val="1F2A44"/>
                 </a:solidFill>
-                <a:latin typeface="Calibri"/>
+                <a:latin typeface="Open Sauce Sans"/>
               </a:rPr>
               <a:t>M10</a:t>
             </a:r>
@@ -5199,7 +5199,7 @@
                 <a:solidFill>
                   <a:srgbClr val="5F6B65"/>
                 </a:solidFill>
-                <a:latin typeface="Calibri"/>
+                <a:latin typeface="Open Sauce Sans"/>
               </a:rPr>
               <a:t>DPP tercatat (Kemenhut) → VVB/IE</a:t>
             </a:r>
@@ -5211,7 +5211,7 @@
                 <a:solidFill>
                   <a:srgbClr val="5F6B65"/>
                 </a:solidFill>
-                <a:latin typeface="Calibri"/>
+                <a:latin typeface="Open Sauce Sans"/>
               </a:rPr>
               <a:t>→ MoU &amp; PV Climate Registry</a:t>
             </a:r>
@@ -5250,7 +5250,7 @@
                 <a:solidFill>
                   <a:srgbClr val="FFFFFF"/>
                 </a:solidFill>
-                <a:latin typeface="Calibri"/>
+                <a:latin typeface="Open Sauce Sans"/>
               </a:rPr>
               <a:t>6</a:t>
             </a:r>
@@ -5285,7 +5285,7 @@
                 <a:solidFill>
                   <a:srgbClr val="1B2420"/>
                 </a:solidFill>
-                <a:latin typeface="Calibri"/>
+                <a:latin typeface="Open Sauce Sans"/>
               </a:rPr>
               <a:t>Implementasi</a:t>
             </a:r>
@@ -5297,7 +5297,7 @@
                 <a:solidFill>
                   <a:srgbClr val="1B2420"/>
                 </a:solidFill>
-                <a:latin typeface="Calibri"/>
+                <a:latin typeface="Open Sauce Sans"/>
               </a:rPr>
               <a:t>&amp; Monitoring</a:t>
             </a:r>
@@ -5332,7 +5332,7 @@
                 <a:solidFill>
                   <a:srgbClr val="1F2A44"/>
                 </a:solidFill>
-                <a:latin typeface="Calibri"/>
+                <a:latin typeface="Open Sauce Sans"/>
               </a:rPr>
               <a:t>M11</a:t>
             </a:r>
@@ -5367,7 +5367,7 @@
                 <a:solidFill>
                   <a:srgbClr val="5F6B65"/>
                 </a:solidFill>
-                <a:latin typeface="Calibri"/>
+                <a:latin typeface="Open Sauce Sans"/>
               </a:rPr>
               <a:t>Annual Report tiap 12 bln</a:t>
             </a:r>
@@ -5379,7 +5379,7 @@
                 <a:solidFill>
                   <a:srgbClr val="5F6B65"/>
                 </a:solidFill>
-                <a:latin typeface="Calibri"/>
+                <a:latin typeface="Open Sauce Sans"/>
               </a:rPr>
               <a:t>(rPVC bila diminta)</a:t>
             </a:r>
@@ -5420,7 +5420,7 @@
                 <a:solidFill>
                   <a:srgbClr val="1F2A44"/>
                 </a:solidFill>
-                <a:latin typeface="Calibri"/>
+                <a:latin typeface="Open Sauce Sans"/>
               </a:rPr>
               <a:t>7</a:t>
             </a:r>
@@ -5455,7 +5455,7 @@
                 <a:solidFill>
                   <a:srgbClr val="1B2420"/>
                 </a:solidFill>
-                <a:latin typeface="Calibri"/>
+                <a:latin typeface="Open Sauce Sans"/>
               </a:rPr>
               <a:t>Verifikasi &amp;</a:t>
             </a:r>
@@ -5467,7 +5467,7 @@
                 <a:solidFill>
                   <a:srgbClr val="1B2420"/>
                 </a:solidFill>
-                <a:latin typeface="Calibri"/>
+                <a:latin typeface="Open Sauce Sans"/>
               </a:rPr>
               <a:t>Issuance</a:t>
             </a:r>
@@ -5502,7 +5502,7 @@
                 <a:solidFill>
                   <a:srgbClr val="1F2A44"/>
                 </a:solidFill>
-                <a:latin typeface="Calibri"/>
+                <a:latin typeface="Open Sauce Sans"/>
               </a:rPr>
               <a:t>M12</a:t>
             </a:r>
@@ -5537,7 +5537,7 @@
                 <a:solidFill>
                   <a:srgbClr val="5F6B65"/>
                 </a:solidFill>
-                <a:latin typeface="Calibri"/>
+                <a:latin typeface="Open Sauce Sans"/>
               </a:rPr>
               <a:t>Verifikasi ≤5 th · persetujuan</a:t>
             </a:r>
@@ -5549,7 +5549,7 @@
                 <a:solidFill>
                   <a:srgbClr val="5F6B65"/>
                 </a:solidFill>
-                <a:latin typeface="Calibri"/>
+                <a:latin typeface="Open Sauce Sans"/>
               </a:rPr>
               <a:t>Menteri → vPVC terbit</a:t>
             </a:r>
@@ -5588,7 +5588,7 @@
                 <a:solidFill>
                   <a:srgbClr val="FFFFFF"/>
                 </a:solidFill>
-                <a:latin typeface="Calibri"/>
+                <a:latin typeface="Open Sauce Sans"/>
               </a:rPr>
               <a:t>8</a:t>
             </a:r>
@@ -5623,7 +5623,7 @@
                 <a:solidFill>
                   <a:srgbClr val="1B2420"/>
                 </a:solidFill>
-                <a:latin typeface="Calibri"/>
+                <a:latin typeface="Open Sauce Sans"/>
               </a:rPr>
               <a:t>Penjualan &amp;</a:t>
             </a:r>
@@ -5635,7 +5635,7 @@
                 <a:solidFill>
                   <a:srgbClr val="1B2420"/>
                 </a:solidFill>
-                <a:latin typeface="Calibri"/>
+                <a:latin typeface="Open Sauce Sans"/>
               </a:rPr>
               <a:t>Benefit Sharing</a:t>
             </a:r>
@@ -5670,7 +5670,7 @@
                 <a:solidFill>
                   <a:srgbClr val="1F2A44"/>
                 </a:solidFill>
-                <a:latin typeface="Calibri"/>
+                <a:latin typeface="Open Sauce Sans"/>
               </a:rPr>
               <a:t>M13</a:t>
             </a:r>
@@ -5705,7 +5705,7 @@
                 <a:solidFill>
                   <a:srgbClr val="5F6B65"/>
                 </a:solidFill>
-                <a:latin typeface="Calibri"/>
+                <a:latin typeface="Open Sauce Sans"/>
               </a:rPr>
               <a:t>Offtake terealisasi · PNBP ·</a:t>
             </a:r>
@@ -5717,7 +5717,7 @@
                 <a:solidFill>
                   <a:srgbClr val="5F6B65"/>
                 </a:solidFill>
-                <a:latin typeface="Calibri"/>
+                <a:latin typeface="Open Sauce Sans"/>
               </a:rPr>
               <a:t>≥60% pendapatan ke komunitas</a:t>
             </a:r>
@@ -5756,7 +5756,7 @@
                 <a:solidFill>
                   <a:srgbClr val="1F2A44"/>
                 </a:solidFill>
-                <a:latin typeface="Calibri"/>
+                <a:latin typeface="Open Sauce Sans"/>
               </a:rPr>
               <a:t>Target akhir: </a:t>
             </a:r>
@@ -5765,7 +5765,7 @@
                 <a:solidFill>
                   <a:srgbClr val="1B2420"/>
                 </a:solidFill>
-                <a:latin typeface="Calibri"/>
+                <a:latin typeface="Open Sauce Sans"/>
               </a:rPr>
               <a:t>vPVC terbit dan terjual, manfaat terukur bagi komunitas.   </a:t>
             </a:r>
@@ -5774,7 +5774,7 @@
                 <a:solidFill>
                   <a:srgbClr val="5F6B65"/>
                 </a:solidFill>
-                <a:latin typeface="Calibri"/>
+                <a:latin typeface="Open Sauce Sans"/>
               </a:rPr>
               <a:t>■ internal   ◆ keputusan eksternal (Plan Vivo / VVB / Menteri)</a:t>
             </a:r>
@@ -5827,7 +5827,7 @@
                 <a:solidFill>
                   <a:srgbClr val="0E7C6B"/>
                 </a:solidFill>
-                <a:latin typeface="Calibri"/>
+                <a:latin typeface="Open Sauce Sans"/>
               </a:rPr>
               <a:t>HUTAN DESA PASIR · MEMPAWAH, KALIMANTAN BARAT · PLAN VIVO PV CLIMATE</a:t>
             </a:r>
@@ -5862,7 +5862,7 @@
                 <a:solidFill>
                   <a:srgbClr val="1B2420"/>
                 </a:solidFill>
-                <a:latin typeface="Cambria"/>
+                <a:latin typeface="Open Sauce Sans"/>
               </a:rPr>
               <a:t>SETAPAK 4 membawa proyek sampai gerbang Plan Vivo Pipeline —</a:t>
             </a:r>
@@ -5874,7 +5874,7 @@
                 <a:solidFill>
                   <a:srgbClr val="1B2420"/>
                 </a:solidFill>
-                <a:latin typeface="Cambria"/>
+                <a:latin typeface="Open Sauce Sans"/>
               </a:rPr>
               <a:t>kredit karbon baru lahir di fase pengembangan berikutnya</a:t>
             </a:r>
@@ -5909,7 +5909,7 @@
                 <a:solidFill>
                   <a:srgbClr val="5F6B65"/>
                 </a:solidFill>
-                <a:latin typeface="Calibri"/>
+                <a:latin typeface="Open Sauce Sans"/>
               </a:rPr>
               <a:t>2</a:t>
             </a:r>
@@ -5974,22 +5974,22 @@
               </a:spcAft>
             </a:pPr>
             <a:r>
-              <a:rPr sz="1000" b="1">
+              <a:rPr sz="900" b="1">
                 <a:solidFill>
                   <a:srgbClr val="FFFFFF"/>
                 </a:solidFill>
-                <a:latin typeface="Calibri"/>
+                <a:latin typeface="Open Sauce Sans"/>
               </a:rPr>
               <a:t>STEP 1 · SETAPAK 4 (didukung TAF)  </a:t>
             </a:r>
             <a:r>
-              <a:rPr sz="1000" b="0">
+              <a:rPr sz="900" b="0">
                 <a:solidFill>
                   <a:srgbClr val="FFFFFF"/>
                 </a:solidFill>
-                <a:latin typeface="Calibri"/>
-              </a:rPr>
-              <a:t>Persiapan → PIN → Pipeline · SAMPAN Kalimantan &amp; LPHD Pasir · Okt 2026 – Sep 2027</a:t>
+                <a:latin typeface="Open Sauce Sans"/>
+              </a:rPr>
+              <a:t>Persiapan → PIN → Pipeline · Okt 2026 – Sep 2027</a:t>
             </a:r>
           </a:p>
         </p:txBody>
@@ -6052,22 +6052,22 @@
               </a:spcAft>
             </a:pPr>
             <a:r>
-              <a:rPr sz="1000" b="1">
+              <a:rPr sz="900" b="1">
                 <a:solidFill>
                   <a:srgbClr val="FFFFFF"/>
                 </a:solidFill>
-                <a:latin typeface="Calibri"/>
+                <a:latin typeface="Open Sauce Sans"/>
               </a:rPr>
               <a:t>STEP 2 · POST-SETAPAK 4  </a:t>
             </a:r>
             <a:r>
-              <a:rPr sz="1000" b="0">
+              <a:rPr sz="900" b="0">
                 <a:solidFill>
                   <a:srgbClr val="FFFFFF"/>
                 </a:solidFill>
-                <a:latin typeface="Calibri"/>
-              </a:rPr>
-              <a:t>PDD → kredit → penjualan · Q4 2027+ (indikatif)</a:t>
+                <a:latin typeface="Open Sauce Sans"/>
+              </a:rPr>
+              <a:t>PDD → kredit → penjualan · 2027+</a:t>
             </a:r>
           </a:p>
         </p:txBody>
@@ -6140,7 +6140,7 @@
                 <a:solidFill>
                   <a:srgbClr val="FFFFFF"/>
                 </a:solidFill>
-                <a:latin typeface="Calibri"/>
+                <a:latin typeface="Open Sauce Sans"/>
               </a:rPr>
               <a:t>TRANSITION GATE</a:t>
             </a:r>
@@ -6245,7 +6245,7 @@
                 <a:solidFill>
                   <a:srgbClr val="5F6B65"/>
                 </a:solidFill>
-                <a:latin typeface="Calibri"/>
+                <a:latin typeface="Open Sauce Sans"/>
               </a:rPr>
               <a:t>Okt 26–Nov 26</a:t>
             </a:r>
@@ -6280,11 +6280,11 @@
           <a:p>
             <a:pPr algn="ctr"/>
             <a:r>
-              <a:rPr sz="1050" b="1">
+              <a:rPr sz="950" b="1">
                 <a:solidFill>
                   <a:srgbClr val="FFFFFF"/>
                 </a:solidFill>
-                <a:latin typeface="Calibri"/>
+                <a:latin typeface="Open Sauce Sans"/>
               </a:rPr>
               <a:t>M1</a:t>
             </a:r>
@@ -6315,11 +6315,11 @@
           <a:p>
             <a:pPr algn="ctr"/>
             <a:r>
-              <a:rPr sz="900" b="1" i="0">
+              <a:rPr sz="800" b="1" i="0">
                 <a:solidFill>
                   <a:srgbClr val="1B2420"/>
                 </a:solidFill>
-                <a:latin typeface="Calibri"/>
+                <a:latin typeface="Open Sauce Sans"/>
               </a:rPr>
               <a:t>Inisiasi &amp;</a:t>
             </a:r>
@@ -6327,11 +6327,11 @@
           <a:p>
             <a:pPr algn="ctr"/>
             <a:r>
-              <a:rPr sz="900" b="1" i="0">
+              <a:rPr sz="800" b="1" i="0">
                 <a:solidFill>
                   <a:srgbClr val="1B2420"/>
                 </a:solidFill>
-                <a:latin typeface="Calibri"/>
+                <a:latin typeface="Open Sauce Sans"/>
               </a:rPr>
               <a:t>kelembagaan</a:t>
             </a:r>
@@ -6362,11 +6362,11 @@
           <a:p>
             <a:pPr algn="ctr"/>
             <a:r>
-              <a:rPr sz="750" b="0" i="0">
+              <a:rPr sz="700" b="0" i="0">
                 <a:solidFill>
                   <a:srgbClr val="5F6B65"/>
                 </a:solidFill>
-                <a:latin typeface="Calibri"/>
+                <a:latin typeface="Open Sauce Sans"/>
               </a:rPr>
               <a:t>PKS SAMPAN–LPHD,</a:t>
             </a:r>
@@ -6374,11 +6374,11 @@
           <a:p>
             <a:pPr algn="ctr"/>
             <a:r>
-              <a:rPr sz="750" b="0" i="0">
+              <a:rPr sz="700" b="0" i="0">
                 <a:solidFill>
                   <a:srgbClr val="5F6B65"/>
                 </a:solidFill>
-                <a:latin typeface="Calibri"/>
+                <a:latin typeface="Open Sauce Sans"/>
               </a:rPr>
               <a:t>memo legal awal</a:t>
             </a:r>
@@ -6413,7 +6413,7 @@
                 <a:solidFill>
                   <a:srgbClr val="5F6B65"/>
                 </a:solidFill>
-                <a:latin typeface="Calibri"/>
+                <a:latin typeface="Open Sauce Sans"/>
               </a:rPr>
               <a:t>Nov 26–Des 26</a:t>
             </a:r>
@@ -6448,11 +6448,11 @@
           <a:p>
             <a:pPr algn="ctr"/>
             <a:r>
-              <a:rPr sz="1050" b="1">
+              <a:rPr sz="950" b="1">
                 <a:solidFill>
                   <a:srgbClr val="FFFFFF"/>
                 </a:solidFill>
-                <a:latin typeface="Calibri"/>
+                <a:latin typeface="Open Sauce Sans"/>
               </a:rPr>
               <a:t>M2</a:t>
             </a:r>
@@ -6483,11 +6483,11 @@
           <a:p>
             <a:pPr algn="ctr"/>
             <a:r>
-              <a:rPr sz="900" b="1" i="0">
+              <a:rPr sz="800" b="1" i="0">
                 <a:solidFill>
                   <a:srgbClr val="1B2420"/>
                 </a:solidFill>
-                <a:latin typeface="Calibri"/>
+                <a:latin typeface="Open Sauce Sans"/>
               </a:rPr>
               <a:t>Identifikasi &amp;</a:t>
             </a:r>
@@ -6495,11 +6495,11 @@
           <a:p>
             <a:pPr algn="ctr"/>
             <a:r>
-              <a:rPr sz="900" b="1" i="0">
+              <a:rPr sz="800" b="1" i="0">
                 <a:solidFill>
                   <a:srgbClr val="1B2420"/>
                 </a:solidFill>
-                <a:latin typeface="Calibri"/>
+                <a:latin typeface="Open Sauce Sans"/>
               </a:rPr>
               <a:t>keterlibatan pihak</a:t>
             </a:r>
@@ -6530,11 +6530,11 @@
           <a:p>
             <a:pPr algn="ctr"/>
             <a:r>
-              <a:rPr sz="750" b="0" i="0">
+              <a:rPr sz="700" b="0" i="0">
                 <a:solidFill>
                   <a:srgbClr val="5F6B65"/>
                 </a:solidFill>
-                <a:latin typeface="Calibri"/>
+                <a:latin typeface="Open Sauce Sans"/>
               </a:rPr>
               <a:t>Stakeholder register,</a:t>
             </a:r>
@@ -6542,11 +6542,11 @@
           <a:p>
             <a:pPr algn="ctr"/>
             <a:r>
-              <a:rPr sz="750" b="0" i="0">
+              <a:rPr sz="700" b="0" i="0">
                 <a:solidFill>
                   <a:srgbClr val="5F6B65"/>
                 </a:solidFill>
-                <a:latin typeface="Calibri"/>
+                <a:latin typeface="Open Sauce Sans"/>
               </a:rPr>
               <a:t>SEP</a:t>
             </a:r>
@@ -6581,7 +6581,7 @@
                 <a:solidFill>
                   <a:srgbClr val="5F6B65"/>
                 </a:solidFill>
-                <a:latin typeface="Calibri"/>
+                <a:latin typeface="Open Sauce Sans"/>
               </a:rPr>
               <a:t>Des 26–Apr 27</a:t>
             </a:r>
@@ -6616,11 +6616,11 @@
           <a:p>
             <a:pPr algn="ctr"/>
             <a:r>
-              <a:rPr sz="1050" b="1">
+              <a:rPr sz="950" b="1">
                 <a:solidFill>
                   <a:srgbClr val="FFFFFF"/>
                 </a:solidFill>
-                <a:latin typeface="Calibri"/>
+                <a:latin typeface="Open Sauce Sans"/>
               </a:rPr>
               <a:t>M3</a:t>
             </a:r>
@@ -6651,11 +6651,11 @@
           <a:p>
             <a:pPr algn="ctr"/>
             <a:r>
-              <a:rPr sz="900" b="1" i="0">
+              <a:rPr sz="800" b="1" i="0">
                 <a:solidFill>
                   <a:srgbClr val="1B2420"/>
                 </a:solidFill>
-                <a:latin typeface="Calibri"/>
+                <a:latin typeface="Open Sauce Sans"/>
               </a:rPr>
               <a:t>Kajian partisipatif</a:t>
             </a:r>
@@ -6663,11 +6663,11 @@
           <a:p>
             <a:pPr algn="ctr"/>
             <a:r>
-              <a:rPr sz="900" b="1" i="0">
+              <a:rPr sz="800" b="1" i="0">
                 <a:solidFill>
                   <a:srgbClr val="1B2420"/>
                 </a:solidFill>
-                <a:latin typeface="Calibri"/>
+                <a:latin typeface="Open Sauce Sans"/>
               </a:rPr>
               <a:t>&amp; FPIC</a:t>
             </a:r>
@@ -6698,11 +6698,11 @@
           <a:p>
             <a:pPr algn="ctr"/>
             <a:r>
-              <a:rPr sz="750" b="0" i="0">
+              <a:rPr sz="700" b="0" i="0">
                 <a:solidFill>
                   <a:srgbClr val="5F6B65"/>
                 </a:solidFill>
-                <a:latin typeface="Calibri"/>
+                <a:latin typeface="Open Sauce Sans"/>
               </a:rPr>
               <a:t>BA FPIC tahap i–ii,</a:t>
             </a:r>
@@ -6710,11 +6710,11 @@
           <a:p>
             <a:pPr algn="ctr"/>
             <a:r>
-              <a:rPr sz="750" b="0" i="0">
+              <a:rPr sz="700" b="0" i="0">
                 <a:solidFill>
                   <a:srgbClr val="5F6B65"/>
                 </a:solidFill>
-                <a:latin typeface="Calibri"/>
+                <a:latin typeface="Open Sauce Sans"/>
               </a:rPr>
               <a:t>GRM aktif</a:t>
             </a:r>
@@ -6749,7 +6749,7 @@
                 <a:solidFill>
                   <a:srgbClr val="5F6B65"/>
                 </a:solidFill>
-                <a:latin typeface="Calibri"/>
+                <a:latin typeface="Open Sauce Sans"/>
               </a:rPr>
               <a:t>Jan 27–Jul 27</a:t>
             </a:r>
@@ -6784,11 +6784,11 @@
           <a:p>
             <a:pPr algn="ctr"/>
             <a:r>
-              <a:rPr sz="1050" b="1">
+              <a:rPr sz="950" b="1">
                 <a:solidFill>
                   <a:srgbClr val="FFFFFF"/>
                 </a:solidFill>
-                <a:latin typeface="Calibri"/>
+                <a:latin typeface="Open Sauce Sans"/>
               </a:rPr>
               <a:t>M4</a:t>
             </a:r>
@@ -6819,11 +6819,11 @@
           <a:p>
             <a:pPr algn="ctr"/>
             <a:r>
-              <a:rPr sz="900" b="1" i="0">
+              <a:rPr sz="800" b="1" i="0">
                 <a:solidFill>
                   <a:srgbClr val="1B2420"/>
                 </a:solidFill>
-                <a:latin typeface="Calibri"/>
+                <a:latin typeface="Open Sauce Sans"/>
               </a:rPr>
               <a:t>KUPS, WFD &amp;</a:t>
             </a:r>
@@ -6831,11 +6831,11 @@
           <a:p>
             <a:pPr algn="ctr"/>
             <a:r>
-              <a:rPr sz="900" b="1" i="0">
+              <a:rPr sz="800" b="1" i="0">
                 <a:solidFill>
                   <a:srgbClr val="1B2420"/>
                 </a:solidFill>
-                <a:latin typeface="Calibri"/>
+                <a:latin typeface="Open Sauce Sans"/>
               </a:rPr>
               <a:t>livelihood</a:t>
             </a:r>
@@ -6866,11 +6866,11 @@
           <a:p>
             <a:pPr algn="ctr"/>
             <a:r>
-              <a:rPr sz="750" b="0" i="0">
+              <a:rPr sz="700" b="0" i="0">
                 <a:solidFill>
                   <a:srgbClr val="5F6B65"/>
                 </a:solidFill>
-                <a:latin typeface="Calibri"/>
+                <a:latin typeface="Open Sauce Sans"/>
               </a:rPr>
               <a:t>ToC, prinsip</a:t>
             </a:r>
@@ -6878,11 +6878,11 @@
           <a:p>
             <a:pPr algn="ctr"/>
             <a:r>
-              <a:rPr sz="750" b="0" i="0">
+              <a:rPr sz="700" b="0" i="0">
                 <a:solidFill>
                   <a:srgbClr val="5F6B65"/>
                 </a:solidFill>
-                <a:latin typeface="Calibri"/>
+                <a:latin typeface="Open Sauce Sans"/>
               </a:rPr>
               <a:t>benefit-sharing</a:t>
             </a:r>
@@ -6917,7 +6917,7 @@
                 <a:solidFill>
                   <a:srgbClr val="5F6B65"/>
                 </a:solidFill>
-                <a:latin typeface="Calibri"/>
+                <a:latin typeface="Open Sauce Sans"/>
               </a:rPr>
               <a:t>Des 26–Apr 27</a:t>
             </a:r>
@@ -6952,11 +6952,11 @@
           <a:p>
             <a:pPr algn="ctr"/>
             <a:r>
-              <a:rPr sz="1050" b="1">
+              <a:rPr sz="950" b="1">
                 <a:solidFill>
                   <a:srgbClr val="FFFFFF"/>
                 </a:solidFill>
-                <a:latin typeface="Calibri"/>
+                <a:latin typeface="Open Sauce Sans"/>
               </a:rPr>
               <a:t>M5</a:t>
             </a:r>
@@ -6987,11 +6987,11 @@
           <a:p>
             <a:pPr algn="ctr"/>
             <a:r>
-              <a:rPr sz="900" b="1" i="0">
+              <a:rPr sz="800" b="1" i="0">
                 <a:solidFill>
                   <a:srgbClr val="1B2420"/>
                 </a:solidFill>
-                <a:latin typeface="Calibri"/>
+                <a:latin typeface="Open Sauce Sans"/>
               </a:rPr>
               <a:t>Baseline &amp;</a:t>
             </a:r>
@@ -6999,11 +6999,11 @@
           <a:p>
             <a:pPr algn="ctr"/>
             <a:r>
-              <a:rPr sz="900" b="1" i="0">
+              <a:rPr sz="800" b="1" i="0">
                 <a:solidFill>
                   <a:srgbClr val="1B2420"/>
                 </a:solidFill>
-                <a:latin typeface="Calibri"/>
+                <a:latin typeface="Open Sauce Sans"/>
               </a:rPr>
               <a:t>project scenario</a:t>
             </a:r>
@@ -7034,11 +7034,11 @@
           <a:p>
             <a:pPr algn="ctr"/>
             <a:r>
-              <a:rPr sz="750" b="0" i="0">
+              <a:rPr sz="700" b="0" i="0">
                 <a:solidFill>
                   <a:srgbClr val="5F6B65"/>
                 </a:solidFill>
-                <a:latin typeface="Calibri"/>
+                <a:latin typeface="Open Sauce Sans"/>
               </a:rPr>
               <a:t>Baseline vs project</a:t>
             </a:r>
@@ -7046,11 +7046,11 @@
           <a:p>
             <a:pPr algn="ctr"/>
             <a:r>
-              <a:rPr sz="750" b="0" i="0">
+              <a:rPr sz="700" b="0" i="0">
                 <a:solidFill>
                   <a:srgbClr val="5F6B65"/>
                 </a:solidFill>
-                <a:latin typeface="Calibri"/>
+                <a:latin typeface="Open Sauce Sans"/>
               </a:rPr>
               <a:t>scenario, Go/No-Go</a:t>
             </a:r>
@@ -7085,7 +7085,7 @@
                 <a:solidFill>
                   <a:srgbClr val="5F6B65"/>
                 </a:solidFill>
-                <a:latin typeface="Calibri"/>
+                <a:latin typeface="Open Sauce Sans"/>
               </a:rPr>
               <a:t>Mar 27–Mei 27</a:t>
             </a:r>
@@ -7120,11 +7120,11 @@
           <a:p>
             <a:pPr algn="ctr"/>
             <a:r>
-              <a:rPr sz="1050" b="1">
+              <a:rPr sz="950" b="1">
                 <a:solidFill>
                   <a:srgbClr val="FFFFFF"/>
                 </a:solidFill>
-                <a:latin typeface="Calibri"/>
+                <a:latin typeface="Open Sauce Sans"/>
               </a:rPr>
               <a:t>M6</a:t>
             </a:r>
@@ -7155,11 +7155,11 @@
           <a:p>
             <a:pPr algn="ctr"/>
             <a:r>
-              <a:rPr sz="900" b="1" i="0">
+              <a:rPr sz="800" b="1" i="0">
                 <a:solidFill>
                   <a:srgbClr val="1B2420"/>
                 </a:solidFill>
-                <a:latin typeface="Calibri"/>
+                <a:latin typeface="Open Sauce Sans"/>
               </a:rPr>
               <a:t>Penyusunan &amp;</a:t>
             </a:r>
@@ -7167,11 +7167,11 @@
           <a:p>
             <a:pPr algn="ctr"/>
             <a:r>
-              <a:rPr sz="900" b="1" i="0">
+              <a:rPr sz="800" b="1" i="0">
                 <a:solidFill>
                   <a:srgbClr val="1B2420"/>
                 </a:solidFill>
-                <a:latin typeface="Calibri"/>
+                <a:latin typeface="Open Sauce Sans"/>
               </a:rPr>
               <a:t>pengajuan PIN</a:t>
             </a:r>
@@ -7202,11 +7202,11 @@
           <a:p>
             <a:pPr algn="ctr"/>
             <a:r>
-              <a:rPr sz="750" b="0" i="0">
+              <a:rPr sz="700" b="0" i="0">
                 <a:solidFill>
                   <a:srgbClr val="5F6B65"/>
                 </a:solidFill>
-                <a:latin typeface="Calibri"/>
+                <a:latin typeface="Open Sauce Sans"/>
               </a:rPr>
               <a:t>PIN terkirim</a:t>
             </a:r>
@@ -7214,11 +7214,11 @@
           <a:p>
             <a:pPr algn="ctr"/>
             <a:r>
-              <a:rPr sz="750" b="0" i="0">
+              <a:rPr sz="700" b="0" i="0">
                 <a:solidFill>
                   <a:srgbClr val="5F6B65"/>
                 </a:solidFill>
-                <a:latin typeface="Calibri"/>
+                <a:latin typeface="Open Sauce Sans"/>
               </a:rPr>
               <a:t>+ fee dibayar</a:t>
             </a:r>
@@ -7253,7 +7253,7 @@
                 <a:solidFill>
                   <a:srgbClr val="5F6B65"/>
                 </a:solidFill>
-                <a:latin typeface="Calibri"/>
+                <a:latin typeface="Open Sauce Sans"/>
               </a:rPr>
               <a:t>Mei 27–Sep 27</a:t>
             </a:r>
@@ -7290,11 +7290,11 @@
           <a:p>
             <a:pPr algn="ctr"/>
             <a:r>
-              <a:rPr sz="1050" b="1">
+              <a:rPr sz="900" b="1">
                 <a:solidFill>
                   <a:srgbClr val="0E7C6B"/>
                 </a:solidFill>
-                <a:latin typeface="Calibri"/>
+                <a:latin typeface="Open Sauce Sans"/>
               </a:rPr>
               <a:t>M7</a:t>
             </a:r>
@@ -7325,11 +7325,11 @@
           <a:p>
             <a:pPr algn="ctr"/>
             <a:r>
-              <a:rPr sz="900" b="1" i="0">
+              <a:rPr sz="800" b="1" i="0">
                 <a:solidFill>
                   <a:srgbClr val="1B2420"/>
                 </a:solidFill>
-                <a:latin typeface="Calibri"/>
+                <a:latin typeface="Open Sauce Sans"/>
               </a:rPr>
               <a:t>Penerimaan</a:t>
             </a:r>
@@ -7337,11 +7337,11 @@
           <a:p>
             <a:pPr algn="ctr"/>
             <a:r>
-              <a:rPr sz="900" b="1" i="0">
+              <a:rPr sz="800" b="1" i="0">
                 <a:solidFill>
                   <a:srgbClr val="1B2420"/>
                 </a:solidFill>
-                <a:latin typeface="Calibri"/>
+                <a:latin typeface="Open Sauce Sans"/>
               </a:rPr>
               <a:t>Pipeline</a:t>
             </a:r>
@@ -7372,11 +7372,11 @@
           <a:p>
             <a:pPr algn="ctr"/>
             <a:r>
-              <a:rPr sz="750" b="0" i="0">
+              <a:rPr sz="700" b="0" i="0">
                 <a:solidFill>
                   <a:srgbClr val="5F6B65"/>
                 </a:solidFill>
-                <a:latin typeface="Calibri"/>
+                <a:latin typeface="Open Sauce Sans"/>
               </a:rPr>
               <a:t>PIN disetujui,</a:t>
             </a:r>
@@ -7384,11 +7384,11 @@
           <a:p>
             <a:pPr algn="ctr"/>
             <a:r>
-              <a:rPr sz="750" b="0" i="0">
+              <a:rPr sz="700" b="0" i="0">
                 <a:solidFill>
                   <a:srgbClr val="5F6B65"/>
                 </a:solidFill>
-                <a:latin typeface="Calibri"/>
+                <a:latin typeface="Open Sauce Sans"/>
               </a:rPr>
               <a:t>tercantum di pipeline</a:t>
             </a:r>
@@ -7403,29 +7403,29 @@
         </p:nvSpPr>
         <p:spPr>
           <a:xfrm>
-            <a:off x="7662672" y="2075688"/>
-            <a:ext cx="768096" cy="182880"/>
-          </a:xfrm>
-          <a:prstGeom prst="rect">
-            <a:avLst/>
-          </a:prstGeom>
-          <a:noFill/>
-        </p:spPr>
-        <p:txBody>
-          <a:bodyPr wrap="square" lIns="18288" rIns="18288" tIns="9144" bIns="9144" anchor="t">
-            <a:spAutoFit/>
-          </a:bodyPr>
-          <a:lstStyle/>
-          <a:p>
-            <a:pPr algn="ctr"/>
-            <a:r>
-              <a:rPr sz="650" b="0" i="0">
+            <a:off x="7662672" y="2011680"/>
+            <a:ext cx="768096" cy="274320"/>
+          </a:xfrm>
+          <a:prstGeom prst="rect">
+            <a:avLst/>
+          </a:prstGeom>
+          <a:noFill/>
+        </p:spPr>
+        <p:txBody>
+          <a:bodyPr wrap="square" lIns="18288" rIns="18288" tIns="9144" bIns="9144" anchor="t">
+            <a:spAutoFit/>
+          </a:bodyPr>
+          <a:lstStyle/>
+          <a:p>
+            <a:pPr algn="ctr"/>
+            <a:r>
+              <a:rPr sz="600" b="0" i="0">
                 <a:solidFill>
                   <a:srgbClr val="5F6B65"/>
                 </a:solidFill>
-                <a:latin typeface="Calibri"/>
-              </a:rPr>
-              <a:t>Sep 2027 – 2028</a:t>
+                <a:latin typeface="Open Sauce Sans"/>
+              </a:rPr>
+              <a:t>2027–2028</a:t>
             </a:r>
           </a:p>
         </p:txBody>
@@ -7458,11 +7458,11 @@
           <a:p>
             <a:pPr algn="ctr"/>
             <a:r>
-              <a:rPr sz="1050" b="1">
+              <a:rPr sz="950" b="1">
                 <a:solidFill>
                   <a:srgbClr val="FFFFFF"/>
                 </a:solidFill>
-                <a:latin typeface="Calibri"/>
+                <a:latin typeface="Open Sauce Sans"/>
               </a:rPr>
               <a:t>M8</a:t>
             </a:r>
@@ -7497,7 +7497,7 @@
                 <a:solidFill>
                   <a:srgbClr val="1B2420"/>
                 </a:solidFill>
-                <a:latin typeface="Calibri"/>
+                <a:latin typeface="Open Sauce Sans"/>
               </a:rPr>
               <a:t>Pipeline &amp;</a:t>
             </a:r>
@@ -7509,7 +7509,7 @@
                 <a:solidFill>
                   <a:srgbClr val="1B2420"/>
                 </a:solidFill>
-                <a:latin typeface="Calibri"/>
+                <a:latin typeface="Open Sauce Sans"/>
               </a:rPr>
               <a:t>investasi</a:t>
             </a:r>
@@ -7544,7 +7544,7 @@
                 <a:solidFill>
                   <a:srgbClr val="5F6B65"/>
                 </a:solidFill>
-                <a:latin typeface="Calibri"/>
+                <a:latin typeface="Open Sauce Sans"/>
               </a:rPr>
               <a:t>Pre-financing /</a:t>
             </a:r>
@@ -7556,7 +7556,7 @@
                 <a:solidFill>
                   <a:srgbClr val="5F6B65"/>
                 </a:solidFill>
-                <a:latin typeface="Calibri"/>
+                <a:latin typeface="Open Sauce Sans"/>
               </a:rPr>
               <a:t>offtake berjangka</a:t>
             </a:r>
@@ -7571,27 +7571,27 @@
         </p:nvSpPr>
         <p:spPr>
           <a:xfrm>
-            <a:off x="8403336" y="2075688"/>
-            <a:ext cx="768096" cy="182880"/>
-          </a:xfrm>
-          <a:prstGeom prst="rect">
-            <a:avLst/>
-          </a:prstGeom>
-          <a:noFill/>
-        </p:spPr>
-        <p:txBody>
-          <a:bodyPr wrap="square" lIns="18288" rIns="18288" tIns="9144" bIns="9144" anchor="t">
-            <a:spAutoFit/>
-          </a:bodyPr>
-          <a:lstStyle/>
-          <a:p>
-            <a:pPr algn="ctr"/>
-            <a:r>
-              <a:rPr sz="650" b="0" i="0">
+            <a:off x="8403336" y="2011680"/>
+            <a:ext cx="768096" cy="274320"/>
+          </a:xfrm>
+          <a:prstGeom prst="rect">
+            <a:avLst/>
+          </a:prstGeom>
+          <a:noFill/>
+        </p:spPr>
+        <p:txBody>
+          <a:bodyPr wrap="square" lIns="18288" rIns="18288" tIns="9144" bIns="9144" anchor="t">
+            <a:spAutoFit/>
+          </a:bodyPr>
+          <a:lstStyle/>
+          <a:p>
+            <a:pPr algn="ctr"/>
+            <a:r>
+              <a:rPr sz="600" b="0" i="0">
                 <a:solidFill>
                   <a:srgbClr val="5F6B65"/>
                 </a:solidFill>
-                <a:latin typeface="Calibri"/>
+                <a:latin typeface="Open Sauce Sans"/>
               </a:rPr>
               <a:t>2027–2029</a:t>
             </a:r>
@@ -7626,11 +7626,11 @@
           <a:p>
             <a:pPr algn="ctr"/>
             <a:r>
-              <a:rPr sz="1050" b="1">
+              <a:rPr sz="950" b="1">
                 <a:solidFill>
                   <a:srgbClr val="FFFFFF"/>
                 </a:solidFill>
-                <a:latin typeface="Calibri"/>
+                <a:latin typeface="Open Sauce Sans"/>
               </a:rPr>
               <a:t>M9</a:t>
             </a:r>
@@ -7665,7 +7665,7 @@
                 <a:solidFill>
                   <a:srgbClr val="1B2420"/>
                 </a:solidFill>
-                <a:latin typeface="Calibri"/>
+                <a:latin typeface="Open Sauce Sans"/>
               </a:rPr>
               <a:t>Desain penuh</a:t>
             </a:r>
@@ -7677,7 +7677,7 @@
                 <a:solidFill>
                   <a:srgbClr val="1B2420"/>
                 </a:solidFill>
-                <a:latin typeface="Calibri"/>
+                <a:latin typeface="Open Sauce Sans"/>
               </a:rPr>
               <a:t>&amp; PDD</a:t>
             </a:r>
@@ -7712,7 +7712,7 @@
                 <a:solidFill>
                   <a:srgbClr val="5F6B65"/>
                 </a:solidFill>
-                <a:latin typeface="Calibri"/>
+                <a:latin typeface="Open Sauce Sans"/>
               </a:rPr>
               <a:t>PDD lolos screening</a:t>
             </a:r>
@@ -7724,7 +7724,7 @@
                 <a:solidFill>
                   <a:srgbClr val="5F6B65"/>
                 </a:solidFill>
-                <a:latin typeface="Calibri"/>
+                <a:latin typeface="Open Sauce Sans"/>
               </a:rPr>
               <a:t>&amp; review Plan Vivo</a:t>
             </a:r>
@@ -7739,27 +7739,27 @@
         </p:nvSpPr>
         <p:spPr>
           <a:xfrm>
-            <a:off x="9144000" y="2075688"/>
-            <a:ext cx="768096" cy="182880"/>
-          </a:xfrm>
-          <a:prstGeom prst="rect">
-            <a:avLst/>
-          </a:prstGeom>
-          <a:noFill/>
-        </p:spPr>
-        <p:txBody>
-          <a:bodyPr wrap="square" lIns="18288" rIns="18288" tIns="9144" bIns="9144" anchor="t">
-            <a:spAutoFit/>
-          </a:bodyPr>
-          <a:lstStyle/>
-          <a:p>
-            <a:pPr algn="ctr"/>
-            <a:r>
-              <a:rPr sz="650" b="0" i="0">
+            <a:off x="9144000" y="2011680"/>
+            <a:ext cx="768096" cy="274320"/>
+          </a:xfrm>
+          <a:prstGeom prst="rect">
+            <a:avLst/>
+          </a:prstGeom>
+          <a:noFill/>
+        </p:spPr>
+        <p:txBody>
+          <a:bodyPr wrap="square" lIns="18288" rIns="18288" tIns="9144" bIns="9144" anchor="t">
+            <a:spAutoFit/>
+          </a:bodyPr>
+          <a:lstStyle/>
+          <a:p>
+            <a:pPr algn="ctr"/>
+            <a:r>
+              <a:rPr sz="600" b="0" i="0">
                 <a:solidFill>
                   <a:srgbClr val="5F6B65"/>
                 </a:solidFill>
-                <a:latin typeface="Calibri"/>
+                <a:latin typeface="Open Sauce Sans"/>
               </a:rPr>
               <a:t>2029–2030</a:t>
             </a:r>
@@ -7796,11 +7796,11 @@
           <a:p>
             <a:pPr algn="ctr"/>
             <a:r>
-              <a:rPr sz="1050" b="1">
+              <a:rPr sz="900" b="1">
                 <a:solidFill>
                   <a:srgbClr val="1F2A44"/>
                 </a:solidFill>
-                <a:latin typeface="Calibri"/>
+                <a:latin typeface="Open Sauce Sans"/>
               </a:rPr>
               <a:t>M10</a:t>
             </a:r>
@@ -7835,7 +7835,7 @@
                 <a:solidFill>
                   <a:srgbClr val="1B2420"/>
                 </a:solidFill>
-                <a:latin typeface="Calibri"/>
+                <a:latin typeface="Open Sauce Sans"/>
               </a:rPr>
               <a:t>Validasi &amp;</a:t>
             </a:r>
@@ -7847,7 +7847,7 @@
                 <a:solidFill>
                   <a:srgbClr val="1B2420"/>
                 </a:solidFill>
-                <a:latin typeface="Calibri"/>
+                <a:latin typeface="Open Sauce Sans"/>
               </a:rPr>
               <a:t>registrasi</a:t>
             </a:r>
@@ -7882,7 +7882,7 @@
                 <a:solidFill>
                   <a:srgbClr val="5F6B65"/>
                 </a:solidFill>
-                <a:latin typeface="Calibri"/>
+                <a:latin typeface="Open Sauce Sans"/>
               </a:rPr>
               <a:t>Validation report,</a:t>
             </a:r>
@@ -7894,7 +7894,7 @@
                 <a:solidFill>
                   <a:srgbClr val="5F6B65"/>
                 </a:solidFill>
-                <a:latin typeface="Calibri"/>
+                <a:latin typeface="Open Sauce Sans"/>
               </a:rPr>
               <a:t>MoU, registry account</a:t>
             </a:r>
@@ -7909,27 +7909,27 @@
         </p:nvSpPr>
         <p:spPr>
           <a:xfrm>
-            <a:off x="9884664" y="2075688"/>
-            <a:ext cx="768096" cy="182880"/>
-          </a:xfrm>
-          <a:prstGeom prst="rect">
-            <a:avLst/>
-          </a:prstGeom>
-          <a:noFill/>
-        </p:spPr>
-        <p:txBody>
-          <a:bodyPr wrap="square" lIns="18288" rIns="18288" tIns="9144" bIns="9144" anchor="t">
-            <a:spAutoFit/>
-          </a:bodyPr>
-          <a:lstStyle/>
-          <a:p>
-            <a:pPr algn="ctr"/>
-            <a:r>
-              <a:rPr sz="650" b="0" i="0">
+            <a:off x="9884664" y="2011680"/>
+            <a:ext cx="768096" cy="274320"/>
+          </a:xfrm>
+          <a:prstGeom prst="rect">
+            <a:avLst/>
+          </a:prstGeom>
+          <a:noFill/>
+        </p:spPr>
+        <p:txBody>
+          <a:bodyPr wrap="square" lIns="18288" rIns="18288" tIns="9144" bIns="9144" anchor="t">
+            <a:spAutoFit/>
+          </a:bodyPr>
+          <a:lstStyle/>
+          <a:p>
+            <a:pPr algn="ctr"/>
+            <a:r>
+              <a:rPr sz="600" b="0" i="0">
                 <a:solidFill>
                   <a:srgbClr val="5F6B65"/>
                 </a:solidFill>
-                <a:latin typeface="Calibri"/>
+                <a:latin typeface="Open Sauce Sans"/>
               </a:rPr>
               <a:t>2030 →</a:t>
             </a:r>
@@ -7964,11 +7964,11 @@
           <a:p>
             <a:pPr algn="ctr"/>
             <a:r>
-              <a:rPr sz="1050" b="1">
+              <a:rPr sz="950" b="1">
                 <a:solidFill>
                   <a:srgbClr val="FFFFFF"/>
                 </a:solidFill>
-                <a:latin typeface="Calibri"/>
+                <a:latin typeface="Open Sauce Sans"/>
               </a:rPr>
               <a:t>M11</a:t>
             </a:r>
@@ -8003,7 +8003,7 @@
                 <a:solidFill>
                   <a:srgbClr val="1B2420"/>
                 </a:solidFill>
-                <a:latin typeface="Calibri"/>
+                <a:latin typeface="Open Sauce Sans"/>
               </a:rPr>
               <a:t>Implementasi</a:t>
             </a:r>
@@ -8015,7 +8015,7 @@
                 <a:solidFill>
                   <a:srgbClr val="1B2420"/>
                 </a:solidFill>
-                <a:latin typeface="Calibri"/>
+                <a:latin typeface="Open Sauce Sans"/>
               </a:rPr>
               <a:t>&amp; monitoring</a:t>
             </a:r>
@@ -8050,7 +8050,7 @@
                 <a:solidFill>
                   <a:srgbClr val="5F6B65"/>
                 </a:solidFill>
-                <a:latin typeface="Calibri"/>
+                <a:latin typeface="Open Sauce Sans"/>
               </a:rPr>
               <a:t>Annual Report</a:t>
             </a:r>
@@ -8062,7 +8062,7 @@
                 <a:solidFill>
                   <a:srgbClr val="5F6B65"/>
                 </a:solidFill>
-                <a:latin typeface="Calibri"/>
+                <a:latin typeface="Open Sauce Sans"/>
               </a:rPr>
               <a:t>tiap 12 bulan</a:t>
             </a:r>
@@ -8077,27 +8077,27 @@
         </p:nvSpPr>
         <p:spPr>
           <a:xfrm>
-            <a:off x="10625328" y="2075688"/>
-            <a:ext cx="768096" cy="182880"/>
-          </a:xfrm>
-          <a:prstGeom prst="rect">
-            <a:avLst/>
-          </a:prstGeom>
-          <a:noFill/>
-        </p:spPr>
-        <p:txBody>
-          <a:bodyPr wrap="square" lIns="18288" rIns="18288" tIns="9144" bIns="9144" anchor="t">
-            <a:spAutoFit/>
-          </a:bodyPr>
-          <a:lstStyle/>
-          <a:p>
-            <a:pPr algn="ctr"/>
-            <a:r>
-              <a:rPr sz="650" b="0" i="0">
+            <a:off x="10625328" y="2011680"/>
+            <a:ext cx="768096" cy="274320"/>
+          </a:xfrm>
+          <a:prstGeom prst="rect">
+            <a:avLst/>
+          </a:prstGeom>
+          <a:noFill/>
+        </p:spPr>
+        <p:txBody>
+          <a:bodyPr wrap="square" lIns="18288" rIns="18288" tIns="9144" bIns="9144" anchor="t">
+            <a:spAutoFit/>
+          </a:bodyPr>
+          <a:lstStyle/>
+          <a:p>
+            <a:pPr algn="ctr"/>
+            <a:r>
+              <a:rPr sz="600" b="0" i="0">
                 <a:solidFill>
                   <a:srgbClr val="5F6B65"/>
                 </a:solidFill>
-                <a:latin typeface="Calibri"/>
+                <a:latin typeface="Open Sauce Sans"/>
               </a:rPr>
               <a:t>≤5 th pasca-validasi</a:t>
             </a:r>
@@ -8134,11 +8134,11 @@
           <a:p>
             <a:pPr algn="ctr"/>
             <a:r>
-              <a:rPr sz="1050" b="1">
+              <a:rPr sz="900" b="1">
                 <a:solidFill>
                   <a:srgbClr val="1F2A44"/>
                 </a:solidFill>
-                <a:latin typeface="Calibri"/>
+                <a:latin typeface="Open Sauce Sans"/>
               </a:rPr>
               <a:t>M12</a:t>
             </a:r>
@@ -8173,7 +8173,7 @@
                 <a:solidFill>
                   <a:srgbClr val="1B2420"/>
                 </a:solidFill>
-                <a:latin typeface="Calibri"/>
+                <a:latin typeface="Open Sauce Sans"/>
               </a:rPr>
               <a:t>Verifikasi &amp;</a:t>
             </a:r>
@@ -8185,7 +8185,7 @@
                 <a:solidFill>
                   <a:srgbClr val="1B2420"/>
                 </a:solidFill>
-                <a:latin typeface="Calibri"/>
+                <a:latin typeface="Open Sauce Sans"/>
               </a:rPr>
               <a:t>issuance</a:t>
             </a:r>
@@ -8220,7 +8220,7 @@
                 <a:solidFill>
                   <a:srgbClr val="5F6B65"/>
                 </a:solidFill>
-                <a:latin typeface="Calibri"/>
+                <a:latin typeface="Open Sauce Sans"/>
               </a:rPr>
               <a:t>vPVC di PV Climate</a:t>
             </a:r>
@@ -8232,7 +8232,7 @@
                 <a:solidFill>
                   <a:srgbClr val="5F6B65"/>
                 </a:solidFill>
-                <a:latin typeface="Calibri"/>
+                <a:latin typeface="Open Sauce Sans"/>
               </a:rPr>
               <a:t>Registry</a:t>
             </a:r>
@@ -8247,27 +8247,27 @@
         </p:nvSpPr>
         <p:spPr>
           <a:xfrm>
-            <a:off x="11365992" y="2075688"/>
-            <a:ext cx="768096" cy="182880"/>
-          </a:xfrm>
-          <a:prstGeom prst="rect">
-            <a:avLst/>
-          </a:prstGeom>
-          <a:noFill/>
-        </p:spPr>
-        <p:txBody>
-          <a:bodyPr wrap="square" lIns="18288" rIns="18288" tIns="9144" bIns="9144" anchor="t">
-            <a:spAutoFit/>
-          </a:bodyPr>
-          <a:lstStyle/>
-          <a:p>
-            <a:pPr algn="ctr"/>
-            <a:r>
-              <a:rPr sz="650" b="0" i="0">
+            <a:off x="11365992" y="2011680"/>
+            <a:ext cx="768096" cy="274320"/>
+          </a:xfrm>
+          <a:prstGeom prst="rect">
+            <a:avLst/>
+          </a:prstGeom>
+          <a:noFill/>
+        </p:spPr>
+        <p:txBody>
+          <a:bodyPr wrap="square" lIns="18288" rIns="18288" tIns="9144" bIns="9144" anchor="t">
+            <a:spAutoFit/>
+          </a:bodyPr>
+          <a:lstStyle/>
+          <a:p>
+            <a:pPr algn="ctr"/>
+            <a:r>
+              <a:rPr sz="600" b="0" i="0">
                 <a:solidFill>
                   <a:srgbClr val="5F6B65"/>
                 </a:solidFill>
-                <a:latin typeface="Calibri"/>
+                <a:latin typeface="Open Sauce Sans"/>
               </a:rPr>
               <a:t>setelah issuance</a:t>
             </a:r>
@@ -8302,11 +8302,11 @@
           <a:p>
             <a:pPr algn="ctr"/>
             <a:r>
-              <a:rPr sz="1050" b="1">
+              <a:rPr sz="950" b="1">
                 <a:solidFill>
                   <a:srgbClr val="FFFFFF"/>
                 </a:solidFill>
-                <a:latin typeface="Calibri"/>
+                <a:latin typeface="Open Sauce Sans"/>
               </a:rPr>
               <a:t>M13</a:t>
             </a:r>
@@ -8341,7 +8341,7 @@
                 <a:solidFill>
                   <a:srgbClr val="1B2420"/>
                 </a:solidFill>
-                <a:latin typeface="Calibri"/>
+                <a:latin typeface="Open Sauce Sans"/>
               </a:rPr>
               <a:t>Penjualan &amp;</a:t>
             </a:r>
@@ -8353,7 +8353,7 @@
                 <a:solidFill>
                   <a:srgbClr val="1B2420"/>
                 </a:solidFill>
-                <a:latin typeface="Calibri"/>
+                <a:latin typeface="Open Sauce Sans"/>
               </a:rPr>
               <a:t>bagi manfaat</a:t>
             </a:r>
@@ -8388,7 +8388,7 @@
                 <a:solidFill>
                   <a:srgbClr val="5F6B65"/>
                 </a:solidFill>
-                <a:latin typeface="Calibri"/>
+                <a:latin typeface="Open Sauce Sans"/>
               </a:rPr>
               <a:t>≥60% pendapatan</a:t>
             </a:r>
@@ -8400,7 +8400,7 @@
                 <a:solidFill>
                   <a:srgbClr val="5F6B65"/>
                 </a:solidFill>
-                <a:latin typeface="Calibri"/>
+                <a:latin typeface="Open Sauce Sans"/>
               </a:rPr>
               <a:t>ke komunitas</a:t>
             </a:r>
@@ -8435,7 +8435,7 @@
                 <a:solidFill>
                   <a:srgbClr val="5F6B65"/>
                 </a:solidFill>
-                <a:latin typeface="Calibri"/>
+                <a:latin typeface="Open Sauce Sans"/>
               </a:rPr>
               <a:t>Lajur kerja (bulan program)</a:t>
             </a:r>
@@ -8470,7 +8470,7 @@
                 <a:solidFill>
                   <a:srgbClr val="5F6B65"/>
                 </a:solidFill>
-                <a:latin typeface="Calibri"/>
+                <a:latin typeface="Open Sauce Sans"/>
               </a:rPr>
               <a:t>M1</a:t>
             </a:r>
@@ -8535,7 +8535,7 @@
                 <a:solidFill>
                   <a:srgbClr val="5F6B65"/>
                 </a:solidFill>
-                <a:latin typeface="Calibri"/>
+                <a:latin typeface="Open Sauce Sans"/>
               </a:rPr>
               <a:t>M2</a:t>
             </a:r>
@@ -8600,7 +8600,7 @@
                 <a:solidFill>
                   <a:srgbClr val="5F6B65"/>
                 </a:solidFill>
-                <a:latin typeface="Calibri"/>
+                <a:latin typeface="Open Sauce Sans"/>
               </a:rPr>
               <a:t>M3</a:t>
             </a:r>
@@ -8665,7 +8665,7 @@
                 <a:solidFill>
                   <a:srgbClr val="5F6B65"/>
                 </a:solidFill>
-                <a:latin typeface="Calibri"/>
+                <a:latin typeface="Open Sauce Sans"/>
               </a:rPr>
               <a:t>M4</a:t>
             </a:r>
@@ -8730,7 +8730,7 @@
                 <a:solidFill>
                   <a:srgbClr val="5F6B65"/>
                 </a:solidFill>
-                <a:latin typeface="Calibri"/>
+                <a:latin typeface="Open Sauce Sans"/>
               </a:rPr>
               <a:t>M5</a:t>
             </a:r>
@@ -8795,7 +8795,7 @@
                 <a:solidFill>
                   <a:srgbClr val="5F6B65"/>
                 </a:solidFill>
-                <a:latin typeface="Calibri"/>
+                <a:latin typeface="Open Sauce Sans"/>
               </a:rPr>
               <a:t>M6</a:t>
             </a:r>
@@ -8860,7 +8860,7 @@
                 <a:solidFill>
                   <a:srgbClr val="5F6B65"/>
                 </a:solidFill>
-                <a:latin typeface="Calibri"/>
+                <a:latin typeface="Open Sauce Sans"/>
               </a:rPr>
               <a:t>M7</a:t>
             </a:r>
@@ -8925,7 +8925,7 @@
                 <a:solidFill>
                   <a:srgbClr val="5F6B65"/>
                 </a:solidFill>
-                <a:latin typeface="Calibri"/>
+                <a:latin typeface="Open Sauce Sans"/>
               </a:rPr>
               <a:t>Okt 26</a:t>
             </a:r>
@@ -8960,7 +8960,7 @@
                 <a:solidFill>
                   <a:srgbClr val="5F6B65"/>
                 </a:solidFill>
-                <a:latin typeface="Calibri"/>
+                <a:latin typeface="Open Sauce Sans"/>
               </a:rPr>
               <a:t>Jan 27</a:t>
             </a:r>
@@ -8995,7 +8995,7 @@
                 <a:solidFill>
                   <a:srgbClr val="5F6B65"/>
                 </a:solidFill>
-                <a:latin typeface="Calibri"/>
+                <a:latin typeface="Open Sauce Sans"/>
               </a:rPr>
               <a:t>Apr 27</a:t>
             </a:r>
@@ -9030,7 +9030,7 @@
                 <a:solidFill>
                   <a:srgbClr val="5F6B65"/>
                 </a:solidFill>
-                <a:latin typeface="Calibri"/>
+                <a:latin typeface="Open Sauce Sans"/>
               </a:rPr>
               <a:t>Jul 27</a:t>
             </a:r>
@@ -9065,7 +9065,7 @@
                 <a:solidFill>
                   <a:srgbClr val="5F6B65"/>
                 </a:solidFill>
-                <a:latin typeface="Calibri"/>
+                <a:latin typeface="Open Sauce Sans"/>
               </a:rPr>
               <a:t>Okt 27</a:t>
             </a:r>
@@ -9135,7 +9135,7 @@
                 <a:solidFill>
                   <a:srgbClr val="C26A0A"/>
                 </a:solidFill>
-                <a:latin typeface="Calibri"/>
+                <a:latin typeface="Open Sauce Sans"/>
               </a:rPr>
               <a:t>Akhir TAF · Sep 27</a:t>
             </a:r>
@@ -9170,7 +9170,7 @@
                 <a:solidFill>
                   <a:srgbClr val="C26A0A"/>
                 </a:solidFill>
-                <a:latin typeface="Calibri"/>
+                <a:latin typeface="Open Sauce Sans"/>
               </a:rPr>
               <a:t>buffer review</a:t>
             </a:r>
@@ -9182,7 +9182,7 @@
                 <a:solidFill>
                   <a:srgbClr val="C26A0A"/>
                 </a:solidFill>
-                <a:latin typeface="Calibri"/>
+                <a:latin typeface="Open Sauce Sans"/>
               </a:rPr>
               <a:t>di luar TAF</a:t>
             </a:r>
@@ -9248,7 +9248,7 @@
                 <a:solidFill>
                   <a:srgbClr val="0E7C6B"/>
                 </a:solidFill>
-                <a:latin typeface="Calibri"/>
+                <a:latin typeface="Open Sauce Sans"/>
               </a:rPr>
               <a:t>∥ M3 · M4 · M5 berjalan paralel (bulan 3–10)</a:t>
             </a:r>
@@ -9283,7 +9283,7 @@
                 <a:solidFill>
                   <a:srgbClr val="5F6B65"/>
                 </a:solidFill>
-                <a:latin typeface="Calibri"/>
+                <a:latin typeface="Open Sauce Sans"/>
               </a:rPr>
               <a:t>Lajur kerja (tahun, indikatif)</a:t>
             </a:r>
@@ -9318,7 +9318,7 @@
                 <a:solidFill>
                   <a:srgbClr val="5F6B65"/>
                 </a:solidFill>
-                <a:latin typeface="Calibri"/>
+                <a:latin typeface="Open Sauce Sans"/>
               </a:rPr>
               <a:t>M8</a:t>
             </a:r>
@@ -9383,7 +9383,7 @@
                 <a:solidFill>
                   <a:srgbClr val="5F6B65"/>
                 </a:solidFill>
-                <a:latin typeface="Calibri"/>
+                <a:latin typeface="Open Sauce Sans"/>
               </a:rPr>
               <a:t>M9</a:t>
             </a:r>
@@ -9448,7 +9448,7 @@
                 <a:solidFill>
                   <a:srgbClr val="5F6B65"/>
                 </a:solidFill>
-                <a:latin typeface="Calibri"/>
+                <a:latin typeface="Open Sauce Sans"/>
               </a:rPr>
               <a:t>M10</a:t>
             </a:r>
@@ -9513,7 +9513,7 @@
                 <a:solidFill>
                   <a:srgbClr val="5F6B65"/>
                 </a:solidFill>
-                <a:latin typeface="Calibri"/>
+                <a:latin typeface="Open Sauce Sans"/>
               </a:rPr>
               <a:t>M11</a:t>
             </a:r>
@@ -9578,7 +9578,7 @@
                 <a:solidFill>
                   <a:srgbClr val="5F6B65"/>
                 </a:solidFill>
-                <a:latin typeface="Calibri"/>
+                <a:latin typeface="Open Sauce Sans"/>
               </a:rPr>
               <a:t>M12</a:t>
             </a:r>
@@ -9643,7 +9643,7 @@
                 <a:solidFill>
                   <a:srgbClr val="5F6B65"/>
                 </a:solidFill>
-                <a:latin typeface="Calibri"/>
+                <a:latin typeface="Open Sauce Sans"/>
               </a:rPr>
               <a:t>M13</a:t>
             </a:r>
@@ -9741,7 +9741,7 @@
                 <a:solidFill>
                   <a:srgbClr val="5F6B65"/>
                 </a:solidFill>
-                <a:latin typeface="Calibri"/>
+                <a:latin typeface="Open Sauce Sans"/>
               </a:rPr>
               <a:t>2028</a:t>
             </a:r>
@@ -9776,7 +9776,7 @@
                 <a:solidFill>
                   <a:srgbClr val="5F6B65"/>
                 </a:solidFill>
-                <a:latin typeface="Calibri"/>
+                <a:latin typeface="Open Sauce Sans"/>
               </a:rPr>
               <a:t>2029</a:t>
             </a:r>
@@ -9811,7 +9811,7 @@
                 <a:solidFill>
                   <a:srgbClr val="5F6B65"/>
                 </a:solidFill>
-                <a:latin typeface="Calibri"/>
+                <a:latin typeface="Open Sauce Sans"/>
               </a:rPr>
               <a:t>2030</a:t>
             </a:r>
@@ -9846,7 +9846,7 @@
                 <a:solidFill>
                   <a:srgbClr val="5F6B65"/>
                 </a:solidFill>
-                <a:latin typeface="Calibri"/>
+                <a:latin typeface="Open Sauce Sans"/>
               </a:rPr>
               <a:t>2031</a:t>
             </a:r>
@@ -9881,7 +9881,7 @@
                 <a:solidFill>
                   <a:srgbClr val="5F6B65"/>
                 </a:solidFill>
-                <a:latin typeface="Calibri"/>
+                <a:latin typeface="Open Sauce Sans"/>
               </a:rPr>
               <a:t>2032</a:t>
             </a:r>
@@ -9916,7 +9916,7 @@
                 <a:solidFill>
                   <a:srgbClr val="5F6B65"/>
                 </a:solidFill>
-                <a:latin typeface="Calibri"/>
+                <a:latin typeface="Open Sauce Sans"/>
               </a:rPr>
               <a:t>2033</a:t>
             </a:r>
@@ -9951,7 +9951,7 @@
                 <a:solidFill>
                   <a:srgbClr val="5F6B65"/>
                 </a:solidFill>
-                <a:latin typeface="Calibri"/>
+                <a:latin typeface="Open Sauce Sans"/>
               </a:rPr>
               <a:t>2034</a:t>
             </a:r>
@@ -9986,7 +9986,7 @@
                 <a:solidFill>
                   <a:srgbClr val="5F6B65"/>
                 </a:solidFill>
-                <a:latin typeface="Calibri"/>
+                <a:latin typeface="Open Sauce Sans"/>
               </a:rPr>
               <a:t>M8 investasi/presale paralel dengan awal PDD; penjualan unit (M13) setelah issuance</a:t>
             </a:r>
@@ -10086,7 +10086,7 @@
                 <a:solidFill>
                   <a:srgbClr val="1B2420"/>
                 </a:solidFill>
-                <a:latin typeface="Calibri"/>
+                <a:latin typeface="Open Sauce Sans"/>
               </a:rPr>
               <a:t>Milestone internal (dikendalikan tim)</a:t>
             </a:r>
@@ -10153,7 +10153,7 @@
                 <a:solidFill>
                   <a:srgbClr val="1B2420"/>
                 </a:solidFill>
-                <a:latin typeface="Calibri"/>
+                <a:latin typeface="Open Sauce Sans"/>
               </a:rPr>
               <a:t>Persetujuan eksternal (Plan Vivo / VVB)</a:t>
             </a:r>
@@ -10224,7 +10224,7 @@
                 <a:solidFill>
                   <a:srgbClr val="1B2420"/>
                 </a:solidFill>
-                <a:latin typeface="Calibri"/>
+                <a:latin typeface="Open Sauce Sans"/>
               </a:rPr>
               <a:t>Batas cakupan SETAPAK 4</a:t>
             </a:r>
@@ -10290,7 +10290,7 @@
                 <a:solidFill>
                   <a:srgbClr val="1B2420"/>
                 </a:solidFill>
-                <a:latin typeface="Calibri"/>
+                <a:latin typeface="Open Sauce Sans"/>
               </a:rPr>
               <a:t>Aktivitas paralel</a:t>
             </a:r>
@@ -10329,7 +10329,7 @@
                 <a:solidFill>
                   <a:srgbClr val="C26A0A"/>
                 </a:solidFill>
-                <a:latin typeface="Calibri"/>
+                <a:latin typeface="Open Sauce Sans"/>
               </a:rPr>
               <a:t>Arti gerbang: </a:t>
             </a:r>
@@ -10338,7 +10338,7 @@
                 <a:solidFill>
                   <a:srgbClr val="1B2420"/>
                 </a:solidFill>
-                <a:latin typeface="Calibri"/>
+                <a:latin typeface="Open Sauce Sans"/>
               </a:rPr>
               <a:t>PIN disetujui Plan Vivo → proyek tercantum di Project pipeline. Pengajuan PIN (M6) belum berarti diterima; review ±6 minggu + putaran CAR/NIR (±4 minggu tiap putaran).</a:t>
             </a:r>
@@ -10354,7 +10354,7 @@
                 <a:solidFill>
                   <a:srgbClr val="1B2420"/>
                 </a:solidFill>
-                <a:latin typeface="Calibri"/>
+                <a:latin typeface="Open Sauce Sans"/>
               </a:rPr>
               <a:t>Pipeline ≠ registrasi ≠ issuance. </a:t>
             </a:r>
@@ -10363,7 +10363,7 @@
                 <a:solidFill>
                   <a:srgbClr val="1B2420"/>
                 </a:solidFill>
-                <a:latin typeface="Calibri"/>
+                <a:latin typeface="Open Sauce Sans"/>
               </a:rPr>
               <a:t>Registrasi baru setelah validasi (M10). PDD wajib diajukan ≤3 tahun setelah PIN disetujui.</a:t>
             </a:r>
@@ -10402,7 +10402,7 @@
                 <a:solidFill>
                   <a:srgbClr val="1F2A44"/>
                 </a:solidFill>
-                <a:latin typeface="Calibri"/>
+                <a:latin typeface="Open Sauce Sans"/>
               </a:rPr>
               <a:t>Unit Plan Vivo (PVC) di STEP 2: </a:t>
             </a:r>
@@ -10418,7 +10418,7 @@
                 <a:solidFill>
                   <a:srgbClr val="1B2420"/>
                 </a:solidFill>
-                <a:latin typeface="Calibri"/>
+                <a:latin typeface="Open Sauce Sans"/>
               </a:rPr>
               <a:t>fPVC </a:t>
             </a:r>
@@ -10427,7 +10427,7 @@
                 <a:solidFill>
                   <a:srgbClr val="1B2420"/>
                 </a:solidFill>
-                <a:latin typeface="Calibri"/>
+                <a:latin typeface="Open Sauce Sans"/>
               </a:rPr>
               <a:t>saat validasi — hanya intervensi serapan (restorasi)</a:t>
             </a:r>
@@ -10443,7 +10443,7 @@
                 <a:solidFill>
                   <a:srgbClr val="1B2420"/>
                 </a:solidFill>
-                <a:latin typeface="Calibri"/>
+                <a:latin typeface="Open Sauce Sans"/>
               </a:rPr>
               <a:t>rPVC </a:t>
             </a:r>
@@ -10452,7 +10452,7 @@
                 <a:solidFill>
                   <a:srgbClr val="1B2420"/>
                 </a:solidFill>
-                <a:latin typeface="Calibri"/>
+                <a:latin typeface="Open Sauce Sans"/>
               </a:rPr>
               <a:t>dari monitoring di Annual Report, belum diverifikasi</a:t>
             </a:r>
@@ -10468,7 +10468,7 @@
                 <a:solidFill>
                   <a:srgbClr val="1B2420"/>
                 </a:solidFill>
-                <a:latin typeface="Calibri"/>
+                <a:latin typeface="Open Sauce Sans"/>
               </a:rPr>
               <a:t>vPVC </a:t>
             </a:r>
@@ -10477,7 +10477,7 @@
                 <a:solidFill>
                   <a:srgbClr val="1B2420"/>
                 </a:solidFill>
-                <a:latin typeface="Calibri"/>
+                <a:latin typeface="Open Sauce Sans"/>
               </a:rPr>
               <a:t>setelah verifikasi (≤5 th pasca-validasi) — satu-satunya unit yang dapat di-retire</a:t>
             </a:r>
@@ -10512,7 +10512,7 @@
                 <a:solidFill>
                   <a:srgbClr val="5F6B65"/>
                 </a:solidFill>
-                <a:latin typeface="Calibri"/>
+                <a:latin typeface="Open Sauce Sans"/>
               </a:rPr>
               <a:t>Sumber: Plan Vivo PV Climate Procedures Manual V3.9 (Bab 1–9, 14); Project Requirements V5.7; Participatory Toolkit V1.0. Tanggal STEP 2 dan seluruh persetujuan eksternal bersifat indikatif.</a:t>
             </a:r>
@@ -10565,7 +10565,7 @@
                 <a:solidFill>
                   <a:srgbClr val="0E7C6B"/>
                 </a:solidFill>
-                <a:latin typeface="Calibri"/>
+                <a:latin typeface="Open Sauce Sans"/>
               </a:rPr>
               <a:t>OUTPUT 4 · TIMELINE &amp; CRITICAL PATH</a:t>
             </a:r>
@@ -10600,7 +10600,7 @@
                 <a:solidFill>
                   <a:srgbClr val="1B2420"/>
                 </a:solidFill>
-                <a:latin typeface="Cambria"/>
+                <a:latin typeface="Open Sauce Sans"/>
               </a:rPr>
               <a:t>PIN harus dikirim Mei 2027 agar keputusan Plan Vivo dapat</a:t>
             </a:r>
@@ -10612,7 +10612,7 @@
                 <a:solidFill>
                   <a:srgbClr val="1B2420"/>
                 </a:solidFill>
-                <a:latin typeface="Cambria"/>
+                <a:latin typeface="Open Sauce Sans"/>
               </a:rPr>
               <a:t>keluar sebelum TAF berakhir September 2027</a:t>
             </a:r>
@@ -10647,7 +10647,7 @@
                 <a:solidFill>
                   <a:srgbClr val="5F6B65"/>
                 </a:solidFill>
-                <a:latin typeface="Calibri"/>
+                <a:latin typeface="Open Sauce Sans"/>
               </a:rPr>
               <a:t>3</a:t>
             </a:r>
@@ -10712,7 +10712,7 @@
                 <a:solidFill>
                   <a:srgbClr val="5F6B65"/>
                 </a:solidFill>
-                <a:latin typeface="Calibri"/>
+                <a:latin typeface="Open Sauce Sans"/>
               </a:rPr>
               <a:t>Okt</a:t>
             </a:r>
@@ -10724,7 +10724,7 @@
                 <a:solidFill>
                   <a:srgbClr val="5F6B65"/>
                 </a:solidFill>
-                <a:latin typeface="Calibri"/>
+                <a:latin typeface="Open Sauce Sans"/>
               </a:rPr>
               <a:t>26</a:t>
             </a:r>
@@ -10789,7 +10789,7 @@
                 <a:solidFill>
                   <a:srgbClr val="5F6B65"/>
                 </a:solidFill>
-                <a:latin typeface="Calibri"/>
+                <a:latin typeface="Open Sauce Sans"/>
               </a:rPr>
               <a:t>Nov</a:t>
             </a:r>
@@ -10801,7 +10801,7 @@
                 <a:solidFill>
                   <a:srgbClr val="5F6B65"/>
                 </a:solidFill>
-                <a:latin typeface="Calibri"/>
+                <a:latin typeface="Open Sauce Sans"/>
               </a:rPr>
               <a:t>26</a:t>
             </a:r>
@@ -10866,7 +10866,7 @@
                 <a:solidFill>
                   <a:srgbClr val="5F6B65"/>
                 </a:solidFill>
-                <a:latin typeface="Calibri"/>
+                <a:latin typeface="Open Sauce Sans"/>
               </a:rPr>
               <a:t>Des</a:t>
             </a:r>
@@ -10878,7 +10878,7 @@
                 <a:solidFill>
                   <a:srgbClr val="5F6B65"/>
                 </a:solidFill>
-                <a:latin typeface="Calibri"/>
+                <a:latin typeface="Open Sauce Sans"/>
               </a:rPr>
               <a:t>26</a:t>
             </a:r>
@@ -10943,7 +10943,7 @@
                 <a:solidFill>
                   <a:srgbClr val="5F6B65"/>
                 </a:solidFill>
-                <a:latin typeface="Calibri"/>
+                <a:latin typeface="Open Sauce Sans"/>
               </a:rPr>
               <a:t>Jan</a:t>
             </a:r>
@@ -10955,7 +10955,7 @@
                 <a:solidFill>
                   <a:srgbClr val="5F6B65"/>
                 </a:solidFill>
-                <a:latin typeface="Calibri"/>
+                <a:latin typeface="Open Sauce Sans"/>
               </a:rPr>
               <a:t>27</a:t>
             </a:r>
@@ -11020,7 +11020,7 @@
                 <a:solidFill>
                   <a:srgbClr val="5F6B65"/>
                 </a:solidFill>
-                <a:latin typeface="Calibri"/>
+                <a:latin typeface="Open Sauce Sans"/>
               </a:rPr>
               <a:t>Feb</a:t>
             </a:r>
@@ -11032,7 +11032,7 @@
                 <a:solidFill>
                   <a:srgbClr val="5F6B65"/>
                 </a:solidFill>
-                <a:latin typeface="Calibri"/>
+                <a:latin typeface="Open Sauce Sans"/>
               </a:rPr>
               <a:t>27</a:t>
             </a:r>
@@ -11097,7 +11097,7 @@
                 <a:solidFill>
                   <a:srgbClr val="5F6B65"/>
                 </a:solidFill>
-                <a:latin typeface="Calibri"/>
+                <a:latin typeface="Open Sauce Sans"/>
               </a:rPr>
               <a:t>Mar</a:t>
             </a:r>
@@ -11109,7 +11109,7 @@
                 <a:solidFill>
                   <a:srgbClr val="5F6B65"/>
                 </a:solidFill>
-                <a:latin typeface="Calibri"/>
+                <a:latin typeface="Open Sauce Sans"/>
               </a:rPr>
               <a:t>27</a:t>
             </a:r>
@@ -11174,7 +11174,7 @@
                 <a:solidFill>
                   <a:srgbClr val="5F6B65"/>
                 </a:solidFill>
-                <a:latin typeface="Calibri"/>
+                <a:latin typeface="Open Sauce Sans"/>
               </a:rPr>
               <a:t>Apr</a:t>
             </a:r>
@@ -11186,7 +11186,7 @@
                 <a:solidFill>
                   <a:srgbClr val="5F6B65"/>
                 </a:solidFill>
-                <a:latin typeface="Calibri"/>
+                <a:latin typeface="Open Sauce Sans"/>
               </a:rPr>
               <a:t>27</a:t>
             </a:r>
@@ -11251,7 +11251,7 @@
                 <a:solidFill>
                   <a:srgbClr val="5F6B65"/>
                 </a:solidFill>
-                <a:latin typeface="Calibri"/>
+                <a:latin typeface="Open Sauce Sans"/>
               </a:rPr>
               <a:t>Mei</a:t>
             </a:r>
@@ -11263,7 +11263,7 @@
                 <a:solidFill>
                   <a:srgbClr val="5F6B65"/>
                 </a:solidFill>
-                <a:latin typeface="Calibri"/>
+                <a:latin typeface="Open Sauce Sans"/>
               </a:rPr>
               <a:t>27</a:t>
             </a:r>
@@ -11328,7 +11328,7 @@
                 <a:solidFill>
                   <a:srgbClr val="5F6B65"/>
                 </a:solidFill>
-                <a:latin typeface="Calibri"/>
+                <a:latin typeface="Open Sauce Sans"/>
               </a:rPr>
               <a:t>Jun</a:t>
             </a:r>
@@ -11340,7 +11340,7 @@
                 <a:solidFill>
                   <a:srgbClr val="5F6B65"/>
                 </a:solidFill>
-                <a:latin typeface="Calibri"/>
+                <a:latin typeface="Open Sauce Sans"/>
               </a:rPr>
               <a:t>27</a:t>
             </a:r>
@@ -11405,7 +11405,7 @@
                 <a:solidFill>
                   <a:srgbClr val="5F6B65"/>
                 </a:solidFill>
-                <a:latin typeface="Calibri"/>
+                <a:latin typeface="Open Sauce Sans"/>
               </a:rPr>
               <a:t>Jul</a:t>
             </a:r>
@@ -11417,7 +11417,7 @@
                 <a:solidFill>
                   <a:srgbClr val="5F6B65"/>
                 </a:solidFill>
-                <a:latin typeface="Calibri"/>
+                <a:latin typeface="Open Sauce Sans"/>
               </a:rPr>
               <a:t>27</a:t>
             </a:r>
@@ -11482,7 +11482,7 @@
                 <a:solidFill>
                   <a:srgbClr val="5F6B65"/>
                 </a:solidFill>
-                <a:latin typeface="Calibri"/>
+                <a:latin typeface="Open Sauce Sans"/>
               </a:rPr>
               <a:t>Agu</a:t>
             </a:r>
@@ -11494,7 +11494,7 @@
                 <a:solidFill>
                   <a:srgbClr val="5F6B65"/>
                 </a:solidFill>
-                <a:latin typeface="Calibri"/>
+                <a:latin typeface="Open Sauce Sans"/>
               </a:rPr>
               <a:t>27</a:t>
             </a:r>
@@ -11559,7 +11559,7 @@
                 <a:solidFill>
                   <a:srgbClr val="5F6B65"/>
                 </a:solidFill>
-                <a:latin typeface="Calibri"/>
+                <a:latin typeface="Open Sauce Sans"/>
               </a:rPr>
               <a:t>Sep</a:t>
             </a:r>
@@ -11571,7 +11571,7 @@
                 <a:solidFill>
                   <a:srgbClr val="5F6B65"/>
                 </a:solidFill>
-                <a:latin typeface="Calibri"/>
+                <a:latin typeface="Open Sauce Sans"/>
               </a:rPr>
               <a:t>27</a:t>
             </a:r>
@@ -11636,7 +11636,7 @@
                 <a:solidFill>
                   <a:srgbClr val="5F6B65"/>
                 </a:solidFill>
-                <a:latin typeface="Calibri"/>
+                <a:latin typeface="Open Sauce Sans"/>
               </a:rPr>
               <a:t>Okt</a:t>
             </a:r>
@@ -11648,7 +11648,7 @@
                 <a:solidFill>
                   <a:srgbClr val="5F6B65"/>
                 </a:solidFill>
-                <a:latin typeface="Calibri"/>
+                <a:latin typeface="Open Sauce Sans"/>
               </a:rPr>
               <a:t>27</a:t>
             </a:r>
@@ -11713,7 +11713,7 @@
                 <a:solidFill>
                   <a:srgbClr val="5F6B65"/>
                 </a:solidFill>
-                <a:latin typeface="Calibri"/>
+                <a:latin typeface="Open Sauce Sans"/>
               </a:rPr>
               <a:t>Nov</a:t>
             </a:r>
@@ -11725,7 +11725,7 @@
                 <a:solidFill>
                   <a:srgbClr val="5F6B65"/>
                 </a:solidFill>
-                <a:latin typeface="Calibri"/>
+                <a:latin typeface="Open Sauce Sans"/>
               </a:rPr>
               <a:t>27</a:t>
             </a:r>
@@ -11790,7 +11790,7 @@
                 <a:solidFill>
                   <a:srgbClr val="5F6B65"/>
                 </a:solidFill>
-                <a:latin typeface="Calibri"/>
+                <a:latin typeface="Open Sauce Sans"/>
               </a:rPr>
               <a:t>Des</a:t>
             </a:r>
@@ -11802,7 +11802,7 @@
                 <a:solidFill>
                   <a:srgbClr val="5F6B65"/>
                 </a:solidFill>
-                <a:latin typeface="Calibri"/>
+                <a:latin typeface="Open Sauce Sans"/>
               </a:rPr>
               <a:t>27</a:t>
             </a:r>
@@ -11872,7 +11872,7 @@
                 <a:solidFill>
                   <a:srgbClr val="5F6B65"/>
                 </a:solidFill>
-                <a:latin typeface="Calibri"/>
+                <a:latin typeface="Open Sauce Sans"/>
               </a:rPr>
               <a:t>M1.1</a:t>
             </a:r>
@@ -11907,7 +11907,7 @@
                 <a:solidFill>
                   <a:srgbClr val="1B2420"/>
                 </a:solidFill>
-                <a:latin typeface="Calibri"/>
+                <a:latin typeface="Open Sauce Sans"/>
               </a:rPr>
               <a:t>Kick-off &amp; koordinasi LPHD–Pemdes–BPD</a:t>
             </a:r>
@@ -11972,7 +11972,7 @@
                 <a:solidFill>
                   <a:srgbClr val="5F6B65"/>
                 </a:solidFill>
-                <a:latin typeface="Calibri"/>
+                <a:latin typeface="Open Sauce Sans"/>
               </a:rPr>
               <a:t>M1.2</a:t>
             </a:r>
@@ -12007,7 +12007,7 @@
                 <a:solidFill>
                   <a:srgbClr val="1B2420"/>
                 </a:solidFill>
-                <a:latin typeface="Calibri"/>
+                <a:latin typeface="Open Sauce Sans"/>
               </a:rPr>
               <a:t>Persetujuan pendampingan</a:t>
             </a:r>
@@ -12072,7 +12072,7 @@
                 <a:solidFill>
                   <a:srgbClr val="0E7C6B"/>
                 </a:solidFill>
-                <a:latin typeface="Calibri"/>
+                <a:latin typeface="Open Sauce Sans"/>
               </a:rPr>
               <a:t>M1.3</a:t>
             </a:r>
@@ -12107,7 +12107,7 @@
                 <a:solidFill>
                   <a:srgbClr val="1B2420"/>
                 </a:solidFill>
-                <a:latin typeface="Calibri"/>
+                <a:latin typeface="Open Sauce Sans"/>
               </a:rPr>
               <a:t>Kerja sama &amp; kesiapan kelembagaan</a:t>
             </a:r>
@@ -12172,7 +12172,7 @@
                 <a:solidFill>
                   <a:srgbClr val="0E7C6B"/>
                 </a:solidFill>
-                <a:latin typeface="Calibri"/>
+                <a:latin typeface="Open Sauce Sans"/>
               </a:rPr>
               <a:t>M1.4</a:t>
             </a:r>
@@ -12207,7 +12207,7 @@
                 <a:solidFill>
                   <a:srgbClr val="1B2420"/>
                 </a:solidFill>
-                <a:latin typeface="Calibri"/>
+                <a:latin typeface="Open Sauce Sans"/>
               </a:rPr>
               <a:t>Pemeriksaan legalitas awal</a:t>
             </a:r>
@@ -12272,7 +12272,7 @@
                 <a:solidFill>
                   <a:srgbClr val="5F6B65"/>
                 </a:solidFill>
-                <a:latin typeface="Calibri"/>
+                <a:latin typeface="Open Sauce Sans"/>
               </a:rPr>
               <a:t>M1.5</a:t>
             </a:r>
@@ -12307,7 +12307,7 @@
                 <a:solidFill>
                   <a:srgbClr val="1B2420"/>
                 </a:solidFill>
-                <a:latin typeface="Calibri"/>
+                <a:latin typeface="Open Sauce Sans"/>
               </a:rPr>
               <a:t>Inventarisasi progres yang sudah dilakukan</a:t>
             </a:r>
@@ -12407,7 +12407,7 @@
                 <a:solidFill>
                   <a:srgbClr val="0E7C6B"/>
                 </a:solidFill>
-                <a:latin typeface="Calibri"/>
+                <a:latin typeface="Open Sauce Sans"/>
               </a:rPr>
               <a:t>M2.1</a:t>
             </a:r>
@@ -12442,7 +12442,7 @@
                 <a:solidFill>
                   <a:srgbClr val="1B2420"/>
                 </a:solidFill>
-                <a:latin typeface="Calibri"/>
+                <a:latin typeface="Open Sauce Sans"/>
               </a:rPr>
               <a:t>Stakeholder mapping</a:t>
             </a:r>
@@ -12507,7 +12507,7 @@
                 <a:solidFill>
                   <a:srgbClr val="5F6B65"/>
                 </a:solidFill>
-                <a:latin typeface="Calibri"/>
+                <a:latin typeface="Open Sauce Sans"/>
               </a:rPr>
               <a:t>M2.2</a:t>
             </a:r>
@@ -12542,7 +12542,7 @@
                 <a:solidFill>
                   <a:srgbClr val="1B2420"/>
                 </a:solidFill>
-                <a:latin typeface="Calibri"/>
+                <a:latin typeface="Open Sauce Sans"/>
               </a:rPr>
               <a:t>Identifikasi isu sosial &amp; lingkungan</a:t>
             </a:r>
@@ -12607,7 +12607,7 @@
                 <a:solidFill>
                   <a:srgbClr val="5F6B65"/>
                 </a:solidFill>
-                <a:latin typeface="Calibri"/>
+                <a:latin typeface="Open Sauce Sans"/>
               </a:rPr>
               <a:t>M2.3</a:t>
             </a:r>
@@ -12642,7 +12642,7 @@
                 <a:solidFill>
                   <a:srgbClr val="1B2420"/>
                 </a:solidFill>
-                <a:latin typeface="Calibri"/>
+                <a:latin typeface="Open Sauce Sans"/>
               </a:rPr>
               <a:t>Konsultasi awal komunitas</a:t>
             </a:r>
@@ -12707,7 +12707,7 @@
                 <a:solidFill>
                   <a:srgbClr val="5F6B65"/>
                 </a:solidFill>
-                <a:latin typeface="Calibri"/>
+                <a:latin typeface="Open Sauce Sans"/>
               </a:rPr>
               <a:t>M2.4</a:t>
             </a:r>
@@ -12742,7 +12742,7 @@
                 <a:solidFill>
                   <a:srgbClr val="1B2420"/>
                 </a:solidFill>
-                <a:latin typeface="Calibri"/>
+                <a:latin typeface="Open Sauce Sans"/>
               </a:rPr>
               <a:t>Identifikasi kelompok perempuan &amp; rentan</a:t>
             </a:r>
@@ -12807,7 +12807,7 @@
                 <a:solidFill>
                   <a:srgbClr val="0E7C6B"/>
                 </a:solidFill>
-                <a:latin typeface="Calibri"/>
+                <a:latin typeface="Open Sauce Sans"/>
               </a:rPr>
               <a:t>M2.5</a:t>
             </a:r>
@@ -12842,7 +12842,7 @@
                 <a:solidFill>
                   <a:srgbClr val="1B2420"/>
                 </a:solidFill>
-                <a:latin typeface="Calibri"/>
+                <a:latin typeface="Open Sauce Sans"/>
               </a:rPr>
               <a:t>Stakeholder Engagement Plan (SEP)</a:t>
             </a:r>
@@ -12942,7 +12942,7 @@
                 <a:solidFill>
                   <a:srgbClr val="0E7C6B"/>
                 </a:solidFill>
-                <a:latin typeface="Calibri"/>
+                <a:latin typeface="Open Sauce Sans"/>
               </a:rPr>
               <a:t>M3.1</a:t>
             </a:r>
@@ -12977,7 +12977,7 @@
                 <a:solidFill>
                   <a:srgbClr val="1B2420"/>
                 </a:solidFill>
-                <a:latin typeface="Calibri"/>
+                <a:latin typeface="Open Sauce Sans"/>
               </a:rPr>
               <a:t>Pra-FPIC</a:t>
             </a:r>
@@ -13042,7 +13042,7 @@
                 <a:solidFill>
                   <a:srgbClr val="5F6B65"/>
                 </a:solidFill>
-                <a:latin typeface="Calibri"/>
+                <a:latin typeface="Open Sauce Sans"/>
               </a:rPr>
               <a:t>M3.2</a:t>
             </a:r>
@@ -13077,7 +13077,7 @@
                 <a:solidFill>
                   <a:srgbClr val="1B2420"/>
                 </a:solidFill>
-                <a:latin typeface="Calibri"/>
+                <a:latin typeface="Open Sauce Sans"/>
               </a:rPr>
               <a:t>Pelaksanaan participatory tools</a:t>
             </a:r>
@@ -13142,7 +13142,7 @@
                 <a:solidFill>
                   <a:srgbClr val="0E7C6B"/>
                 </a:solidFill>
-                <a:latin typeface="Calibri"/>
+                <a:latin typeface="Open Sauce Sans"/>
               </a:rPr>
               <a:t>M3.3</a:t>
             </a:r>
@@ -13177,7 +13177,7 @@
                 <a:solidFill>
                   <a:srgbClr val="1B2420"/>
                 </a:solidFill>
-                <a:latin typeface="Calibri"/>
+                <a:latin typeface="Open Sauce Sans"/>
               </a:rPr>
               <a:t>Pemetaan partisipatif</a:t>
             </a:r>
@@ -13242,7 +13242,7 @@
                 <a:solidFill>
                   <a:srgbClr val="5F6B65"/>
                 </a:solidFill>
-                <a:latin typeface="Calibri"/>
+                <a:latin typeface="Open Sauce Sans"/>
               </a:rPr>
               <a:t>M3.4</a:t>
             </a:r>
@@ -13277,7 +13277,7 @@
                 <a:solidFill>
                   <a:srgbClr val="1B2420"/>
                 </a:solidFill>
-                <a:latin typeface="Calibri"/>
+                <a:latin typeface="Open Sauce Sans"/>
               </a:rPr>
               <a:t>E&amp;S risk screening partisipatif</a:t>
             </a:r>
@@ -13342,7 +13342,7 @@
                 <a:solidFill>
                   <a:srgbClr val="0E7C6B"/>
                 </a:solidFill>
-                <a:latin typeface="Calibri"/>
+                <a:latin typeface="Open Sauce Sans"/>
               </a:rPr>
               <a:t>M3.5</a:t>
             </a:r>
@@ -13377,7 +13377,7 @@
                 <a:solidFill>
                   <a:srgbClr val="1B2420"/>
                 </a:solidFill>
-                <a:latin typeface="Calibri"/>
+                <a:latin typeface="Open Sauce Sans"/>
               </a:rPr>
               <a:t>Konsultasi &amp; keputusan FPIC tahap i–ii</a:t>
             </a:r>
@@ -13442,7 +13442,7 @@
                 <a:solidFill>
                   <a:srgbClr val="5F6B65"/>
                 </a:solidFill>
-                <a:latin typeface="Calibri"/>
+                <a:latin typeface="Open Sauce Sans"/>
               </a:rPr>
               <a:t>M3.6</a:t>
             </a:r>
@@ -13477,7 +13477,7 @@
                 <a:solidFill>
                   <a:srgbClr val="1B2420"/>
                 </a:solidFill>
-                <a:latin typeface="Calibri"/>
+                <a:latin typeface="Open Sauce Sans"/>
               </a:rPr>
               <a:t>Dokumentasi keputusan &amp; persetujuan</a:t>
             </a:r>
@@ -13542,7 +13542,7 @@
                 <a:solidFill>
                   <a:srgbClr val="5F6B65"/>
                 </a:solidFill>
-                <a:latin typeface="Calibri"/>
+                <a:latin typeface="Open Sauce Sans"/>
               </a:rPr>
               <a:t>M3.7</a:t>
             </a:r>
@@ -13577,7 +13577,7 @@
                 <a:solidFill>
                   <a:srgbClr val="1B2420"/>
                 </a:solidFill>
-                <a:latin typeface="Calibri"/>
+                <a:latin typeface="Open Sauce Sans"/>
               </a:rPr>
               <a:t>Mekanisme pengaduan (GRM)</a:t>
             </a:r>
@@ -13677,7 +13677,7 @@
                 <a:solidFill>
                   <a:srgbClr val="5F6B65"/>
                 </a:solidFill>
-                <a:latin typeface="Calibri"/>
+                <a:latin typeface="Open Sauce Sans"/>
               </a:rPr>
               <a:t>M4.1</a:t>
             </a:r>
@@ -13712,7 +13712,7 @@
                 <a:solidFill>
                   <a:srgbClr val="1B2420"/>
                 </a:solidFill>
-                <a:latin typeface="Calibri"/>
+                <a:latin typeface="Open Sauce Sans"/>
               </a:rPr>
               <a:t>Identifikasi &amp; penguatan KUPS</a:t>
             </a:r>
@@ -13777,7 +13777,7 @@
                 <a:solidFill>
                   <a:srgbClr val="5F6B65"/>
                 </a:solidFill>
-                <a:latin typeface="Calibri"/>
+                <a:latin typeface="Open Sauce Sans"/>
               </a:rPr>
               <a:t>M4.2</a:t>
             </a:r>
@@ -13812,7 +13812,7 @@
                 <a:solidFill>
                   <a:srgbClr val="1B2420"/>
                 </a:solidFill>
-                <a:latin typeface="Calibri"/>
+                <a:latin typeface="Open Sauce Sans"/>
               </a:rPr>
               <a:t>Pembentukan/penguatan Women Forest Defender</a:t>
             </a:r>
@@ -13877,7 +13877,7 @@
                 <a:solidFill>
                   <a:srgbClr val="5F6B65"/>
                 </a:solidFill>
-                <a:latin typeface="Calibri"/>
+                <a:latin typeface="Open Sauce Sans"/>
               </a:rPr>
               <a:t>M4.3</a:t>
             </a:r>
@@ -13912,7 +13912,7 @@
                 <a:solidFill>
                   <a:srgbClr val="1B2420"/>
                 </a:solidFill>
-                <a:latin typeface="Calibri"/>
+                <a:latin typeface="Open Sauce Sans"/>
               </a:rPr>
               <a:t>Identifikasi potensi livelihood</a:t>
             </a:r>
@@ -13977,7 +13977,7 @@
                 <a:solidFill>
                   <a:srgbClr val="0E7C6B"/>
                 </a:solidFill>
-                <a:latin typeface="Calibri"/>
+                <a:latin typeface="Open Sauce Sans"/>
               </a:rPr>
               <a:t>M4.4</a:t>
             </a:r>
@@ -14012,7 +14012,7 @@
                 <a:solidFill>
                   <a:srgbClr val="1B2420"/>
                 </a:solidFill>
-                <a:latin typeface="Calibri"/>
+                <a:latin typeface="Open Sauce Sans"/>
               </a:rPr>
               <a:t>Konsep kegiatan komunitas (intervensi &amp; ToC)</a:t>
             </a:r>
@@ -14077,7 +14077,7 @@
                 <a:solidFill>
                   <a:srgbClr val="5F6B65"/>
                 </a:solidFill>
-                <a:latin typeface="Calibri"/>
+                <a:latin typeface="Open Sauce Sans"/>
               </a:rPr>
               <a:t>M4.5</a:t>
             </a:r>
@@ -14112,7 +14112,7 @@
                 <a:solidFill>
                   <a:srgbClr val="1B2420"/>
                 </a:solidFill>
-                <a:latin typeface="Calibri"/>
+                <a:latin typeface="Open Sauce Sans"/>
               </a:rPr>
               <a:t>Prinsip benefit-sharing</a:t>
             </a:r>
@@ -14177,7 +14177,7 @@
                 <a:solidFill>
                   <a:srgbClr val="5F6B65"/>
                 </a:solidFill>
-                <a:latin typeface="Calibri"/>
+                <a:latin typeface="Open Sauce Sans"/>
               </a:rPr>
               <a:t>M4.6</a:t>
             </a:r>
@@ -14212,7 +14212,7 @@
                 <a:solidFill>
                   <a:srgbClr val="1B2420"/>
                 </a:solidFill>
-                <a:latin typeface="Calibri"/>
+                <a:latin typeface="Open Sauce Sans"/>
               </a:rPr>
               <a:t>Penguatan tata kelola LPHD</a:t>
             </a:r>
@@ -14312,7 +14312,7 @@
                 <a:solidFill>
                   <a:srgbClr val="0E7C6B"/>
                 </a:solidFill>
-                <a:latin typeface="Calibri"/>
+                <a:latin typeface="Open Sauce Sans"/>
               </a:rPr>
               <a:t>M5.1</a:t>
             </a:r>
@@ -14347,7 +14347,7 @@
                 <a:solidFill>
                   <a:srgbClr val="1B2420"/>
                 </a:solidFill>
-                <a:latin typeface="Calibri"/>
+                <a:latin typeface="Open Sauce Sans"/>
               </a:rPr>
               <a:t>Pemeriksaan batas &amp; status kawasan</a:t>
             </a:r>
@@ -14412,7 +14412,7 @@
                 <a:solidFill>
                   <a:srgbClr val="0E7C6B"/>
                 </a:solidFill>
-                <a:latin typeface="Calibri"/>
+                <a:latin typeface="Open Sauce Sans"/>
               </a:rPr>
               <a:t>M5.2</a:t>
             </a:r>
@@ -14447,7 +14447,7 @@
                 <a:solidFill>
                   <a:srgbClr val="1B2420"/>
                 </a:solidFill>
-                <a:latin typeface="Calibri"/>
+                <a:latin typeface="Open Sauce Sans"/>
               </a:rPr>
               <a:t>Analisis tutupan lahan &amp; ekosistem</a:t>
             </a:r>
@@ -14512,7 +14512,7 @@
                 <a:solidFill>
                   <a:srgbClr val="0E7C6B"/>
                 </a:solidFill>
-                <a:latin typeface="Calibri"/>
+                <a:latin typeface="Open Sauce Sans"/>
               </a:rPr>
               <a:t>M5.3</a:t>
             </a:r>
@@ -14547,7 +14547,7 @@
                 <a:solidFill>
                   <a:srgbClr val="1B2420"/>
                 </a:solidFill>
-                <a:latin typeface="Calibri"/>
+                <a:latin typeface="Open Sauce Sans"/>
               </a:rPr>
               <a:t>Identifikasi ancaman &amp; sumber emisi</a:t>
             </a:r>
@@ -14612,7 +14612,7 @@
                 <a:solidFill>
                   <a:srgbClr val="0E7C6B"/>
                 </a:solidFill>
-                <a:latin typeface="Calibri"/>
+                <a:latin typeface="Open Sauce Sans"/>
               </a:rPr>
               <a:t>M5.4</a:t>
             </a:r>
@@ -14647,7 +14647,7 @@
                 <a:solidFill>
                   <a:srgbClr val="1B2420"/>
                 </a:solidFill>
-                <a:latin typeface="Calibri"/>
+                <a:latin typeface="Open Sauce Sans"/>
               </a:rPr>
               <a:t>Kesesuaian metodologi PV Climate</a:t>
             </a:r>
@@ -14712,7 +14712,7 @@
                 <a:solidFill>
                   <a:srgbClr val="0E7C6B"/>
                 </a:solidFill>
-                <a:latin typeface="Calibri"/>
+                <a:latin typeface="Open Sauce Sans"/>
               </a:rPr>
               <a:t>M5.5</a:t>
             </a:r>
@@ -14747,7 +14747,7 @@
                 <a:solidFill>
                   <a:srgbClr val="1B2420"/>
                 </a:solidFill>
-                <a:latin typeface="Calibri"/>
+                <a:latin typeface="Open Sauce Sans"/>
               </a:rPr>
               <a:t>Estimasi indikatif potensi kredit</a:t>
             </a:r>
@@ -14812,7 +14812,7 @@
                 <a:solidFill>
                   <a:srgbClr val="0E7C6B"/>
                 </a:solidFill>
-                <a:latin typeface="Calibri"/>
+                <a:latin typeface="Open Sauce Sans"/>
               </a:rPr>
               <a:t>M5.6</a:t>
             </a:r>
@@ -14847,7 +14847,7 @@
                 <a:solidFill>
                   <a:srgbClr val="1B2420"/>
                 </a:solidFill>
-                <a:latin typeface="Calibri"/>
+                <a:latin typeface="Open Sauce Sans"/>
               </a:rPr>
               <a:t>Risiko &amp; kelayakan awal</a:t>
             </a:r>
@@ -14912,7 +14912,7 @@
                 <a:solidFill>
                   <a:srgbClr val="0E7C6B"/>
                 </a:solidFill>
-                <a:latin typeface="Calibri"/>
+                <a:latin typeface="Open Sauce Sans"/>
               </a:rPr>
               <a:t>M5.7</a:t>
             </a:r>
@@ -14947,7 +14947,7 @@
                 <a:solidFill>
                   <a:srgbClr val="1B2420"/>
                 </a:solidFill>
-                <a:latin typeface="Calibri"/>
+                <a:latin typeface="Open Sauce Sans"/>
               </a:rPr>
               <a:t>Penyusunan baseline scenario &amp; project scenario</a:t>
             </a:r>
@@ -15047,7 +15047,7 @@
                 <a:solidFill>
                   <a:srgbClr val="5F6B65"/>
                 </a:solidFill>
-                <a:latin typeface="Calibri"/>
+                <a:latin typeface="Open Sauce Sans"/>
               </a:rPr>
               <a:t>M6.1</a:t>
             </a:r>
@@ -15082,7 +15082,7 @@
                 <a:solidFill>
                   <a:srgbClr val="1B2420"/>
                 </a:solidFill>
-                <a:latin typeface="Calibri"/>
+                <a:latin typeface="Open Sauce Sans"/>
               </a:rPr>
               <a:t>Konsolidasi data &amp; data room</a:t>
             </a:r>
@@ -15147,7 +15147,7 @@
                 <a:solidFill>
                   <a:srgbClr val="0E7C6B"/>
                 </a:solidFill>
-                <a:latin typeface="Calibri"/>
+                <a:latin typeface="Open Sauce Sans"/>
               </a:rPr>
               <a:t>M6.2</a:t>
             </a:r>
@@ -15182,7 +15182,7 @@
                 <a:solidFill>
                   <a:srgbClr val="1B2420"/>
                 </a:solidFill>
-                <a:latin typeface="Calibri"/>
+                <a:latin typeface="Open Sauce Sans"/>
               </a:rPr>
               <a:t>Penyusunan draft PIN</a:t>
             </a:r>
@@ -15247,7 +15247,7 @@
                 <a:solidFill>
                   <a:srgbClr val="0E7C6B"/>
                 </a:solidFill>
-                <a:latin typeface="Calibri"/>
+                <a:latin typeface="Open Sauce Sans"/>
               </a:rPr>
               <a:t>M6.3</a:t>
             </a:r>
@@ -15282,7 +15282,7 @@
                 <a:solidFill>
                   <a:srgbClr val="1B2420"/>
                 </a:solidFill>
-                <a:latin typeface="Calibri"/>
+                <a:latin typeface="Open Sauce Sans"/>
               </a:rPr>
               <a:t>Konsultasi &amp; review bersama LPHD</a:t>
             </a:r>
@@ -15347,7 +15347,7 @@
                 <a:solidFill>
                   <a:srgbClr val="5F6B65"/>
                 </a:solidFill>
-                <a:latin typeface="Calibri"/>
+                <a:latin typeface="Open Sauce Sans"/>
               </a:rPr>
               <a:t>M6.4</a:t>
             </a:r>
@@ -15382,7 +15382,7 @@
                 <a:solidFill>
                   <a:srgbClr val="1B2420"/>
                 </a:solidFill>
-                <a:latin typeface="Calibri"/>
+                <a:latin typeface="Open Sauce Sans"/>
               </a:rPr>
               <a:t>Pre-submission call dengan Plan Vivo (opsional)</a:t>
             </a:r>
@@ -15447,7 +15447,7 @@
                 <a:solidFill>
                   <a:srgbClr val="0E7C6B"/>
                 </a:solidFill>
-                <a:latin typeface="Calibri"/>
+                <a:latin typeface="Open Sauce Sans"/>
               </a:rPr>
               <a:t>M6.5</a:t>
             </a:r>
@@ -15482,7 +15482,7 @@
                 <a:solidFill>
                   <a:srgbClr val="1B2420"/>
                 </a:solidFill>
-                <a:latin typeface="Calibri"/>
+                <a:latin typeface="Open Sauce Sans"/>
               </a:rPr>
               <a:t>Finalisasi PIN &amp; lampiran</a:t>
             </a:r>
@@ -15547,7 +15547,7 @@
                 <a:solidFill>
                   <a:srgbClr val="0E7C6B"/>
                 </a:solidFill>
-                <a:latin typeface="Calibri"/>
+                <a:latin typeface="Open Sauce Sans"/>
               </a:rPr>
               <a:t>M6.6</a:t>
             </a:r>
@@ -15582,7 +15582,7 @@
                 <a:solidFill>
                   <a:srgbClr val="1B2420"/>
                 </a:solidFill>
-                <a:latin typeface="Calibri"/>
+                <a:latin typeface="Open Sauce Sans"/>
               </a:rPr>
               <a:t>Pengajuan PIN ke Plan Vivo</a:t>
             </a:r>
@@ -15682,7 +15682,7 @@
                 <a:solidFill>
                   <a:srgbClr val="0E7C6B"/>
                 </a:solidFill>
-                <a:latin typeface="Calibri"/>
+                <a:latin typeface="Open Sauce Sans"/>
               </a:rPr>
               <a:t>M7.1</a:t>
             </a:r>
@@ -15717,7 +15717,7 @@
                 <a:solidFill>
                   <a:srgbClr val="1B2420"/>
                 </a:solidFill>
-                <a:latin typeface="Calibri"/>
+                <a:latin typeface="Open Sauce Sans"/>
               </a:rPr>
               <a:t>Komunikasi &amp; tracking review</a:t>
             </a:r>
@@ -15782,7 +15782,7 @@
                 <a:solidFill>
                   <a:srgbClr val="0E7C6B"/>
                 </a:solidFill>
-                <a:latin typeface="Calibri"/>
+                <a:latin typeface="Open Sauce Sans"/>
               </a:rPr>
               <a:t>M7.2</a:t>
             </a:r>
@@ -15817,7 +15817,7 @@
                 <a:solidFill>
                   <a:srgbClr val="1B2420"/>
                 </a:solidFill>
-                <a:latin typeface="Calibri"/>
+                <a:latin typeface="Open Sauce Sans"/>
               </a:rPr>
               <a:t>Tindak lanjut PIN review report</a:t>
             </a:r>
@@ -15882,7 +15882,7 @@
                 <a:solidFill>
                   <a:srgbClr val="0E7C6B"/>
                 </a:solidFill>
-                <a:latin typeface="Calibri"/>
+                <a:latin typeface="Open Sauce Sans"/>
               </a:rPr>
               <a:t>M7.3</a:t>
             </a:r>
@@ -15917,7 +15917,7 @@
                 <a:solidFill>
                   <a:srgbClr val="1B2420"/>
                 </a:solidFill>
-                <a:latin typeface="Calibri"/>
+                <a:latin typeface="Open Sauce Sans"/>
               </a:rPr>
               <a:t>Revisi &amp; klarifikasi</a:t>
             </a:r>
@@ -15982,7 +15982,7 @@
                 <a:solidFill>
                   <a:srgbClr val="5F6B65"/>
                 </a:solidFill>
-                <a:latin typeface="Calibri"/>
+                <a:latin typeface="Open Sauce Sans"/>
               </a:rPr>
               <a:t>M7.4</a:t>
             </a:r>
@@ -16017,7 +16017,7 @@
                 <a:solidFill>
                   <a:srgbClr val="1B2420"/>
                 </a:solidFill>
-                <a:latin typeface="Calibri"/>
+                <a:latin typeface="Open Sauce Sans"/>
               </a:rPr>
               <a:t>Pemenuhan persyaratan relevan</a:t>
             </a:r>
@@ -16082,7 +16082,7 @@
                 <a:solidFill>
                   <a:srgbClr val="0E7C6B"/>
                 </a:solidFill>
-                <a:latin typeface="Calibri"/>
+                <a:latin typeface="Open Sauce Sans"/>
               </a:rPr>
               <a:t>M7.5</a:t>
             </a:r>
@@ -16117,7 +16117,7 @@
                 <a:solidFill>
                   <a:srgbClr val="1B2420"/>
                 </a:solidFill>
-                <a:latin typeface="Calibri"/>
+                <a:latin typeface="Open Sauce Sans"/>
               </a:rPr>
               <a:t>Konfirmasi pencantuman di pipeline</a:t>
             </a:r>
@@ -16182,7 +16182,7 @@
                 <a:solidFill>
                   <a:srgbClr val="5F6B65"/>
                 </a:solidFill>
-                <a:latin typeface="Calibri"/>
+                <a:latin typeface="Open Sauce Sans"/>
               </a:rPr>
               <a:t>M7.6</a:t>
             </a:r>
@@ -16217,7 +16217,7 @@
                 <a:solidFill>
                   <a:srgbClr val="1B2420"/>
                 </a:solidFill>
-                <a:latin typeface="Calibri"/>
+                <a:latin typeface="Open Sauce Sans"/>
               </a:rPr>
               <a:t>Umpan balik ke komunitas &amp; handover</a:t>
             </a:r>
@@ -16318,7 +16318,7 @@
                 <a:solidFill>
                   <a:srgbClr val="0E7C6B"/>
                 </a:solidFill>
-                <a:latin typeface="Calibri"/>
+                <a:latin typeface="Open Sauce Sans"/>
               </a:rPr>
               <a:t>PIN submitted (M6.6)</a:t>
             </a:r>
@@ -16388,7 +16388,7 @@
                 <a:solidFill>
                   <a:srgbClr val="C26A0A"/>
                 </a:solidFill>
-                <a:latin typeface="Calibri"/>
+                <a:latin typeface="Open Sauce Sans"/>
               </a:rPr>
               <a:t>Akhir TAF · target pipeline (M7.5)</a:t>
             </a:r>
@@ -16423,7 +16423,7 @@
                 <a:solidFill>
                   <a:srgbClr val="C26A0A"/>
                 </a:solidFill>
-                <a:latin typeface="Calibri"/>
+                <a:latin typeface="Open Sauce Sans"/>
               </a:rPr>
               <a:t>Buffer review di luar TAF</a:t>
             </a:r>
@@ -16488,7 +16488,7 @@
                 <a:solidFill>
                   <a:srgbClr val="1B2420"/>
                 </a:solidFill>
-                <a:latin typeface="Calibri"/>
+                <a:latin typeface="Open Sauce Sans"/>
               </a:rPr>
               <a:t>Jalur kritis</a:t>
             </a:r>
@@ -16553,7 +16553,7 @@
                 <a:solidFill>
                   <a:srgbClr val="1B2420"/>
                 </a:solidFill>
-                <a:latin typeface="Calibri"/>
+                <a:latin typeface="Open Sauce Sans"/>
               </a:rPr>
               <a:t>Ada float</a:t>
             </a:r>
@@ -16618,7 +16618,7 @@
                 <a:solidFill>
                   <a:srgbClr val="1B2420"/>
                 </a:solidFill>
-                <a:latin typeface="Calibri"/>
+                <a:latin typeface="Open Sauce Sans"/>
               </a:rPr>
               <a:t>Bergantung review Plan Vivo (tanggal tidak pasti)</a:t>
             </a:r>
@@ -16653,7 +16653,7 @@
                 <a:solidFill>
                   <a:srgbClr val="1F2A44"/>
                 </a:solidFill>
-                <a:latin typeface="Calibri"/>
+                <a:latin typeface="Open Sauce Sans"/>
               </a:rPr>
               <a:t>STEP 2: M8 investasi 2027–28 · M9 PDD 2027–29 · M10 2029–30 · M11 2030→ · M12 ≤5 th · M13 setelah issuance</a:t>
             </a:r>
@@ -16688,7 +16688,7 @@
                 <a:solidFill>
                   <a:srgbClr val="5F6B65"/>
                 </a:solidFill>
-                <a:latin typeface="Calibri"/>
+                <a:latin typeface="Open Sauce Sans"/>
               </a:rPr>
               <a:t>Bulan 1 = Oktober 2026; TAF berakhir bulan 12 (Sep 2027). Review PIN: awal ±6 minggu; tanggapan CAR/NIR ±4 minggu; revisi wajib ≤6 bulan, maks. 3 putaran (Procedures Manual V3.9 §2.2, §9).</a:t>
             </a:r>
@@ -16741,7 +16741,7 @@
                 <a:solidFill>
                   <a:srgbClr val="0E7C6B"/>
                 </a:solidFill>
-                <a:latin typeface="Calibri"/>
+                <a:latin typeface="Open Sauce Sans"/>
               </a:rPr>
               <a:t>OUTPUT 3 · POST-SETAPAK 4 ROADMAP</a:t>
             </a:r>
@@ -16776,7 +16776,7 @@
                 <a:solidFill>
                   <a:srgbClr val="1B2420"/>
                 </a:solidFill>
-                <a:latin typeface="Cambria"/>
+                <a:latin typeface="Open Sauce Sans"/>
               </a:rPr>
               <a:t>Enam milestone lanjutan, dibuka dengan mobilisasi investasi —</a:t>
             </a:r>
@@ -16788,7 +16788,7 @@
                 <a:solidFill>
                   <a:srgbClr val="1B2420"/>
                 </a:solidFill>
-                <a:latin typeface="Cambria"/>
+                <a:latin typeface="Open Sauce Sans"/>
               </a:rPr>
               <a:t>metodologi mangrove yang disetujui adalah syarat pertama PDD</a:t>
             </a:r>
@@ -16823,7 +16823,7 @@
                 <a:solidFill>
                   <a:srgbClr val="5F6B65"/>
                 </a:solidFill>
-                <a:latin typeface="Calibri"/>
+                <a:latin typeface="Open Sauce Sans"/>
               </a:rPr>
               <a:t>4</a:t>
             </a:r>
@@ -16894,7 +16894,7 @@
                 <a:solidFill>
                   <a:srgbClr val="FFFFFF"/>
                 </a:solidFill>
-                <a:latin typeface="Calibri"/>
+                <a:latin typeface="Open Sauce Sans"/>
               </a:rPr>
               <a:t>M8  </a:t>
             </a:r>
@@ -16903,7 +16903,7 @@
                 <a:solidFill>
                   <a:srgbClr val="FFFFFF"/>
                 </a:solidFill>
-                <a:latin typeface="Calibri"/>
+                <a:latin typeface="Open Sauce Sans"/>
               </a:rPr>
               <a:t>Pipeline Listing &amp; Investment Mobilisation</a:t>
             </a:r>
@@ -16938,7 +16938,7 @@
                 <a:solidFill>
                   <a:srgbClr val="8A93A8"/>
                 </a:solidFill>
-                <a:latin typeface="Calibri"/>
+                <a:latin typeface="Open Sauce Sans"/>
               </a:rPr>
               <a:t>SYARAT MULAI</a:t>
             </a:r>
@@ -16973,7 +16973,7 @@
                 <a:solidFill>
                   <a:srgbClr val="1B2420"/>
                 </a:solidFill>
-                <a:latin typeface="Calibri"/>
+                <a:latin typeface="Open Sauce Sans"/>
               </a:rPr>
               <a:t>PIN approved (M7) — status pipeline menjadi dasar kredibilitas ke investor; persiapan materi investor dapat dimulai Jul 2027 di dalam TAF</a:t>
             </a:r>
@@ -17008,7 +17008,7 @@
                 <a:solidFill>
                   <a:srgbClr val="8A93A8"/>
                 </a:solidFill>
-                <a:latin typeface="Calibri"/>
+                <a:latin typeface="Open Sauce Sans"/>
               </a:rPr>
               <a:t>DURASI INDIKATIF</a:t>
             </a:r>
@@ -17043,7 +17043,7 @@
                 <a:solidFill>
                   <a:srgbClr val="1B2420"/>
                 </a:solidFill>
-                <a:latin typeface="Calibri"/>
+                <a:latin typeface="Open Sauce Sans"/>
               </a:rPr>
               <a:t>3–9 bulan (paralel dengan awal PDD)</a:t>
             </a:r>
@@ -17078,7 +17078,7 @@
                 <a:solidFill>
                   <a:srgbClr val="8A93A8"/>
                 </a:solidFill>
-                <a:latin typeface="Calibri"/>
+                <a:latin typeface="Open Sauce Sans"/>
               </a:rPr>
               <a:t>PENDANAAN (INDIKATIF)</a:t>
             </a:r>
@@ -17113,7 +17113,7 @@
                 <a:solidFill>
                   <a:srgbClr val="1B2420"/>
                 </a:solidFill>
-                <a:latin typeface="Calibri"/>
+                <a:latin typeface="Open Sauce Sans"/>
               </a:rPr>
               <a:t>± USD 10–25 rb (legal &amp; penyusunan materi investor)</a:t>
             </a:r>
@@ -17148,7 +17148,7 @@
                 <a:solidFill>
                   <a:srgbClr val="8A93A8"/>
                 </a:solidFill>
-                <a:latin typeface="Calibri"/>
+                <a:latin typeface="Open Sauce Sans"/>
               </a:rPr>
               <a:t>MITRA POTENSIAL</a:t>
             </a:r>
@@ -17183,7 +17183,7 @@
                 <a:solidFill>
                   <a:srgbClr val="1B2420"/>
                 </a:solidFill>
-                <a:latin typeface="Calibri"/>
+                <a:latin typeface="Open Sauce Sans"/>
               </a:rPr>
               <a:t>Investor dampak, pembeli korporat, broker berintegritas, filantropi iklim, BPDLH; konsultan hukum</a:t>
             </a:r>
@@ -17218,7 +17218,7 @@
                 <a:solidFill>
                   <a:srgbClr val="8A93A8"/>
                 </a:solidFill>
-                <a:latin typeface="Calibri"/>
+                <a:latin typeface="Open Sauce Sans"/>
               </a:rPr>
               <a:t>BERGANTUNG PADA STEP 1</a:t>
             </a:r>
@@ -17253,7 +17253,7 @@
                 <a:solidFill>
                   <a:srgbClr val="1B2420"/>
                 </a:solidFill>
-                <a:latin typeface="Calibri"/>
+                <a:latin typeface="Open Sauce Sans"/>
               </a:rPr>
               <a:t>Feasibility &amp; Go/No-Go (M5), prinsip benefit-sharing (M4.5), FPIC i–ii (M3.5)</a:t>
             </a:r>
@@ -17288,7 +17288,7 @@
                 <a:solidFill>
                   <a:srgbClr val="8A93A8"/>
                 </a:solidFill>
-                <a:latin typeface="Calibri"/>
+                <a:latin typeface="Open Sauce Sans"/>
               </a:rPr>
               <a:t>BATAS WAKTU STANDAR</a:t>
             </a:r>
@@ -17323,9 +17323,9 @@
                 <a:solidFill>
                   <a:srgbClr val="1B2420"/>
                 </a:solidFill>
-                <a:latin typeface="Calibri"/>
-              </a:rPr>
-              <a:t>Presale: Permenhut 6/2026 Ps. 10(1) mensyaratkan kepemilikan Unit Karbon untuk perdagangan → kontrak berjangka, bukan penjualan unit; konfirmasi hukum</a:t>
+                <a:latin typeface="Open Sauce Sans"/>
+              </a:rPr>
+              <a:t>Presale = kontrak berjangka (Permenhut 6/2026 Ps. 10(1): dagang butuh Unit Karbon); konfirmasi hukum</a:t>
             </a:r>
           </a:p>
         </p:txBody>
@@ -17424,7 +17424,7 @@
                 <a:solidFill>
                   <a:srgbClr val="FFFFFF"/>
                 </a:solidFill>
-                <a:latin typeface="Calibri"/>
+                <a:latin typeface="Open Sauce Sans"/>
               </a:rPr>
               <a:t>M9  </a:t>
             </a:r>
@@ -17433,7 +17433,7 @@
                 <a:solidFill>
                   <a:srgbClr val="FFFFFF"/>
                 </a:solidFill>
-                <a:latin typeface="Calibri"/>
+                <a:latin typeface="Open Sauce Sans"/>
               </a:rPr>
               <a:t>Full Project Design &amp; PDD Development</a:t>
             </a:r>
@@ -17468,7 +17468,7 @@
                 <a:solidFill>
                   <a:srgbClr val="8A93A8"/>
                 </a:solidFill>
-                <a:latin typeface="Calibri"/>
+                <a:latin typeface="Open Sauce Sans"/>
               </a:rPr>
               <a:t>SYARAT MULAI</a:t>
             </a:r>
@@ -17503,7 +17503,7 @@
                 <a:solidFill>
                   <a:srgbClr val="1B2420"/>
                 </a:solidFill>
-                <a:latin typeface="Calibri"/>
+                <a:latin typeface="Open Sauce Sans"/>
               </a:rPr>
               <a:t>PIN approved (M7); metodologi yang berlaku SUDAH disetujui Plan Vivo; pendanaan PDD tersedia</a:t>
             </a:r>
@@ -17538,7 +17538,7 @@
                 <a:solidFill>
                   <a:srgbClr val="8A93A8"/>
                 </a:solidFill>
-                <a:latin typeface="Calibri"/>
+                <a:latin typeface="Open Sauce Sans"/>
               </a:rPr>
               <a:t>DURASI INDIKATIF</a:t>
             </a:r>
@@ -17573,7 +17573,7 @@
                 <a:solidFill>
                   <a:srgbClr val="1B2420"/>
                 </a:solidFill>
-                <a:latin typeface="Calibri"/>
+                <a:latin typeface="Open Sauce Sans"/>
               </a:rPr>
               <a:t>12–18 bulan (PDD screening ±6 mgg, konsultasi publik 4 mgg, PDD review ±8 mgg; belum termasuk waktu tanggapan)</a:t>
             </a:r>
@@ -17608,7 +17608,7 @@
                 <a:solidFill>
                   <a:srgbClr val="8A93A8"/>
                 </a:solidFill>
-                <a:latin typeface="Calibri"/>
+                <a:latin typeface="Open Sauce Sans"/>
               </a:rPr>
               <a:t>PENDANAAN (INDIKATIF)</a:t>
             </a:r>
@@ -17643,7 +17643,7 @@
                 <a:solidFill>
                   <a:srgbClr val="1B2420"/>
                 </a:solidFill>
-                <a:latin typeface="Calibri"/>
+                <a:latin typeface="Open Sauce Sans"/>
               </a:rPr>
               <a:t>± USD 60–120 rb (indikatif, perlu penawaran)</a:t>
             </a:r>
@@ -17678,7 +17678,7 @@
                 <a:solidFill>
                   <a:srgbClr val="8A93A8"/>
                 </a:solidFill>
-                <a:latin typeface="Calibri"/>
+                <a:latin typeface="Open Sauce Sans"/>
               </a:rPr>
               <a:t>MITRA POTENSIAL</a:t>
             </a:r>
@@ -17713,7 +17713,7 @@
                 <a:solidFill>
                   <a:srgbClr val="1B2420"/>
                 </a:solidFill>
-                <a:latin typeface="Calibri"/>
+                <a:latin typeface="Open Sauce Sans"/>
               </a:rPr>
               <a:t>Tenaga ahli karbon blue carbon; lembaga riset (mis. BRIN, universitas lokal) untuk plot stok karbon; donor lanjutan (TAF follow-on, filantropi iklim, BPDLH)</a:t>
             </a:r>
@@ -17748,7 +17748,7 @@
                 <a:solidFill>
                   <a:srgbClr val="8A93A8"/>
                 </a:solidFill>
-                <a:latin typeface="Calibri"/>
+                <a:latin typeface="Open Sauce Sans"/>
               </a:rPr>
               <a:t>BERGANTUNG PADA STEP 1</a:t>
             </a:r>
@@ -17783,7 +17783,7 @@
                 <a:solidFill>
                   <a:srgbClr val="1B2420"/>
                 </a:solidFill>
-                <a:latin typeface="Calibri"/>
+                <a:latin typeface="Open Sauce Sans"/>
               </a:rPr>
               <a:t>Data room M1–M7, peta partisipatif &amp; KML, BA FPIC i–ii, feasibility &amp; memo metodologi, prinsip benefit-sharing</a:t>
             </a:r>
@@ -17818,7 +17818,7 @@
                 <a:solidFill>
                   <a:srgbClr val="8A93A8"/>
                 </a:solidFill>
-                <a:latin typeface="Calibri"/>
+                <a:latin typeface="Open Sauce Sans"/>
               </a:rPr>
               <a:t>BATAS WAKTU STANDAR</a:t>
             </a:r>
@@ -17853,7 +17853,7 @@
                 <a:solidFill>
                   <a:srgbClr val="1B2420"/>
                 </a:solidFill>
-                <a:latin typeface="Calibri"/>
+                <a:latin typeface="Open Sauce Sans"/>
               </a:rPr>
               <a:t>PDD wajib diajukan ≤3 tahun sejak PIN approved</a:t>
             </a:r>
@@ -17954,7 +17954,7 @@
                 <a:solidFill>
                   <a:srgbClr val="1F2A44"/>
                 </a:solidFill>
-                <a:latin typeface="Calibri"/>
+                <a:latin typeface="Open Sauce Sans"/>
               </a:rPr>
               <a:t>M10  </a:t>
             </a:r>
@@ -17963,7 +17963,7 @@
                 <a:solidFill>
                   <a:srgbClr val="1F2A44"/>
                 </a:solidFill>
-                <a:latin typeface="Calibri"/>
+                <a:latin typeface="Open Sauce Sans"/>
               </a:rPr>
               <a:t>Validation &amp; Project Registration</a:t>
             </a:r>
@@ -17998,7 +17998,7 @@
                 <a:solidFill>
                   <a:srgbClr val="8A93A8"/>
                 </a:solidFill>
-                <a:latin typeface="Calibri"/>
+                <a:latin typeface="Open Sauce Sans"/>
               </a:rPr>
               <a:t>SYARAT MULAI</a:t>
             </a:r>
@@ -18033,7 +18033,7 @@
                 <a:solidFill>
                   <a:srgbClr val="1B2420"/>
                 </a:solidFill>
-                <a:latin typeface="Calibri"/>
+                <a:latin typeface="Open Sauce Sans"/>
               </a:rPr>
               <a:t>PDD review report diterima; public consultation selesai; DPP tercatat di Kemenhut; kontrak VVB/IE; fee validasi (dapat dibiayai pre-financing M8)</a:t>
             </a:r>
@@ -18068,7 +18068,7 @@
                 <a:solidFill>
                   <a:srgbClr val="8A93A8"/>
                 </a:solidFill>
-                <a:latin typeface="Calibri"/>
+                <a:latin typeface="Open Sauce Sans"/>
               </a:rPr>
               <a:t>DURASI INDIKATIF</a:t>
             </a:r>
@@ -18103,7 +18103,7 @@
                 <a:solidFill>
                   <a:srgbClr val="1B2420"/>
                 </a:solidFill>
-                <a:latin typeface="Calibri"/>
+                <a:latin typeface="Open Sauce Sans"/>
               </a:rPr>
               <a:t>6–12 bulan (tergantung ketersediaan VVB/IE)</a:t>
             </a:r>
@@ -18138,7 +18138,7 @@
                 <a:solidFill>
                   <a:srgbClr val="8A93A8"/>
                 </a:solidFill>
-                <a:latin typeface="Calibri"/>
+                <a:latin typeface="Open Sauce Sans"/>
               </a:rPr>
               <a:t>PENDANAAN (INDIKATIF)</a:t>
             </a:r>
@@ -18173,7 +18173,7 @@
                 <a:solidFill>
                   <a:srgbClr val="1B2420"/>
                 </a:solidFill>
-                <a:latin typeface="Calibri"/>
+                <a:latin typeface="Open Sauce Sans"/>
               </a:rPr>
               <a:t>± USD 25–60 rb (microscale cenderung lebih rendah)</a:t>
             </a:r>
@@ -18208,7 +18208,7 @@
                 <a:solidFill>
                   <a:srgbClr val="8A93A8"/>
                 </a:solidFill>
-                <a:latin typeface="Calibri"/>
+                <a:latin typeface="Open Sauce Sans"/>
               </a:rPr>
               <a:t>MITRA POTENSIAL</a:t>
             </a:r>
@@ -18243,7 +18243,7 @@
                 <a:solidFill>
                   <a:srgbClr val="1B2420"/>
                 </a:solidFill>
-                <a:latin typeface="Calibri"/>
+                <a:latin typeface="Open Sauce Sans"/>
               </a:rPr>
               <a:t>VVB terdaftar di Plan Vivo atau Independent Expert; legal counsel</a:t>
             </a:r>
@@ -18278,7 +18278,7 @@
                 <a:solidFill>
                   <a:srgbClr val="8A93A8"/>
                 </a:solidFill>
-                <a:latin typeface="Calibri"/>
+                <a:latin typeface="Open Sauce Sans"/>
               </a:rPr>
               <a:t>BERGANTUNG PADA STEP 1</a:t>
             </a:r>
@@ -18313,7 +18313,7 @@
                 <a:solidFill>
                   <a:srgbClr val="1B2420"/>
                 </a:solidFill>
-                <a:latin typeface="Calibri"/>
+                <a:latin typeface="Open Sauce Sans"/>
               </a:rPr>
               <a:t>Kualitas FPIC, peta &amp; bukti hak dari STEP 1 diuji ulang saat site visit</a:t>
             </a:r>
@@ -18348,7 +18348,7 @@
                 <a:solidFill>
                   <a:srgbClr val="8A93A8"/>
                 </a:solidFill>
-                <a:latin typeface="Calibri"/>
+                <a:latin typeface="Open Sauce Sans"/>
               </a:rPr>
               <a:t>BATAS WAKTU STANDAR</a:t>
             </a:r>
@@ -18383,7 +18383,7 @@
                 <a:solidFill>
                   <a:srgbClr val="1B2420"/>
                 </a:solidFill>
-                <a:latin typeface="Calibri"/>
+                <a:latin typeface="Open Sauce Sans"/>
               </a:rPr>
               <a:t>Validasi selesai ≤3 tahun sejak PDD diajukan</a:t>
             </a:r>
@@ -18484,7 +18484,7 @@
                 <a:solidFill>
                   <a:srgbClr val="FFFFFF"/>
                 </a:solidFill>
-                <a:latin typeface="Calibri"/>
+                <a:latin typeface="Open Sauce Sans"/>
               </a:rPr>
               <a:t>M11  </a:t>
             </a:r>
@@ -18493,7 +18493,7 @@
                 <a:solidFill>
                   <a:srgbClr val="FFFFFF"/>
                 </a:solidFill>
-                <a:latin typeface="Calibri"/>
+                <a:latin typeface="Open Sauce Sans"/>
               </a:rPr>
               <a:t>Project Implementation &amp; Monitoring</a:t>
             </a:r>
@@ -18528,7 +18528,7 @@
                 <a:solidFill>
                   <a:srgbClr val="8A93A8"/>
                 </a:solidFill>
-                <a:latin typeface="Calibri"/>
+                <a:latin typeface="Open Sauce Sans"/>
               </a:rPr>
               <a:t>SYARAT MULAI</a:t>
             </a:r>
@@ -18563,7 +18563,7 @@
                 <a:solidFill>
                   <a:srgbClr val="1B2420"/>
                 </a:solidFill>
-                <a:latin typeface="Calibri"/>
+                <a:latin typeface="Open Sauce Sans"/>
               </a:rPr>
               <a:t>Registrasi (untuk issuance); kegiatan lapangan dapat sudah berjalan sejak STEP 1</a:t>
             </a:r>
@@ -18598,7 +18598,7 @@
                 <a:solidFill>
                   <a:srgbClr val="8A93A8"/>
                 </a:solidFill>
-                <a:latin typeface="Calibri"/>
+                <a:latin typeface="Open Sauce Sans"/>
               </a:rPr>
               <a:t>DURASI INDIKATIF</a:t>
             </a:r>
@@ -18633,7 +18633,7 @@
                 <a:solidFill>
                   <a:srgbClr val="1B2420"/>
                 </a:solidFill>
-                <a:latin typeface="Calibri"/>
+                <a:latin typeface="Open Sauce Sans"/>
               </a:rPr>
               <a:t>Berkelanjutan sepanjang Project Period; laporan tiap 12 bulan</a:t>
             </a:r>
@@ -18668,7 +18668,7 @@
                 <a:solidFill>
                   <a:srgbClr val="8A93A8"/>
                 </a:solidFill>
-                <a:latin typeface="Calibri"/>
+                <a:latin typeface="Open Sauce Sans"/>
               </a:rPr>
               <a:t>PENDANAAN (INDIKATIF)</a:t>
             </a:r>
@@ -18703,7 +18703,7 @@
                 <a:solidFill>
                   <a:srgbClr val="1B2420"/>
                 </a:solidFill>
-                <a:latin typeface="Calibri"/>
+                <a:latin typeface="Open Sauce Sans"/>
               </a:rPr>
               <a:t>± USD 40–90 rb/tahun</a:t>
             </a:r>
@@ -18738,7 +18738,7 @@
                 <a:solidFill>
                   <a:srgbClr val="8A93A8"/>
                 </a:solidFill>
-                <a:latin typeface="Calibri"/>
+                <a:latin typeface="Open Sauce Sans"/>
               </a:rPr>
               <a:t>MITRA POTENSIAL</a:t>
             </a:r>
@@ -18773,7 +18773,7 @@
                 <a:solidFill>
                   <a:srgbClr val="1B2420"/>
                 </a:solidFill>
-                <a:latin typeface="Calibri"/>
+                <a:latin typeface="Open Sauce Sans"/>
               </a:rPr>
               <a:t>KPH/Dinas LHK, DKP, pemerintah desa, pembeli/offtaker (pre-finance)</a:t>
             </a:r>
@@ -18808,7 +18808,7 @@
                 <a:solidFill>
                   <a:srgbClr val="8A93A8"/>
                 </a:solidFill>
-                <a:latin typeface="Calibri"/>
+                <a:latin typeface="Open Sauce Sans"/>
               </a:rPr>
               <a:t>BERGANTUNG PADA STEP 1</a:t>
             </a:r>
@@ -18843,7 +18843,7 @@
                 <a:solidFill>
                   <a:srgbClr val="1B2420"/>
                 </a:solidFill>
-                <a:latin typeface="Calibri"/>
+                <a:latin typeface="Open Sauce Sans"/>
               </a:rPr>
               <a:t>SOP patroli WFD, KUPS, GRM, baseline sosial dari STEP 1</a:t>
             </a:r>
@@ -18878,7 +18878,7 @@
                 <a:solidFill>
                   <a:srgbClr val="8A93A8"/>
                 </a:solidFill>
-                <a:latin typeface="Calibri"/>
+                <a:latin typeface="Open Sauce Sans"/>
               </a:rPr>
               <a:t>BATAS WAKTU STANDAR</a:t>
             </a:r>
@@ -18913,7 +18913,7 @@
                 <a:solidFill>
                   <a:srgbClr val="1B2420"/>
                 </a:solidFill>
-                <a:latin typeface="Calibri"/>
+                <a:latin typeface="Open Sauce Sans"/>
               </a:rPr>
               <a:t>Periode laporan pertama berakhir ≤12 bulan setelah registrasi</a:t>
             </a:r>
@@ -19014,7 +19014,7 @@
                 <a:solidFill>
                   <a:srgbClr val="1F2A44"/>
                 </a:solidFill>
-                <a:latin typeface="Calibri"/>
+                <a:latin typeface="Open Sauce Sans"/>
               </a:rPr>
               <a:t>M12  </a:t>
             </a:r>
@@ -19023,7 +19023,7 @@
                 <a:solidFill>
                   <a:srgbClr val="1F2A44"/>
                 </a:solidFill>
-                <a:latin typeface="Calibri"/>
+                <a:latin typeface="Open Sauce Sans"/>
               </a:rPr>
               <a:t>Verification &amp; Credit Issuance</a:t>
             </a:r>
@@ -19058,7 +19058,7 @@
                 <a:solidFill>
                   <a:srgbClr val="8A93A8"/>
                 </a:solidFill>
-                <a:latin typeface="Calibri"/>
+                <a:latin typeface="Open Sauce Sans"/>
               </a:rPr>
               <a:t>SYARAT MULAI</a:t>
             </a:r>
@@ -19093,7 +19093,7 @@
                 <a:solidFill>
                   <a:srgbClr val="1B2420"/>
                 </a:solidFill>
-                <a:latin typeface="Calibri"/>
+                <a:latin typeface="Open Sauce Sans"/>
               </a:rPr>
               <a:t>Annual Report kontinu; monitoring sesuai PDD; kontrak VVB/IE; fee verifikasi</a:t>
             </a:r>
@@ -19128,7 +19128,7 @@
                 <a:solidFill>
                   <a:srgbClr val="8A93A8"/>
                 </a:solidFill>
-                <a:latin typeface="Calibri"/>
+                <a:latin typeface="Open Sauce Sans"/>
               </a:rPr>
               <a:t>DURASI INDIKATIF</a:t>
             </a:r>
@@ -19163,7 +19163,7 @@
                 <a:solidFill>
                   <a:srgbClr val="1B2420"/>
                 </a:solidFill>
-                <a:latin typeface="Calibri"/>
+                <a:latin typeface="Open Sauce Sans"/>
               </a:rPr>
               <a:t>4–9 bulan per siklus; verifikasi pertama ≤5 tahun setelah validasi, periode berikut ≤5 tahun</a:t>
             </a:r>
@@ -19198,7 +19198,7 @@
                 <a:solidFill>
                   <a:srgbClr val="8A93A8"/>
                 </a:solidFill>
-                <a:latin typeface="Calibri"/>
+                <a:latin typeface="Open Sauce Sans"/>
               </a:rPr>
               <a:t>PENDANAAN (INDIKATIF)</a:t>
             </a:r>
@@ -19233,7 +19233,7 @@
                 <a:solidFill>
                   <a:srgbClr val="1B2420"/>
                 </a:solidFill>
-                <a:latin typeface="Calibri"/>
+                <a:latin typeface="Open Sauce Sans"/>
               </a:rPr>
               <a:t>± USD 20–50 rb per verifikasi + issuance fee per PVC</a:t>
             </a:r>
@@ -19268,7 +19268,7 @@
                 <a:solidFill>
                   <a:srgbClr val="8A93A8"/>
                 </a:solidFill>
-                <a:latin typeface="Calibri"/>
+                <a:latin typeface="Open Sauce Sans"/>
               </a:rPr>
               <a:t>MITRA POTENSIAL</a:t>
             </a:r>
@@ -19303,7 +19303,7 @@
                 <a:solidFill>
                   <a:srgbClr val="1B2420"/>
                 </a:solidFill>
-                <a:latin typeface="Calibri"/>
+                <a:latin typeface="Open Sauce Sans"/>
               </a:rPr>
               <a:t>VVB/IE; Kemenhut/KLH untuk pencatatan nasional</a:t>
             </a:r>
@@ -19338,7 +19338,7 @@
                 <a:solidFill>
                   <a:srgbClr val="8A93A8"/>
                 </a:solidFill>
-                <a:latin typeface="Calibri"/>
+                <a:latin typeface="Open Sauce Sans"/>
               </a:rPr>
               <a:t>BERGANTUNG PADA STEP 1</a:t>
             </a:r>
@@ -19373,7 +19373,7 @@
                 <a:solidFill>
                   <a:srgbClr val="1B2420"/>
                 </a:solidFill>
-                <a:latin typeface="Calibri"/>
+                <a:latin typeface="Open Sauce Sans"/>
               </a:rPr>
               <a:t>Konsistensi data monitoring dengan baseline &amp; peta STEP 1</a:t>
             </a:r>
@@ -19408,7 +19408,7 @@
                 <a:solidFill>
                   <a:srgbClr val="8A93A8"/>
                 </a:solidFill>
-                <a:latin typeface="Calibri"/>
+                <a:latin typeface="Open Sauce Sans"/>
               </a:rPr>
               <a:t>BATAS WAKTU STANDAR</a:t>
             </a:r>
@@ -19443,7 +19443,7 @@
                 <a:solidFill>
                   <a:srgbClr val="1B2420"/>
                 </a:solidFill>
-                <a:latin typeface="Calibri"/>
+                <a:latin typeface="Open Sauce Sans"/>
               </a:rPr>
               <a:t>Gagal verifikasi &gt;2 tahun setelah akhir periode → proses suspensi</a:t>
             </a:r>
@@ -19544,7 +19544,7 @@
                 <a:solidFill>
                   <a:srgbClr val="FFFFFF"/>
                 </a:solidFill>
-                <a:latin typeface="Calibri"/>
+                <a:latin typeface="Open Sauce Sans"/>
               </a:rPr>
               <a:t>M13  </a:t>
             </a:r>
@@ -19553,7 +19553,7 @@
                 <a:solidFill>
                   <a:srgbClr val="FFFFFF"/>
                 </a:solidFill>
-                <a:latin typeface="Calibri"/>
+                <a:latin typeface="Open Sauce Sans"/>
               </a:rPr>
               <a:t>Carbon Sales &amp; Benefit Distribution</a:t>
             </a:r>
@@ -19588,7 +19588,7 @@
                 <a:solidFill>
                   <a:srgbClr val="8A93A8"/>
                 </a:solidFill>
-                <a:latin typeface="Calibri"/>
+                <a:latin typeface="Open Sauce Sans"/>
               </a:rPr>
               <a:t>SYARAT MULAI</a:t>
             </a:r>
@@ -19623,7 +19623,7 @@
                 <a:solidFill>
                   <a:srgbClr val="1B2420"/>
                 </a:solidFill>
-                <a:latin typeface="Calibri"/>
+                <a:latin typeface="Open Sauce Sans"/>
               </a:rPr>
               <a:t>Unit dapat dialokasikan setelah issuance; hanya vPVC yang dapat di-retire</a:t>
             </a:r>
@@ -19658,7 +19658,7 @@
                 <a:solidFill>
                   <a:srgbClr val="8A93A8"/>
                 </a:solidFill>
-                <a:latin typeface="Calibri"/>
+                <a:latin typeface="Open Sauce Sans"/>
               </a:rPr>
               <a:t>DURASI INDIKATIF</a:t>
             </a:r>
@@ -19693,7 +19693,7 @@
                 <a:solidFill>
                   <a:srgbClr val="1B2420"/>
                 </a:solidFill>
-                <a:latin typeface="Calibri"/>
+                <a:latin typeface="Open Sauce Sans"/>
               </a:rPr>
               <a:t>Mengikuti jadwal issuance; laporan offset ke Menteri (Ps. 54)</a:t>
             </a:r>
@@ -19728,7 +19728,7 @@
                 <a:solidFill>
                   <a:srgbClr val="8A93A8"/>
                 </a:solidFill>
-                <a:latin typeface="Calibri"/>
+                <a:latin typeface="Open Sauce Sans"/>
               </a:rPr>
               <a:t>PENDANAAN (INDIKATIF)</a:t>
             </a:r>
@@ -19763,7 +19763,7 @@
                 <a:solidFill>
                   <a:srgbClr val="1B2420"/>
                 </a:solidFill>
-                <a:latin typeface="Calibri"/>
+                <a:latin typeface="Open Sauce Sans"/>
               </a:rPr>
               <a:t>± USD 10–25 rb/tahun (marketing &amp; administrasi)</a:t>
             </a:r>
@@ -19798,7 +19798,7 @@
                 <a:solidFill>
                   <a:srgbClr val="8A93A8"/>
                 </a:solidFill>
-                <a:latin typeface="Calibri"/>
+                <a:latin typeface="Open Sauce Sans"/>
               </a:rPr>
               <a:t>MITRA POTENSIAL</a:t>
             </a:r>
@@ -19833,7 +19833,7 @@
                 <a:solidFill>
                   <a:srgbClr val="1B2420"/>
                 </a:solidFill>
-                <a:latin typeface="Calibri"/>
+                <a:latin typeface="Open Sauce Sans"/>
               </a:rPr>
               <a:t>Pembeli korporat/broker berintegritas, IDXCarbon (bila relevan), lembaga keuangan desa/BUMDes</a:t>
             </a:r>
@@ -19868,7 +19868,7 @@
                 <a:solidFill>
                   <a:srgbClr val="8A93A8"/>
                 </a:solidFill>
-                <a:latin typeface="Calibri"/>
+                <a:latin typeface="Open Sauce Sans"/>
               </a:rPr>
               <a:t>BERGANTUNG PADA STEP 1</a:t>
             </a:r>
@@ -19903,7 +19903,7 @@
                 <a:solidFill>
                   <a:srgbClr val="1B2420"/>
                 </a:solidFill>
-                <a:latin typeface="Calibri"/>
+                <a:latin typeface="Open Sauce Sans"/>
               </a:rPr>
               <a:t>Prinsip benefit-sharing (M4.5), tata kelola LPHD (M4.6)</a:t>
             </a:r>
@@ -19938,7 +19938,7 @@
                 <a:solidFill>
                   <a:srgbClr val="8A93A8"/>
                 </a:solidFill>
-                <a:latin typeface="Calibri"/>
+                <a:latin typeface="Open Sauce Sans"/>
               </a:rPr>
               <a:t>BATAS WAKTU STANDAR</a:t>
             </a:r>
@@ -19973,7 +19973,7 @@
                 <a:solidFill>
                   <a:srgbClr val="1B2420"/>
                 </a:solidFill>
-                <a:latin typeface="Calibri"/>
+                <a:latin typeface="Open Sauce Sans"/>
               </a:rPr>
               <a:t>≥60% pendapatan PVC ke peserta &amp; pihak lokal (dapat dirata-rata sepanjang Crediting Period)</a:t>
             </a:r>
@@ -20038,7 +20038,7 @@
                 <a:solidFill>
                   <a:srgbClr val="5F6B65"/>
                 </a:solidFill>
-                <a:latin typeface="Calibri"/>
+                <a:latin typeface="Open Sauce Sans"/>
               </a:rPr>
               <a:t>Durasi review dari Procedures Manual V3.9 §9; batas 3 tahun §2.2 &amp; §4.4; verifikasi §8. Angka biaya = asumsi perencanaan, bukan tarif Plan Vivo — konfirmasi lewat penawaran VVB/IE dan dokumen Costs &amp; fees.</a:t>
             </a:r>
@@ -20091,7 +20091,7 @@
                 <a:solidFill>
                   <a:srgbClr val="0E7C6B"/>
                 </a:solidFill>
-                <a:latin typeface="Calibri"/>
+                <a:latin typeface="Open Sauce Sans"/>
               </a:rPr>
               <a:t>OUTPUT 5 · TRANSITION READINESS CHECKLIST</a:t>
             </a:r>
@@ -20126,7 +20126,7 @@
                 <a:solidFill>
                   <a:srgbClr val="1B2420"/>
                 </a:solidFill>
-                <a:latin typeface="Cambria"/>
+                <a:latin typeface="Open Sauce Sans"/>
               </a:rPr>
               <a:t>Delapan belas syarat memindahkan proyek dari pipeline ke investasi dan penyusunan PDD</a:t>
             </a:r>
@@ -20161,7 +20161,7 @@
                 <a:solidFill>
                   <a:srgbClr val="5F6B65"/>
                 </a:solidFill>
-                <a:latin typeface="Calibri"/>
+                <a:latin typeface="Open Sauce Sans"/>
               </a:rPr>
               <a:t>5</a:t>
             </a:r>
@@ -20196,7 +20196,7 @@
                 <a:solidFill>
                   <a:srgbClr val="0E7C6B"/>
                 </a:solidFill>
-                <a:latin typeface="Calibri"/>
+                <a:latin typeface="Open Sauce Sans"/>
               </a:rPr>
               <a:t>LEGAL &amp; HAK</a:t>
             </a:r>
@@ -20261,7 +20261,7 @@
                 <a:solidFill>
                   <a:srgbClr val="5F6B65"/>
                 </a:solidFill>
-                <a:latin typeface="Calibri"/>
+                <a:latin typeface="Open Sauce Sans"/>
               </a:rPr>
               <a:t>T01</a:t>
             </a:r>
@@ -20296,7 +20296,7 @@
                 <a:solidFill>
                   <a:srgbClr val="1B2420"/>
                 </a:solidFill>
-                <a:latin typeface="Calibri"/>
+                <a:latin typeface="Open Sauce Sans"/>
               </a:rPr>
               <a:t>PIN approved dan proyek tercantum di Plan Vivo pipeline (bukti tertulis)</a:t>
             </a:r>
@@ -20331,7 +20331,7 @@
                 <a:solidFill>
                   <a:srgbClr val="5F6B65"/>
                 </a:solidFill>
-                <a:latin typeface="Calibri"/>
+                <a:latin typeface="Open Sauce Sans"/>
               </a:rPr>
               <a:t>M7.5</a:t>
             </a:r>
@@ -20396,7 +20396,7 @@
                 <a:solidFill>
                   <a:srgbClr val="5F6B65"/>
                 </a:solidFill>
-                <a:latin typeface="Calibri"/>
+                <a:latin typeface="Open Sauce Sans"/>
               </a:rPr>
               <a:t>T02</a:t>
             </a:r>
@@ -20431,7 +20431,7 @@
                 <a:solidFill>
                   <a:srgbClr val="1B2420"/>
                 </a:solidFill>
-                <a:latin typeface="Calibri"/>
+                <a:latin typeface="Open Sauce Sans"/>
               </a:rPr>
               <a:t>SK Hutan Desa &amp; SK LPHD berlaku; tidak ada sengketa batas terbuka</a:t>
             </a:r>
@@ -20466,7 +20466,7 @@
                 <a:solidFill>
                   <a:srgbClr val="5F6B65"/>
                 </a:solidFill>
-                <a:latin typeface="Calibri"/>
+                <a:latin typeface="Open Sauce Sans"/>
               </a:rPr>
               <a:t>M1.4, M5.1</a:t>
             </a:r>
@@ -20531,7 +20531,7 @@
                 <a:solidFill>
                   <a:srgbClr val="5F6B65"/>
                 </a:solidFill>
-                <a:latin typeface="Calibri"/>
+                <a:latin typeface="Open Sauce Sans"/>
               </a:rPr>
               <a:t>T03</a:t>
             </a:r>
@@ -20566,7 +20566,7 @@
                 <a:solidFill>
                   <a:srgbClr val="1B2420"/>
                 </a:solidFill>
-                <a:latin typeface="Calibri"/>
+                <a:latin typeface="Open Sauce Sans"/>
               </a:rPr>
               <a:t>Posisi hak karbon &amp; jalur otorisasi nasional dipetakan (Permenhut 6/2026, SRN/SRUK, MRA Plan Vivo)</a:t>
             </a:r>
@@ -20601,7 +20601,7 @@
                 <a:solidFill>
                   <a:srgbClr val="5F6B65"/>
                 </a:solidFill>
-                <a:latin typeface="Calibri"/>
+                <a:latin typeface="Open Sauce Sans"/>
               </a:rPr>
               <a:t>M5.6</a:t>
             </a:r>
@@ -20636,7 +20636,7 @@
                 <a:solidFill>
                   <a:srgbClr val="0E7C6B"/>
                 </a:solidFill>
-                <a:latin typeface="Calibri"/>
+                <a:latin typeface="Open Sauce Sans"/>
               </a:rPr>
               <a:t>PERSETUJUAN MASYARAKAT</a:t>
             </a:r>
@@ -20701,7 +20701,7 @@
                 <a:solidFill>
                   <a:srgbClr val="5F6B65"/>
                 </a:solidFill>
-                <a:latin typeface="Calibri"/>
+                <a:latin typeface="Open Sauce Sans"/>
               </a:rPr>
               <a:t>T04</a:t>
             </a:r>
@@ -20736,7 +20736,7 @@
                 <a:solidFill>
                   <a:srgbClr val="1B2420"/>
                 </a:solidFill>
-                <a:latin typeface="Calibri"/>
+                <a:latin typeface="Open Sauce Sans"/>
               </a:rPr>
               <a:t>BA FPIC tahap i–ii lengkap; rencana FPIC tahap iii (implementasi) &amp; Project Agreement</a:t>
             </a:r>
@@ -20771,7 +20771,7 @@
                 <a:solidFill>
                   <a:srgbClr val="5F6B65"/>
                 </a:solidFill>
-                <a:latin typeface="Calibri"/>
+                <a:latin typeface="Open Sauce Sans"/>
               </a:rPr>
               <a:t>M3.5</a:t>
             </a:r>
@@ -20836,7 +20836,7 @@
                 <a:solidFill>
                   <a:srgbClr val="5F6B65"/>
                 </a:solidFill>
-                <a:latin typeface="Calibri"/>
+                <a:latin typeface="Open Sauce Sans"/>
               </a:rPr>
               <a:t>T05</a:t>
             </a:r>
@@ -20871,7 +20871,7 @@
                 <a:solidFill>
                   <a:srgbClr val="1B2420"/>
                 </a:solidFill>
-                <a:latin typeface="Calibri"/>
+                <a:latin typeface="Open Sauce Sans"/>
               </a:rPr>
               <a:t>GRM berjalan ≥6 bulan dengan register pengaduan</a:t>
             </a:r>
@@ -20906,7 +20906,7 @@
                 <a:solidFill>
                   <a:srgbClr val="5F6B65"/>
                 </a:solidFill>
-                <a:latin typeface="Calibri"/>
+                <a:latin typeface="Open Sauce Sans"/>
               </a:rPr>
               <a:t>M3.7</a:t>
             </a:r>
@@ -20941,7 +20941,7 @@
                 <a:solidFill>
                   <a:srgbClr val="0E7C6B"/>
                 </a:solidFill>
-                <a:latin typeface="Calibri"/>
+                <a:latin typeface="Open Sauce Sans"/>
               </a:rPr>
               <a:t>DATA</a:t>
             </a:r>
@@ -21006,7 +21006,7 @@
                 <a:solidFill>
                   <a:srgbClr val="5F6B65"/>
                 </a:solidFill>
-                <a:latin typeface="Calibri"/>
+                <a:latin typeface="Open Sauce Sans"/>
               </a:rPr>
               <a:t>T06</a:t>
             </a:r>
@@ -21041,7 +21041,7 @@
                 <a:solidFill>
                   <a:srgbClr val="1B2420"/>
                 </a:solidFill>
-                <a:latin typeface="Calibri"/>
+                <a:latin typeface="Open Sauce Sans"/>
               </a:rPr>
               <a:t>Peta partisipatif &amp; KML batas Project Region/Area</a:t>
             </a:r>
@@ -21076,7 +21076,7 @@
                 <a:solidFill>
                   <a:srgbClr val="5F6B65"/>
                 </a:solidFill>
-                <a:latin typeface="Calibri"/>
+                <a:latin typeface="Open Sauce Sans"/>
               </a:rPr>
               <a:t>M3.3</a:t>
             </a:r>
@@ -21141,7 +21141,7 @@
                 <a:solidFill>
                   <a:srgbClr val="5F6B65"/>
                 </a:solidFill>
-                <a:latin typeface="Calibri"/>
+                <a:latin typeface="Open Sauce Sans"/>
               </a:rPr>
               <a:t>T07</a:t>
             </a:r>
@@ -21176,7 +21176,7 @@
                 <a:solidFill>
                   <a:srgbClr val="1B2420"/>
                 </a:solidFill>
-                <a:latin typeface="Calibri"/>
+                <a:latin typeface="Open Sauce Sans"/>
               </a:rPr>
               <a:t>Peta tutupan lahan historis &amp; analisis driver</a:t>
             </a:r>
@@ -21211,7 +21211,7 @@
                 <a:solidFill>
                   <a:srgbClr val="5F6B65"/>
                 </a:solidFill>
-                <a:latin typeface="Calibri"/>
+                <a:latin typeface="Open Sauce Sans"/>
               </a:rPr>
               <a:t>M5.2, M5.3</a:t>
             </a:r>
@@ -21246,7 +21246,7 @@
                 <a:solidFill>
                   <a:srgbClr val="C26A0A"/>
                 </a:solidFill>
-                <a:latin typeface="Calibri"/>
+                <a:latin typeface="Open Sauce Sans"/>
               </a:rPr>
               <a:t>DATA GAP</a:t>
             </a:r>
@@ -21311,7 +21311,7 @@
                 <a:solidFill>
                   <a:srgbClr val="5F6B65"/>
                 </a:solidFill>
-                <a:latin typeface="Calibri"/>
+                <a:latin typeface="Open Sauce Sans"/>
               </a:rPr>
               <a:t>T08</a:t>
             </a:r>
@@ -21346,7 +21346,7 @@
                 <a:solidFill>
                   <a:srgbClr val="1B2420"/>
                 </a:solidFill>
-                <a:latin typeface="Calibri"/>
+                <a:latin typeface="Open Sauce Sans"/>
               </a:rPr>
               <a:t>Inventarisasi stok karbon lapangan (plot biomassa &amp; tanah mangrove)</a:t>
             </a:r>
@@ -21381,7 +21381,7 @@
                 <a:solidFill>
                   <a:srgbClr val="5F6B65"/>
                 </a:solidFill>
-                <a:latin typeface="Calibri"/>
+                <a:latin typeface="Open Sauce Sans"/>
               </a:rPr>
               <a:t>→ M9</a:t>
             </a:r>
@@ -21446,7 +21446,7 @@
                 <a:solidFill>
                   <a:srgbClr val="5F6B65"/>
                 </a:solidFill>
-                <a:latin typeface="Calibri"/>
+                <a:latin typeface="Open Sauce Sans"/>
               </a:rPr>
               <a:t>T09</a:t>
             </a:r>
@@ -21481,7 +21481,7 @@
                 <a:solidFill>
                   <a:srgbClr val="1B2420"/>
                 </a:solidFill>
-                <a:latin typeface="Calibri"/>
+                <a:latin typeface="Open Sauce Sans"/>
               </a:rPr>
               <a:t>Baseline sosial-ekonomi rumah tangga (well-being) yang representatif</a:t>
             </a:r>
@@ -21516,7 +21516,7 @@
                 <a:solidFill>
                   <a:srgbClr val="5F6B65"/>
                 </a:solidFill>
-                <a:latin typeface="Calibri"/>
+                <a:latin typeface="Open Sauce Sans"/>
               </a:rPr>
               <a:t>→ M9</a:t>
             </a:r>
@@ -21581,7 +21581,7 @@
                 <a:solidFill>
                   <a:srgbClr val="5F6B65"/>
                 </a:solidFill>
-                <a:latin typeface="Calibri"/>
+                <a:latin typeface="Open Sauce Sans"/>
               </a:rPr>
               <a:t>T10</a:t>
             </a:r>
@@ -21616,7 +21616,7 @@
                 <a:solidFill>
                   <a:srgbClr val="1B2420"/>
                 </a:solidFill>
-                <a:latin typeface="Calibri"/>
+                <a:latin typeface="Open Sauce Sans"/>
               </a:rPr>
               <a:t>Baseline biodiversitas</a:t>
             </a:r>
@@ -21651,7 +21651,7 @@
                 <a:solidFill>
                   <a:srgbClr val="5F6B65"/>
                 </a:solidFill>
-                <a:latin typeface="Calibri"/>
+                <a:latin typeface="Open Sauce Sans"/>
               </a:rPr>
               <a:t>→ M9</a:t>
             </a:r>
@@ -21686,7 +21686,7 @@
                 <a:solidFill>
                   <a:srgbClr val="0E7C6B"/>
                 </a:solidFill>
-                <a:latin typeface="Calibri"/>
+                <a:latin typeface="Open Sauce Sans"/>
               </a:rPr>
               <a:t>METODOLOGI</a:t>
             </a:r>
@@ -21751,7 +21751,7 @@
                 <a:solidFill>
                   <a:srgbClr val="5F6B65"/>
                 </a:solidFill>
-                <a:latin typeface="Calibri"/>
+                <a:latin typeface="Open Sauce Sans"/>
               </a:rPr>
               <a:t>T11</a:t>
             </a:r>
@@ -21786,7 +21786,7 @@
                 <a:solidFill>
                   <a:srgbClr val="1B2420"/>
                 </a:solidFill>
-                <a:latin typeface="Calibri"/>
+                <a:latin typeface="Open Sauce Sans"/>
               </a:rPr>
               <a:t>Metodologi/modul yang dipilih sudah disetujui Plan Vivo</a:t>
             </a:r>
@@ -21821,7 +21821,7 @@
                 <a:solidFill>
                   <a:srgbClr val="5F6B65"/>
                 </a:solidFill>
-                <a:latin typeface="Calibri"/>
+                <a:latin typeface="Open Sauce Sans"/>
               </a:rPr>
               <a:t>M5.4 → M9</a:t>
             </a:r>
@@ -21856,7 +21856,7 @@
                 <a:solidFill>
                   <a:srgbClr val="0E7C6B"/>
                 </a:solidFill>
-                <a:latin typeface="Calibri"/>
+                <a:latin typeface="Open Sauce Sans"/>
               </a:rPr>
               <a:t>KELEMBAGAAN</a:t>
             </a:r>
@@ -21921,7 +21921,7 @@
                 <a:solidFill>
                   <a:srgbClr val="5F6B65"/>
                 </a:solidFill>
-                <a:latin typeface="Calibri"/>
+                <a:latin typeface="Open Sauce Sans"/>
               </a:rPr>
               <a:t>T12</a:t>
             </a:r>
@@ -21956,7 +21956,7 @@
                 <a:solidFill>
                   <a:srgbClr val="1B2420"/>
                 </a:solidFill>
-                <a:latin typeface="Calibri"/>
+                <a:latin typeface="Open Sauce Sans"/>
               </a:rPr>
               <a:t>SAMPAN dikonfirmasi sebagai Project Coordinator; tim PDD terbentuk</a:t>
             </a:r>
@@ -21991,7 +21991,7 @@
                 <a:solidFill>
                   <a:srgbClr val="5F6B65"/>
                 </a:solidFill>
-                <a:latin typeface="Calibri"/>
+                <a:latin typeface="Open Sauce Sans"/>
               </a:rPr>
               <a:t>M1.3</a:t>
             </a:r>
@@ -22056,7 +22056,7 @@
                 <a:solidFill>
                   <a:srgbClr val="5F6B65"/>
                 </a:solidFill>
-                <a:latin typeface="Calibri"/>
+                <a:latin typeface="Open Sauce Sans"/>
               </a:rPr>
               <a:t>T13</a:t>
             </a:r>
@@ -22091,7 +22091,7 @@
                 <a:solidFill>
                   <a:srgbClr val="1B2420"/>
                 </a:solidFill>
-                <a:latin typeface="Calibri"/>
+                <a:latin typeface="Open Sauce Sans"/>
               </a:rPr>
               <a:t>LPHD, KUPS, WFD aktif dengan rencana kerja</a:t>
             </a:r>
@@ -22126,7 +22126,7 @@
                 <a:solidFill>
                   <a:srgbClr val="5F6B65"/>
                 </a:solidFill>
-                <a:latin typeface="Calibri"/>
+                <a:latin typeface="Open Sauce Sans"/>
               </a:rPr>
               <a:t>M4</a:t>
             </a:r>
@@ -22161,7 +22161,7 @@
                 <a:solidFill>
                   <a:srgbClr val="0E7C6B"/>
                 </a:solidFill>
-                <a:latin typeface="Calibri"/>
+                <a:latin typeface="Open Sauce Sans"/>
               </a:rPr>
               <a:t>PENDANAAN</a:t>
             </a:r>
@@ -22226,7 +22226,7 @@
                 <a:solidFill>
                   <a:srgbClr val="5F6B65"/>
                 </a:solidFill>
-                <a:latin typeface="Calibri"/>
+                <a:latin typeface="Open Sauce Sans"/>
               </a:rPr>
               <a:t>T14</a:t>
             </a:r>
@@ -22261,7 +22261,7 @@
                 <a:solidFill>
                   <a:srgbClr val="1B2420"/>
                 </a:solidFill>
-                <a:latin typeface="Calibri"/>
+                <a:latin typeface="Open Sauce Sans"/>
               </a:rPr>
               <a:t>Pendanaan PDD + validasi teridentifikasi (komitmen atau proposal terkirim)</a:t>
             </a:r>
@@ -22296,7 +22296,7 @@
                 <a:solidFill>
                   <a:srgbClr val="5F6B65"/>
                 </a:solidFill>
-                <a:latin typeface="Calibri"/>
+                <a:latin typeface="Open Sauce Sans"/>
               </a:rPr>
               <a:t>M7.6</a:t>
             </a:r>
@@ -22361,7 +22361,7 @@
                 <a:solidFill>
                   <a:srgbClr val="5F6B65"/>
                 </a:solidFill>
-                <a:latin typeface="Calibri"/>
+                <a:latin typeface="Open Sauce Sans"/>
               </a:rPr>
               <a:t>T15</a:t>
             </a:r>
@@ -22396,7 +22396,7 @@
                 <a:solidFill>
                   <a:srgbClr val="1B2420"/>
                 </a:solidFill>
-                <a:latin typeface="Calibri"/>
+                <a:latin typeface="Open Sauce Sans"/>
               </a:rPr>
               <a:t>Anggaran fee Plan Vivo (PDD/validasi) dan audit VVB/IE</a:t>
             </a:r>
@@ -22431,7 +22431,7 @@
                 <a:solidFill>
                   <a:srgbClr val="5F6B65"/>
                 </a:solidFill>
-                <a:latin typeface="Calibri"/>
+                <a:latin typeface="Open Sauce Sans"/>
               </a:rPr>
               <a:t>M7.6</a:t>
             </a:r>
@@ -22466,7 +22466,7 @@
                 <a:solidFill>
                   <a:srgbClr val="0E7C6B"/>
                 </a:solidFill>
-                <a:latin typeface="Calibri"/>
+                <a:latin typeface="Open Sauce Sans"/>
               </a:rPr>
               <a:t>WAKTU</a:t>
             </a:r>
@@ -22531,7 +22531,7 @@
                 <a:solidFill>
                   <a:srgbClr val="5F6B65"/>
                 </a:solidFill>
-                <a:latin typeface="Calibri"/>
+                <a:latin typeface="Open Sauce Sans"/>
               </a:rPr>
               <a:t>T16</a:t>
             </a:r>
@@ -22566,7 +22566,7 @@
                 <a:solidFill>
                   <a:srgbClr val="1B2420"/>
                 </a:solidFill>
-                <a:latin typeface="Calibri"/>
+                <a:latin typeface="Open Sauce Sans"/>
               </a:rPr>
               <a:t>Jadwal PDD mematuhi batas 3 tahun sejak PIN approved</a:t>
             </a:r>
@@ -22601,7 +22601,7 @@
                 <a:solidFill>
                   <a:srgbClr val="5F6B65"/>
                 </a:solidFill>
-                <a:latin typeface="Calibri"/>
+                <a:latin typeface="Open Sauce Sans"/>
               </a:rPr>
               <a:t>M7.5</a:t>
             </a:r>
@@ -22636,7 +22636,7 @@
                 <a:solidFill>
                   <a:srgbClr val="0E7C6B"/>
                 </a:solidFill>
-                <a:latin typeface="Calibri"/>
+                <a:latin typeface="Open Sauce Sans"/>
               </a:rPr>
               <a:t>INVESTASI</a:t>
             </a:r>
@@ -22701,7 +22701,7 @@
                 <a:solidFill>
                   <a:srgbClr val="5F6B65"/>
                 </a:solidFill>
-                <a:latin typeface="Calibri"/>
+                <a:latin typeface="Open Sauce Sans"/>
               </a:rPr>
               <a:t>T17</a:t>
             </a:r>
@@ -22736,7 +22736,7 @@
                 <a:solidFill>
                   <a:srgbClr val="1B2420"/>
                 </a:solidFill>
-                <a:latin typeface="Calibri"/>
+                <a:latin typeface="Open Sauce Sans"/>
               </a:rPr>
               <a:t>Materi investor (teaser, estimasi, model keuangan) &amp; daftar calon investor/offtaker siap</a:t>
             </a:r>
@@ -22771,7 +22771,7 @@
                 <a:solidFill>
                   <a:srgbClr val="5F6B65"/>
                 </a:solidFill>
-                <a:latin typeface="Calibri"/>
+                <a:latin typeface="Open Sauce Sans"/>
               </a:rPr>
               <a:t>M5, M8</a:t>
             </a:r>
@@ -22806,7 +22806,7 @@
                 <a:solidFill>
                   <a:srgbClr val="0E7C6B"/>
                 </a:solidFill>
-                <a:latin typeface="Calibri"/>
+                <a:latin typeface="Open Sauce Sans"/>
               </a:rPr>
               <a:t>REGULASI</a:t>
             </a:r>
@@ -22871,7 +22871,7 @@
                 <a:solidFill>
                   <a:srgbClr val="5F6B65"/>
                 </a:solidFill>
-                <a:latin typeface="Calibri"/>
+                <a:latin typeface="Open Sauce Sans"/>
               </a:rPr>
               <a:t>T18</a:t>
             </a:r>
@@ -22906,7 +22906,7 @@
                 <a:solidFill>
                   <a:srgbClr val="1B2420"/>
                 </a:solidFill>
-                <a:latin typeface="Calibri"/>
+                <a:latin typeface="Open Sauce Sans"/>
               </a:rPr>
               <a:t>Status SAMPAN sebagai mitra/pendamping teregistrasi &amp; rencana pencatatan DPP (Permenhut 6/2026)</a:t>
             </a:r>
@@ -22941,7 +22941,7 @@
                 <a:solidFill>
                   <a:srgbClr val="5F6B65"/>
                 </a:solidFill>
-                <a:latin typeface="Calibri"/>
+                <a:latin typeface="Open Sauce Sans"/>
               </a:rPr>
               <a:t>M1.4, M8</a:t>
             </a:r>
@@ -22976,7 +22976,7 @@
                 <a:solidFill>
                   <a:srgbClr val="5F6B65"/>
                 </a:solidFill>
-                <a:latin typeface="Calibri"/>
+                <a:latin typeface="Open Sauce Sans"/>
               </a:rPr>
               <a:t>Kolom kanan = milestone sumber bukti. Data gap (T08–T10) belum menjadi kewajiban SETAPAK 4 dan diselesaikan di M9 (PDD).</a:t>
             </a:r>
